--- a/deliverables/Sanket-Pitch-Deck-Yuva6.pptx
+++ b/deliverables/Sanket-Pitch-Deck-Yuva6.pptx
@@ -3113,8 +3113,8 @@
         </p:nvSpPr>
         <p:spPr>
           <a:xfrm>
-            <a:off x="0" y="731520"/>
-            <a:ext cx="12191695" cy="365760"/>
+            <a:off x="0" y="548640"/>
+            <a:ext cx="12191695" cy="274320"/>
           </a:xfrm>
           <a:prstGeom prst="rect">
             <a:avLst/>
@@ -3135,7 +3135,7 @@
               </a:defRPr>
             </a:pPr>
             <a:r>
-              <a:t>Y   U   V   A     6   .   0     —     I   N   T   E   R   -   U   N   I   V   E   R   S   I   T   Y     R   O   U   N   D</a:t>
+              <a:t>Y U V A  6 . 0  —  I N T E R - U N I V E R S I T Y  R O U N D</a:t>
             </a:r>
           </a:p>
         </p:txBody>
@@ -3148,8 +3148,8 @@
         </p:nvSpPr>
         <p:spPr>
           <a:xfrm>
-            <a:off x="0" y="1188720"/>
-            <a:ext cx="12191695" cy="365760"/>
+            <a:off x="0" y="914400"/>
+            <a:ext cx="12191695" cy="274320"/>
           </a:xfrm>
           <a:prstGeom prst="rect">
             <a:avLst/>
@@ -3163,14 +3163,14 @@
           <a:lstStyle/>
           <a:p>
             <a:pPr algn="ctr">
-              <a:defRPr sz="1300" b="1">
+              <a:defRPr sz="1200" b="1">
                 <a:solidFill>
                   <a:srgbClr val="C9A961"/>
                 </a:solidFill>
               </a:defRPr>
             </a:pPr>
             <a:r>
-              <a:t>PROBLEM STATEMENT: INDIAN SIGN LANGUAGE FOR ALL</a:t>
+              <a:t>PROBLEM STATEMENT :  I N D I A N   S I G N   L A N G U A G E   F O R   A L L</a:t>
             </a:r>
           </a:p>
         </p:txBody>
@@ -3183,8 +3183,8 @@
         </p:nvSpPr>
         <p:spPr>
           <a:xfrm>
-            <a:off x="5029200" y="1828800"/>
-            <a:ext cx="2133295" cy="18288"/>
+            <a:off x="4754880" y="1463040"/>
+            <a:ext cx="2651760" cy="16459"/>
           </a:xfrm>
           <a:prstGeom prst="rect">
             <a:avLst/>
@@ -3226,8 +3226,8 @@
         </p:nvSpPr>
         <p:spPr>
           <a:xfrm>
-            <a:off x="0" y="2103120"/>
-            <a:ext cx="12191695" cy="1371600"/>
+            <a:off x="0" y="1828800"/>
+            <a:ext cx="12191695" cy="1280160"/>
           </a:xfrm>
           <a:prstGeom prst="rect">
             <a:avLst/>
@@ -3241,7 +3241,7 @@
           <a:lstStyle/>
           <a:p>
             <a:pPr algn="ctr">
-              <a:defRPr sz="8000" b="1">
+              <a:defRPr sz="8800" b="1">
                 <a:solidFill>
                   <a:srgbClr val="FFFFFF"/>
                 </a:solidFill>
@@ -3261,7 +3261,7 @@
         </p:nvSpPr>
         <p:spPr>
           <a:xfrm>
-            <a:off x="0" y="3566160"/>
+            <a:off x="0" y="3200400"/>
             <a:ext cx="12191695" cy="457200"/>
           </a:xfrm>
           <a:prstGeom prst="rect">
@@ -3276,7 +3276,7 @@
           <a:lstStyle/>
           <a:p>
             <a:pPr algn="ctr">
-              <a:defRPr sz="2600" b="0">
+              <a:defRPr sz="2400" b="0">
                 <a:solidFill>
                   <a:srgbClr val="C9A961"/>
                 </a:solidFill>
@@ -3296,8 +3296,8 @@
         </p:nvSpPr>
         <p:spPr>
           <a:xfrm>
-            <a:off x="0" y="4114800"/>
-            <a:ext cx="12191695" cy="457200"/>
+            <a:off x="0" y="3749039"/>
+            <a:ext cx="12191695" cy="365760"/>
           </a:xfrm>
           <a:prstGeom prst="rect">
             <a:avLst/>
@@ -3311,9 +3311,9 @@
           <a:lstStyle/>
           <a:p>
             <a:pPr algn="ctr">
-              <a:defRPr sz="1700" b="0">
-                <a:solidFill>
-                  <a:srgbClr val="E0E0E0"/>
+              <a:defRPr sz="1600" b="0">
+                <a:solidFill>
+                  <a:srgbClr val="D0D0D0"/>
                 </a:solidFill>
               </a:defRPr>
             </a:pPr>
@@ -3331,8 +3331,8 @@
         </p:nvSpPr>
         <p:spPr>
           <a:xfrm>
-            <a:off x="5029200" y="4754880"/>
-            <a:ext cx="2133295" cy="18288"/>
+            <a:off x="4754880" y="4297680"/>
+            <a:ext cx="2651760" cy="16459"/>
           </a:xfrm>
           <a:prstGeom prst="rect">
             <a:avLst/>
@@ -3374,8 +3374,8 @@
         </p:nvSpPr>
         <p:spPr>
           <a:xfrm>
-            <a:off x="0" y="5029200"/>
-            <a:ext cx="12191695" cy="365760"/>
+            <a:off x="0" y="4572000"/>
+            <a:ext cx="12191695" cy="320040"/>
           </a:xfrm>
           <a:prstGeom prst="rect">
             <a:avLst/>
@@ -3409,8 +3409,8 @@
         </p:nvSpPr>
         <p:spPr>
           <a:xfrm>
-            <a:off x="0" y="5394960"/>
-            <a:ext cx="12191695" cy="320040"/>
+            <a:off x="0" y="4937760"/>
+            <a:ext cx="12191695" cy="274320"/>
           </a:xfrm>
           <a:prstGeom prst="rect">
             <a:avLst/>
@@ -3424,28 +3424,190 @@
           <a:lstStyle/>
           <a:p>
             <a:pPr algn="ctr">
-              <a:defRPr sz="1100" b="0">
+              <a:defRPr sz="1000" b="0">
                 <a:solidFill>
                   <a:srgbClr val="C9A961"/>
                 </a:solidFill>
               </a:defRPr>
             </a:pPr>
             <a:r>
-              <a:t>Sector: Public Services  ·  Audience: Government (B2G)  ·  Track: Accessibility</a:t>
-            </a:r>
-          </a:p>
-        </p:txBody>
-      </p:sp>
-      <p:sp>
-        <p:nvSpPr>
-          <p:cNvPr id="11" name="TextBox 10"/>
+              <a:t>Sector : Public Services   |   Audience : Government (B2G)   |   Track : Accessibility</a:t>
+            </a:r>
+          </a:p>
+        </p:txBody>
+      </p:sp>
+      <p:sp>
+        <p:nvSpPr>
+          <p:cNvPr id="11" name="Rounded Rectangle 10"/>
+          <p:cNvSpPr/>
+          <p:nvPr/>
+        </p:nvSpPr>
+        <p:spPr>
+          <a:xfrm>
+            <a:off x="3840480" y="5440680"/>
+            <a:ext cx="1463040" cy="320040"/>
+          </a:xfrm>
+          <a:prstGeom prst="roundRect">
+            <a:avLst/>
+          </a:prstGeom>
+          <a:solidFill>
+            <a:srgbClr val="121C2E"/>
+          </a:solidFill>
+          <a:ln w="10160">
+            <a:solidFill>
+              <a:srgbClr val="C9A961"/>
+            </a:solidFill>
+          </a:ln>
+        </p:spPr>
+        <p:style>
+          <a:lnRef idx="1">
+            <a:schemeClr val="accent1"/>
+          </a:lnRef>
+          <a:fillRef idx="3">
+            <a:schemeClr val="accent1"/>
+          </a:fillRef>
+          <a:effectRef idx="2">
+            <a:schemeClr val="accent1"/>
+          </a:effectRef>
+          <a:fontRef idx="minor">
+            <a:schemeClr val="lt1"/>
+          </a:fontRef>
+        </p:style>
+        <p:txBody>
+          <a:bodyPr rtlCol="0" anchor="ctr"/>
+          <a:lstStyle/>
+          <a:p>
+            <a:pPr algn="ctr">
+              <a:defRPr sz="900" b="1">
+                <a:solidFill>
+                  <a:srgbClr val="C9A961"/>
+                </a:solidFill>
+              </a:defRPr>
+            </a:pPr>
+            <a:r>
+              <a:t>34 ISL Signs</a:t>
+            </a:r>
+          </a:p>
+        </p:txBody>
+      </p:sp>
+      <p:sp>
+        <p:nvSpPr>
+          <p:cNvPr id="12" name="Rounded Rectangle 11"/>
+          <p:cNvSpPr/>
+          <p:nvPr/>
+        </p:nvSpPr>
+        <p:spPr>
+          <a:xfrm>
+            <a:off x="5577840" y="5440680"/>
+            <a:ext cx="1463040" cy="320040"/>
+          </a:xfrm>
+          <a:prstGeom prst="roundRect">
+            <a:avLst/>
+          </a:prstGeom>
+          <a:solidFill>
+            <a:srgbClr val="121C2E"/>
+          </a:solidFill>
+          <a:ln w="10160">
+            <a:solidFill>
+              <a:srgbClr val="C9A961"/>
+            </a:solidFill>
+          </a:ln>
+        </p:spPr>
+        <p:style>
+          <a:lnRef idx="1">
+            <a:schemeClr val="accent1"/>
+          </a:lnRef>
+          <a:fillRef idx="3">
+            <a:schemeClr val="accent1"/>
+          </a:fillRef>
+          <a:effectRef idx="2">
+            <a:schemeClr val="accent1"/>
+          </a:effectRef>
+          <a:fontRef idx="minor">
+            <a:schemeClr val="lt1"/>
+          </a:fontRef>
+        </p:style>
+        <p:txBody>
+          <a:bodyPr rtlCol="0" anchor="ctr"/>
+          <a:lstStyle/>
+          <a:p>
+            <a:pPr algn="ctr">
+              <a:defRPr sz="900" b="1">
+                <a:solidFill>
+                  <a:srgbClr val="C9A961"/>
+                </a:solidFill>
+              </a:defRPr>
+            </a:pPr>
+            <a:r>
+              <a:t>Live Demo Ready</a:t>
+            </a:r>
+          </a:p>
+        </p:txBody>
+      </p:sp>
+      <p:sp>
+        <p:nvSpPr>
+          <p:cNvPr id="13" name="Rounded Rectangle 12"/>
+          <p:cNvSpPr/>
+          <p:nvPr/>
+        </p:nvSpPr>
+        <p:spPr>
+          <a:xfrm>
+            <a:off x="7315200" y="5440680"/>
+            <a:ext cx="1463040" cy="320040"/>
+          </a:xfrm>
+          <a:prstGeom prst="roundRect">
+            <a:avLst/>
+          </a:prstGeom>
+          <a:solidFill>
+            <a:srgbClr val="121C2E"/>
+          </a:solidFill>
+          <a:ln w="10160">
+            <a:solidFill>
+              <a:srgbClr val="C9A961"/>
+            </a:solidFill>
+          </a:ln>
+        </p:spPr>
+        <p:style>
+          <a:lnRef idx="1">
+            <a:schemeClr val="accent1"/>
+          </a:lnRef>
+          <a:fillRef idx="3">
+            <a:schemeClr val="accent1"/>
+          </a:fillRef>
+          <a:effectRef idx="2">
+            <a:schemeClr val="accent1"/>
+          </a:effectRef>
+          <a:fontRef idx="minor">
+            <a:schemeClr val="lt1"/>
+          </a:fontRef>
+        </p:style>
+        <p:txBody>
+          <a:bodyPr rtlCol="0" anchor="ctr"/>
+          <a:lstStyle/>
+          <a:p>
+            <a:pPr algn="ctr">
+              <a:defRPr sz="900" b="1">
+                <a:solidFill>
+                  <a:srgbClr val="C9A961"/>
+                </a:solidFill>
+              </a:defRPr>
+            </a:pPr>
+            <a:r>
+              <a:t>WebRTC Relay</a:t>
+            </a:r>
+          </a:p>
+        </p:txBody>
+      </p:sp>
+      <p:sp>
+        <p:nvSpPr>
+          <p:cNvPr id="14" name="TextBox 13"/>
           <p:cNvSpPr txBox="1"/>
           <p:nvPr/>
         </p:nvSpPr>
         <p:spPr>
           <a:xfrm>
-            <a:off x="457200" y="6400800"/>
-            <a:ext cx="10972800" cy="365760"/>
+            <a:off x="457200" y="6446520"/>
+            <a:ext cx="11247120" cy="274320"/>
           </a:xfrm>
           <a:prstGeom prst="rect">
             <a:avLst/>
@@ -3459,9 +3621,9 @@
           <a:lstStyle/>
           <a:p>
             <a:pPr algn="ctr">
-              <a:defRPr sz="900" b="0">
-                <a:solidFill>
-                  <a:srgbClr val="475569"/>
+              <a:defRPr sz="800" b="0">
+                <a:solidFill>
+                  <a:srgbClr val="505E72"/>
                 </a:solidFill>
               </a:defRPr>
             </a:pPr>
@@ -3505,7 +3667,7 @@
         </p:nvSpPr>
         <p:spPr>
           <a:xfrm>
-            <a:off x="0" y="731520"/>
+            <a:off x="0" y="457200"/>
             <a:ext cx="12191695" cy="274320"/>
           </a:xfrm>
           <a:prstGeom prst="rect">
@@ -3527,7 +3689,7 @@
               </a:defRPr>
             </a:pPr>
             <a:r>
-              <a:t>T   H   A   N   K       Y   O   U</a:t>
+              <a:t>T H A N K   Y O U</a:t>
             </a:r>
           </a:p>
         </p:txBody>
@@ -3540,8 +3702,8 @@
         </p:nvSpPr>
         <p:spPr>
           <a:xfrm>
-            <a:off x="5029200" y="1188720"/>
-            <a:ext cx="2133295" cy="18288"/>
+            <a:off x="5029200" y="914400"/>
+            <a:ext cx="2133295" cy="16459"/>
           </a:xfrm>
           <a:prstGeom prst="rect">
             <a:avLst/>
@@ -3583,7 +3745,7 @@
         </p:nvSpPr>
         <p:spPr>
           <a:xfrm>
-            <a:off x="0" y="1463040"/>
+            <a:off x="0" y="1188720"/>
             <a:ext cx="12191695" cy="1097280"/>
           </a:xfrm>
           <a:prstGeom prst="rect">
@@ -3598,7 +3760,7 @@
           <a:lstStyle/>
           <a:p>
             <a:pPr algn="ctr">
-              <a:defRPr sz="6400" b="1">
+              <a:defRPr sz="7200" b="1">
                 <a:solidFill>
                   <a:srgbClr val="FFFFFF"/>
                 </a:solidFill>
@@ -3618,8 +3780,8 @@
         </p:nvSpPr>
         <p:spPr>
           <a:xfrm>
-            <a:off x="0" y="2651760"/>
-            <a:ext cx="12191695" cy="457200"/>
+            <a:off x="0" y="2468880"/>
+            <a:ext cx="12191695" cy="365760"/>
           </a:xfrm>
           <a:prstGeom prst="rect">
             <a:avLst/>
@@ -3635,12 +3797,12 @@
             <a:pPr algn="ctr">
               <a:defRPr sz="1800" b="0">
                 <a:solidFill>
-                  <a:srgbClr val="94A3B8"/>
-                </a:solidFill>
-              </a:defRPr>
-            </a:pPr>
-            <a:r>
-              <a:t>Indian Sign Language for every sarkari counter.</a:t>
+                  <a:srgbClr val="8896AA"/>
+                </a:solidFill>
+              </a:defRPr>
+            </a:pPr>
+            <a:r>
+              <a:t>ISL for every sarkari counter.</a:t>
             </a:r>
           </a:p>
         </p:txBody>
@@ -3653,14 +3815,14 @@
         </p:nvSpPr>
         <p:spPr>
           <a:xfrm>
-            <a:off x="1645920" y="3474720"/>
+            <a:off x="1645920" y="3200400"/>
             <a:ext cx="1554480" cy="1645920"/>
           </a:xfrm>
           <a:prstGeom prst="roundRect">
             <a:avLst/>
           </a:prstGeom>
           <a:solidFill>
-            <a:srgbClr val="141E30"/>
+            <a:srgbClr val="121C2E"/>
           </a:solidFill>
           <a:ln>
             <a:noFill/>
@@ -3681,14 +3843,14 @@
           </a:fontRef>
         </p:style>
         <p:txBody>
-          <a:bodyPr rtlCol="0" anchor="ctr" wrap="square" lIns="137160" rIns="137160" tIns="109728"/>
+          <a:bodyPr rtlCol="0" anchor="ctr" wrap="square" lIns="128016" rIns="109728" tIns="91440"/>
           <a:lstStyle/>
           <a:p>
             <a:pPr algn="ctr">
               <a:spcAft>
-                <a:spcPts val="600"/>
-              </a:spcAft>
-              <a:defRPr sz="1400" b="1">
+                <a:spcPts val="500"/>
+              </a:spcAft>
+              <a:defRPr sz="1200" b="1">
                 <a:solidFill>
                   <a:srgbClr val="C9A961"/>
                 </a:solidFill>
@@ -3701,11 +3863,11 @@
           <a:p>
             <a:pPr>
               <a:spcAft>
-                <a:spcPts val="300"/>
-              </a:spcAft>
-              <a:defRPr sz="1100">
-                <a:solidFill>
-                  <a:srgbClr val="94A3B8"/>
+                <a:spcPts val="200"/>
+              </a:spcAft>
+              <a:defRPr sz="1100">
+                <a:solidFill>
+                  <a:srgbClr val="D0D0D0"/>
                 </a:solidFill>
               </a:defRPr>
             </a:pPr>
@@ -3716,16 +3878,16 @@
           <a:p>
             <a:pPr>
               <a:spcAft>
-                <a:spcPts val="300"/>
-              </a:spcAft>
-              <a:defRPr sz="1100">
-                <a:solidFill>
-                  <a:srgbClr val="94A3B8"/>
-                </a:solidFill>
-              </a:defRPr>
-            </a:pPr>
-            <a:r>
-              <a:t>Team Lead</a:t>
+                <a:spcPts val="200"/>
+              </a:spcAft>
+              <a:defRPr sz="1100">
+                <a:solidFill>
+                  <a:srgbClr val="D0D0D0"/>
+                </a:solidFill>
+              </a:defRPr>
+            </a:pPr>
+            <a:r>
+              <a:t>Lead</a:t>
             </a:r>
           </a:p>
         </p:txBody>
@@ -3738,14 +3900,14 @@
         </p:nvSpPr>
         <p:spPr>
           <a:xfrm>
-            <a:off x="3474720" y="3474720"/>
+            <a:off x="3474720" y="3200400"/>
             <a:ext cx="1554480" cy="1645920"/>
           </a:xfrm>
           <a:prstGeom prst="roundRect">
             <a:avLst/>
           </a:prstGeom>
           <a:solidFill>
-            <a:srgbClr val="141E30"/>
+            <a:srgbClr val="121C2E"/>
           </a:solidFill>
           <a:ln>
             <a:noFill/>
@@ -3766,14 +3928,14 @@
           </a:fontRef>
         </p:style>
         <p:txBody>
-          <a:bodyPr rtlCol="0" anchor="ctr" wrap="square" lIns="137160" rIns="137160" tIns="109728"/>
+          <a:bodyPr rtlCol="0" anchor="ctr" wrap="square" lIns="128016" rIns="109728" tIns="91440"/>
           <a:lstStyle/>
           <a:p>
             <a:pPr algn="ctr">
               <a:spcAft>
-                <a:spcPts val="600"/>
-              </a:spcAft>
-              <a:defRPr sz="1400" b="1">
+                <a:spcPts val="500"/>
+              </a:spcAft>
+              <a:defRPr sz="1200" b="1">
                 <a:solidFill>
                   <a:srgbClr val="C9A961"/>
                 </a:solidFill>
@@ -3786,11 +3948,11 @@
           <a:p>
             <a:pPr>
               <a:spcAft>
-                <a:spcPts val="300"/>
-              </a:spcAft>
-              <a:defRPr sz="1100">
-                <a:solidFill>
-                  <a:srgbClr val="94A3B8"/>
+                <a:spcPts val="200"/>
+              </a:spcAft>
+              <a:defRPr sz="1100">
+                <a:solidFill>
+                  <a:srgbClr val="D0D0D0"/>
                 </a:solidFill>
               </a:defRPr>
             </a:pPr>
@@ -3801,16 +3963,16 @@
           <a:p>
             <a:pPr>
               <a:spcAft>
-                <a:spcPts val="300"/>
-              </a:spcAft>
-              <a:defRPr sz="1100">
-                <a:solidFill>
-                  <a:srgbClr val="94A3B8"/>
-                </a:solidFill>
-              </a:defRPr>
-            </a:pPr>
-            <a:r>
-              <a:t>Developer</a:t>
+                <a:spcPts val="200"/>
+              </a:spcAft>
+              <a:defRPr sz="1100">
+                <a:solidFill>
+                  <a:srgbClr val="D0D0D0"/>
+                </a:solidFill>
+              </a:defRPr>
+            </a:pPr>
+            <a:r>
+              <a:t>Dev</a:t>
             </a:r>
           </a:p>
         </p:txBody>
@@ -3823,14 +3985,14 @@
         </p:nvSpPr>
         <p:spPr>
           <a:xfrm>
-            <a:off x="5303520" y="3474720"/>
+            <a:off x="5303520" y="3200400"/>
             <a:ext cx="1554480" cy="1645920"/>
           </a:xfrm>
           <a:prstGeom prst="roundRect">
             <a:avLst/>
           </a:prstGeom>
           <a:solidFill>
-            <a:srgbClr val="141E30"/>
+            <a:srgbClr val="121C2E"/>
           </a:solidFill>
           <a:ln>
             <a:noFill/>
@@ -3851,14 +4013,14 @@
           </a:fontRef>
         </p:style>
         <p:txBody>
-          <a:bodyPr rtlCol="0" anchor="ctr" wrap="square" lIns="137160" rIns="137160" tIns="109728"/>
+          <a:bodyPr rtlCol="0" anchor="ctr" wrap="square" lIns="128016" rIns="109728" tIns="91440"/>
           <a:lstStyle/>
           <a:p>
             <a:pPr algn="ctr">
               <a:spcAft>
-                <a:spcPts val="600"/>
-              </a:spcAft>
-              <a:defRPr sz="1400" b="1">
+                <a:spcPts val="500"/>
+              </a:spcAft>
+              <a:defRPr sz="1200" b="1">
                 <a:solidFill>
                   <a:srgbClr val="C9A961"/>
                 </a:solidFill>
@@ -3871,11 +4033,11 @@
           <a:p>
             <a:pPr>
               <a:spcAft>
-                <a:spcPts val="300"/>
-              </a:spcAft>
-              <a:defRPr sz="1100">
-                <a:solidFill>
-                  <a:srgbClr val="94A3B8"/>
+                <a:spcPts val="200"/>
+              </a:spcAft>
+              <a:defRPr sz="1100">
+                <a:solidFill>
+                  <a:srgbClr val="D0D0D0"/>
                 </a:solidFill>
               </a:defRPr>
             </a:pPr>
@@ -3886,16 +4048,16 @@
           <a:p>
             <a:pPr>
               <a:spcAft>
-                <a:spcPts val="300"/>
-              </a:spcAft>
-              <a:defRPr sz="1100">
-                <a:solidFill>
-                  <a:srgbClr val="94A3B8"/>
-                </a:solidFill>
-              </a:defRPr>
-            </a:pPr>
-            <a:r>
-              <a:t>Developer</a:t>
+                <a:spcPts val="200"/>
+              </a:spcAft>
+              <a:defRPr sz="1100">
+                <a:solidFill>
+                  <a:srgbClr val="D0D0D0"/>
+                </a:solidFill>
+              </a:defRPr>
+            </a:pPr>
+            <a:r>
+              <a:t>Dev</a:t>
             </a:r>
           </a:p>
         </p:txBody>
@@ -3908,14 +4070,14 @@
         </p:nvSpPr>
         <p:spPr>
           <a:xfrm>
-            <a:off x="7132320" y="3474720"/>
+            <a:off x="7132320" y="3200400"/>
             <a:ext cx="1554480" cy="1645920"/>
           </a:xfrm>
           <a:prstGeom prst="roundRect">
             <a:avLst/>
           </a:prstGeom>
           <a:solidFill>
-            <a:srgbClr val="141E30"/>
+            <a:srgbClr val="121C2E"/>
           </a:solidFill>
           <a:ln>
             <a:noFill/>
@@ -3936,14 +4098,14 @@
           </a:fontRef>
         </p:style>
         <p:txBody>
-          <a:bodyPr rtlCol="0" anchor="ctr" wrap="square" lIns="137160" rIns="137160" tIns="109728"/>
+          <a:bodyPr rtlCol="0" anchor="ctr" wrap="square" lIns="128016" rIns="109728" tIns="91440"/>
           <a:lstStyle/>
           <a:p>
             <a:pPr algn="ctr">
               <a:spcAft>
-                <a:spcPts val="600"/>
-              </a:spcAft>
-              <a:defRPr sz="1400" b="1">
+                <a:spcPts val="500"/>
+              </a:spcAft>
+              <a:defRPr sz="1200" b="1">
                 <a:solidFill>
                   <a:srgbClr val="C9A961"/>
                 </a:solidFill>
@@ -3956,11 +4118,11 @@
           <a:p>
             <a:pPr>
               <a:spcAft>
-                <a:spcPts val="300"/>
-              </a:spcAft>
-              <a:defRPr sz="1100">
-                <a:solidFill>
-                  <a:srgbClr val="94A3B8"/>
+                <a:spcPts val="200"/>
+              </a:spcAft>
+              <a:defRPr sz="1100">
+                <a:solidFill>
+                  <a:srgbClr val="D0D0D0"/>
                 </a:solidFill>
               </a:defRPr>
             </a:pPr>
@@ -3971,16 +4133,16 @@
           <a:p>
             <a:pPr>
               <a:spcAft>
-                <a:spcPts val="300"/>
-              </a:spcAft>
-              <a:defRPr sz="1100">
-                <a:solidFill>
-                  <a:srgbClr val="94A3B8"/>
-                </a:solidFill>
-              </a:defRPr>
-            </a:pPr>
-            <a:r>
-              <a:t>Developer</a:t>
+                <a:spcPts val="200"/>
+              </a:spcAft>
+              <a:defRPr sz="1100">
+                <a:solidFill>
+                  <a:srgbClr val="D0D0D0"/>
+                </a:solidFill>
+              </a:defRPr>
+            </a:pPr>
+            <a:r>
+              <a:t>Dev</a:t>
             </a:r>
           </a:p>
         </p:txBody>
@@ -3993,14 +4155,14 @@
         </p:nvSpPr>
         <p:spPr>
           <a:xfrm>
-            <a:off x="8961120" y="3474720"/>
+            <a:off x="8961120" y="3200400"/>
             <a:ext cx="1554480" cy="1645920"/>
           </a:xfrm>
           <a:prstGeom prst="roundRect">
             <a:avLst/>
           </a:prstGeom>
           <a:solidFill>
-            <a:srgbClr val="141E30"/>
+            <a:srgbClr val="121C2E"/>
           </a:solidFill>
           <a:ln>
             <a:noFill/>
@@ -4021,14 +4183,14 @@
           </a:fontRef>
         </p:style>
         <p:txBody>
-          <a:bodyPr rtlCol="0" anchor="ctr" wrap="square" lIns="137160" rIns="137160" tIns="109728"/>
+          <a:bodyPr rtlCol="0" anchor="ctr" wrap="square" lIns="128016" rIns="109728" tIns="91440"/>
           <a:lstStyle/>
           <a:p>
             <a:pPr algn="ctr">
               <a:spcAft>
-                <a:spcPts val="600"/>
-              </a:spcAft>
-              <a:defRPr sz="1400" b="1">
+                <a:spcPts val="500"/>
+              </a:spcAft>
+              <a:defRPr sz="1200" b="1">
                 <a:solidFill>
                   <a:srgbClr val="C9A961"/>
                 </a:solidFill>
@@ -4041,11 +4203,11 @@
           <a:p>
             <a:pPr>
               <a:spcAft>
-                <a:spcPts val="300"/>
-              </a:spcAft>
-              <a:defRPr sz="1100">
-                <a:solidFill>
-                  <a:srgbClr val="94A3B8"/>
+                <a:spcPts val="200"/>
+              </a:spcAft>
+              <a:defRPr sz="1100">
+                <a:solidFill>
+                  <a:srgbClr val="D0D0D0"/>
                 </a:solidFill>
               </a:defRPr>
             </a:pPr>
@@ -4056,16 +4218,16 @@
           <a:p>
             <a:pPr>
               <a:spcAft>
-                <a:spcPts val="300"/>
-              </a:spcAft>
-              <a:defRPr sz="1100">
-                <a:solidFill>
-                  <a:srgbClr val="94A3B8"/>
-                </a:solidFill>
-              </a:defRPr>
-            </a:pPr>
-            <a:r>
-              <a:t>Developer</a:t>
+                <a:spcPts val="200"/>
+              </a:spcAft>
+              <a:defRPr sz="1100">
+                <a:solidFill>
+                  <a:srgbClr val="D0D0D0"/>
+                </a:solidFill>
+              </a:defRPr>
+            </a:pPr>
+            <a:r>
+              <a:t>Dev</a:t>
             </a:r>
           </a:p>
         </p:txBody>
@@ -4078,8 +4240,8 @@
         </p:nvSpPr>
         <p:spPr>
           <a:xfrm>
-            <a:off x="0" y="5394960"/>
-            <a:ext cx="12191695" cy="365760"/>
+            <a:off x="0" y="5120640"/>
+            <a:ext cx="12191695" cy="320040"/>
           </a:xfrm>
           <a:prstGeom prst="rect">
             <a:avLst/>
@@ -4093,14 +4255,14 @@
           <a:lstStyle/>
           <a:p>
             <a:pPr algn="ctr">
-              <a:defRPr sz="1200" b="0">
-                <a:solidFill>
-                  <a:srgbClr val="94A3B8"/>
-                </a:solidFill>
-              </a:defRPr>
-            </a:pPr>
-            <a:r>
-              <a:t>Dr. Kiran &amp; Pallavi Patel Global University · B.Tech CSE · 2nd Year</a:t>
+              <a:defRPr sz="1100" b="0">
+                <a:solidFill>
+                  <a:srgbClr val="8896AA"/>
+                </a:solidFill>
+              </a:defRPr>
+            </a:pPr>
+            <a:r>
+              <a:t>Dr. Kiran &amp; Pallavi Patel Global University  ·  B.Tech CSE  ·  2nd Year</a:t>
             </a:r>
           </a:p>
         </p:txBody>
@@ -4113,7 +4275,7 @@
         </p:nvSpPr>
         <p:spPr>
           <a:xfrm>
-            <a:off x="0" y="5760720"/>
+            <a:off x="0" y="5486400"/>
             <a:ext cx="12191695" cy="274320"/>
           </a:xfrm>
           <a:prstGeom prst="rect">
@@ -4128,7 +4290,7 @@
           <a:lstStyle/>
           <a:p>
             <a:pPr algn="ctr">
-              <a:defRPr sz="1100" b="0">
+              <a:defRPr sz="1000" b="0">
                 <a:solidFill>
                   <a:srgbClr val="C9A961"/>
                 </a:solidFill>
@@ -4148,7 +4310,7 @@
         </p:nvSpPr>
         <p:spPr>
           <a:xfrm>
-            <a:off x="0" y="6126480"/>
+            <a:off x="0" y="5852160"/>
             <a:ext cx="12191695" cy="274320"/>
           </a:xfrm>
           <a:prstGeom prst="rect">
@@ -4183,8 +4345,8 @@
         </p:nvSpPr>
         <p:spPr>
           <a:xfrm>
-            <a:off x="457200" y="6400800"/>
-            <a:ext cx="10972800" cy="365760"/>
+            <a:off x="457200" y="6446520"/>
+            <a:ext cx="11247120" cy="274320"/>
           </a:xfrm>
           <a:prstGeom prst="rect">
             <a:avLst/>
@@ -4198,9 +4360,9 @@
           <a:lstStyle/>
           <a:p>
             <a:pPr algn="ctr">
-              <a:defRPr sz="900" b="0">
-                <a:solidFill>
-                  <a:srgbClr val="475569"/>
+              <a:defRPr sz="800" b="0">
+                <a:solidFill>
+                  <a:srgbClr val="505E72"/>
                 </a:solidFill>
               </a:defRPr>
             </a:pPr>
@@ -4244,8 +4406,8 @@
         </p:nvSpPr>
         <p:spPr>
           <a:xfrm>
-            <a:off x="731520" y="320040"/>
-            <a:ext cx="5486400" cy="274320"/>
+            <a:off x="731520" y="274320"/>
+            <a:ext cx="10972800" cy="256032"/>
           </a:xfrm>
           <a:prstGeom prst="rect">
             <a:avLst/>
@@ -4273,14 +4435,57 @@
       </p:sp>
       <p:sp>
         <p:nvSpPr>
-          <p:cNvPr id="3" name="TextBox 2"/>
+          <p:cNvPr id="3" name="Rectangle 2"/>
+          <p:cNvSpPr/>
+          <p:nvPr/>
+        </p:nvSpPr>
+        <p:spPr>
+          <a:xfrm>
+            <a:off x="731520" y="566928"/>
+            <a:ext cx="1371600" cy="16459"/>
+          </a:xfrm>
+          <a:prstGeom prst="rect">
+            <a:avLst/>
+          </a:prstGeom>
+          <a:solidFill>
+            <a:srgbClr val="C9A961"/>
+          </a:solidFill>
+          <a:ln>
+            <a:noFill/>
+          </a:ln>
+        </p:spPr>
+        <p:style>
+          <a:lnRef idx="1">
+            <a:schemeClr val="accent1"/>
+          </a:lnRef>
+          <a:fillRef idx="3">
+            <a:schemeClr val="accent1"/>
+          </a:fillRef>
+          <a:effectRef idx="2">
+            <a:schemeClr val="accent1"/>
+          </a:effectRef>
+          <a:fontRef idx="minor">
+            <a:schemeClr val="lt1"/>
+          </a:fontRef>
+        </p:style>
+        <p:txBody>
+          <a:bodyPr rtlCol="0" anchor="ctr"/>
+          <a:lstStyle/>
+          <a:p>
+            <a:pPr algn="ctr"/>
+          </a:p>
+        </p:txBody>
+      </p:sp>
+      <p:sp>
+        <p:nvSpPr>
+          <p:cNvPr id="4" name="TextBox 3"/>
           <p:cNvSpPr txBox="1"/>
           <p:nvPr/>
         </p:nvSpPr>
         <p:spPr>
           <a:xfrm>
-            <a:off x="731520" y="640080"/>
-            <a:ext cx="10058400" cy="640080"/>
+            <a:off x="731520" y="658368"/>
+            <a:ext cx="10972800" cy="548640"/>
           </a:xfrm>
           <a:prstGeom prst="rect">
             <a:avLst/>
@@ -4294,7 +4499,7 @@
           <a:lstStyle/>
           <a:p>
             <a:pPr algn="l">
-              <a:defRPr sz="3400" b="1">
+              <a:defRPr sz="3200" b="1">
                 <a:solidFill>
                   <a:srgbClr val="FFFFFF"/>
                 </a:solidFill>
@@ -4308,14 +4513,14 @@
       </p:sp>
       <p:sp>
         <p:nvSpPr>
-          <p:cNvPr id="4" name="TextBox 3"/>
+          <p:cNvPr id="5" name="TextBox 4"/>
           <p:cNvSpPr txBox="1"/>
           <p:nvPr/>
         </p:nvSpPr>
         <p:spPr>
           <a:xfrm>
-            <a:off x="731520" y="1234440"/>
-            <a:ext cx="10058400" cy="457200"/>
+            <a:off x="731520" y="1188720"/>
+            <a:ext cx="10972800" cy="320040"/>
           </a:xfrm>
           <a:prstGeom prst="rect">
             <a:avLst/>
@@ -4329,9 +4534,9 @@
           <a:lstStyle/>
           <a:p>
             <a:pPr algn="l">
-              <a:defRPr sz="1400" b="0">
-                <a:solidFill>
-                  <a:srgbClr val="94A3B8"/>
+              <a:defRPr sz="1300" b="0">
+                <a:solidFill>
+                  <a:srgbClr val="8896AA"/>
                 </a:solidFill>
               </a:defRPr>
             </a:pPr>
@@ -4343,20 +4548,20 @@
       </p:sp>
       <p:sp>
         <p:nvSpPr>
-          <p:cNvPr id="5" name="Rounded Rectangle 4"/>
+          <p:cNvPr id="6" name="Rounded Rectangle 5"/>
           <p:cNvSpPr/>
           <p:nvPr/>
         </p:nvSpPr>
         <p:spPr>
           <a:xfrm>
-            <a:off x="731520" y="2011680"/>
-            <a:ext cx="2560320" cy="1463040"/>
+            <a:off x="731520" y="1828800"/>
+            <a:ext cx="2468880" cy="1371600"/>
           </a:xfrm>
           <a:prstGeom prst="roundRect">
             <a:avLst/>
           </a:prstGeom>
           <a:solidFill>
-            <a:srgbClr val="141E30"/>
+            <a:srgbClr val="121C2E"/>
           </a:solidFill>
           <a:ln w="12700">
             <a:solidFill>
@@ -4379,11 +4584,11 @@
           </a:fontRef>
         </p:style>
         <p:txBody>
-          <a:bodyPr rtlCol="0" anchor="ctr" wrap="square"/>
+          <a:bodyPr rtlCol="0" anchor="ctr" wrap="square" lIns="73152"/>
           <a:lstStyle/>
           <a:p>
             <a:pPr algn="ctr">
-              <a:defRPr sz="3000" b="1">
+              <a:defRPr sz="3200" b="1">
                 <a:solidFill>
                   <a:srgbClr val="C9A961"/>
                 </a:solidFill>
@@ -4395,9 +4600,9 @@
           </a:p>
           <a:p>
             <a:pPr algn="ctr">
-              <a:defRPr sz="1000">
-                <a:solidFill>
-                  <a:srgbClr val="94A3B8"/>
+              <a:defRPr sz="900">
+                <a:solidFill>
+                  <a:srgbClr val="8896AA"/>
                 </a:solidFill>
               </a:defRPr>
             </a:pPr>
@@ -4413,20 +4618,20 @@
       </p:sp>
       <p:sp>
         <p:nvSpPr>
-          <p:cNvPr id="6" name="Rounded Rectangle 5"/>
+          <p:cNvPr id="7" name="Rounded Rectangle 6"/>
           <p:cNvSpPr/>
           <p:nvPr/>
         </p:nvSpPr>
         <p:spPr>
           <a:xfrm>
-            <a:off x="3566160" y="2011680"/>
-            <a:ext cx="2560320" cy="1463040"/>
+            <a:off x="3474720" y="1828800"/>
+            <a:ext cx="2468880" cy="1371600"/>
           </a:xfrm>
           <a:prstGeom prst="roundRect">
             <a:avLst/>
           </a:prstGeom>
           <a:solidFill>
-            <a:srgbClr val="141E30"/>
+            <a:srgbClr val="121C2E"/>
           </a:solidFill>
           <a:ln w="12700">
             <a:solidFill>
@@ -4449,11 +4654,11 @@
           </a:fontRef>
         </p:style>
         <p:txBody>
-          <a:bodyPr rtlCol="0" anchor="ctr" wrap="square"/>
+          <a:bodyPr rtlCol="0" anchor="ctr" wrap="square" lIns="73152"/>
           <a:lstStyle/>
           <a:p>
             <a:pPr algn="ctr">
-              <a:defRPr sz="3000" b="1">
+              <a:defRPr sz="3200" b="1">
                 <a:solidFill>
                   <a:srgbClr val="C9A961"/>
                 </a:solidFill>
@@ -4465,9 +4670,9 @@
           </a:p>
           <a:p>
             <a:pPr algn="ctr">
-              <a:defRPr sz="1000">
-                <a:solidFill>
-                  <a:srgbClr val="94A3B8"/>
+              <a:defRPr sz="900">
+                <a:solidFill>
+                  <a:srgbClr val="8896AA"/>
                 </a:solidFill>
               </a:defRPr>
             </a:pPr>
@@ -4483,20 +4688,20 @@
       </p:sp>
       <p:sp>
         <p:nvSpPr>
-          <p:cNvPr id="7" name="Rounded Rectangle 6"/>
+          <p:cNvPr id="8" name="Rounded Rectangle 7"/>
           <p:cNvSpPr/>
           <p:nvPr/>
         </p:nvSpPr>
         <p:spPr>
           <a:xfrm>
-            <a:off x="6400800" y="2011680"/>
-            <a:ext cx="2560320" cy="1463040"/>
+            <a:off x="6217920" y="1828800"/>
+            <a:ext cx="2468880" cy="1371600"/>
           </a:xfrm>
           <a:prstGeom prst="roundRect">
             <a:avLst/>
           </a:prstGeom>
           <a:solidFill>
-            <a:srgbClr val="141E30"/>
+            <a:srgbClr val="121C2E"/>
           </a:solidFill>
           <a:ln w="12700">
             <a:solidFill>
@@ -4519,54 +4724,54 @@
           </a:fontRef>
         </p:style>
         <p:txBody>
-          <a:bodyPr rtlCol="0" anchor="ctr" wrap="square"/>
+          <a:bodyPr rtlCol="0" anchor="ctr" wrap="square" lIns="73152"/>
           <a:lstStyle/>
           <a:p>
             <a:pPr algn="ctr">
-              <a:defRPr sz="3000" b="1">
+              <a:defRPr sz="3200" b="1">
                 <a:solidFill>
                   <a:srgbClr val="F87171"/>
                 </a:solidFill>
               </a:defRPr>
             </a:pPr>
             <a:r>
-              <a:t>&lt;5%</a:t>
+              <a:t>&lt; 5%</a:t>
             </a:r>
           </a:p>
           <a:p>
             <a:pPr algn="ctr">
-              <a:defRPr sz="1000">
-                <a:solidFill>
-                  <a:srgbClr val="94A3B8"/>
-                </a:solidFill>
-              </a:defRPr>
-            </a:pPr>
-            <a:r>
-              <a:t>Have basic ISL</a:t>
+              <a:defRPr sz="900">
+                <a:solidFill>
+                  <a:srgbClr val="8896AA"/>
+                </a:solidFill>
+              </a:defRPr>
+            </a:pPr>
+            <a:r>
+              <a:t>Have basic</a:t>
             </a:r>
             <a:br/>
             <a:r>
-              <a:t>proficiency</a:t>
-            </a:r>
-          </a:p>
-        </p:txBody>
-      </p:sp>
-      <p:sp>
-        <p:nvSpPr>
-          <p:cNvPr id="8" name="Rounded Rectangle 7"/>
+              <a:t>ISL proficiency</a:t>
+            </a:r>
+          </a:p>
+        </p:txBody>
+      </p:sp>
+      <p:sp>
+        <p:nvSpPr>
+          <p:cNvPr id="9" name="Rounded Rectangle 8"/>
           <p:cNvSpPr/>
           <p:nvPr/>
         </p:nvSpPr>
         <p:spPr>
           <a:xfrm>
-            <a:off x="9235440" y="2011680"/>
-            <a:ext cx="2560320" cy="1463040"/>
+            <a:off x="8961120" y="1828800"/>
+            <a:ext cx="2468880" cy="1371600"/>
           </a:xfrm>
           <a:prstGeom prst="roundRect">
             <a:avLst/>
           </a:prstGeom>
           <a:solidFill>
-            <a:srgbClr val="141E30"/>
+            <a:srgbClr val="121C2E"/>
           </a:solidFill>
           <a:ln w="12700">
             <a:solidFill>
@@ -4589,11 +4794,11 @@
           </a:fontRef>
         </p:style>
         <p:txBody>
-          <a:bodyPr rtlCol="0" anchor="ctr" wrap="square"/>
+          <a:bodyPr rtlCol="0" anchor="ctr" wrap="square" lIns="73152"/>
           <a:lstStyle/>
           <a:p>
             <a:pPr algn="ctr">
-              <a:defRPr sz="3000" b="1">
+              <a:defRPr sz="3200" b="1">
                 <a:solidFill>
                   <a:srgbClr val="F87171"/>
                 </a:solidFill>
@@ -4605,9 +4810,9 @@
           </a:p>
           <a:p>
             <a:pPr algn="ctr">
-              <a:defRPr sz="1000">
-                <a:solidFill>
-                  <a:srgbClr val="94A3B8"/>
+              <a:defRPr sz="900">
+                <a:solidFill>
+                  <a:srgbClr val="8896AA"/>
                 </a:solidFill>
               </a:defRPr>
             </a:pPr>
@@ -4623,22 +4828,22 @@
       </p:sp>
       <p:sp>
         <p:nvSpPr>
-          <p:cNvPr id="9" name="Rounded Rectangle 8"/>
+          <p:cNvPr id="10" name="Rounded Rectangle 9"/>
           <p:cNvSpPr/>
           <p:nvPr/>
         </p:nvSpPr>
         <p:spPr>
           <a:xfrm>
-            <a:off x="731520" y="3840480"/>
-            <a:ext cx="5303520" cy="2286000"/>
+            <a:off x="731520" y="3566160"/>
+            <a:ext cx="5212080" cy="2560320"/>
           </a:xfrm>
           <a:prstGeom prst="roundRect">
             <a:avLst/>
           </a:prstGeom>
           <a:solidFill>
-            <a:srgbClr val="141E30"/>
+            <a:srgbClr val="121C2E"/>
           </a:solidFill>
-          <a:ln w="12700">
+          <a:ln w="15240">
             <a:solidFill>
               <a:srgbClr val="FB923C"/>
             </a:solidFill>
@@ -4659,14 +4864,14 @@
           </a:fontRef>
         </p:style>
         <p:txBody>
-          <a:bodyPr rtlCol="0" anchor="ctr" wrap="square" lIns="137160" rIns="137160" tIns="109728"/>
+          <a:bodyPr rtlCol="0" anchor="ctr" wrap="square" lIns="128016" rIns="109728" tIns="91440"/>
           <a:lstStyle/>
           <a:p>
             <a:pPr algn="ctr">
               <a:spcAft>
-                <a:spcPts val="600"/>
-              </a:spcAft>
-              <a:defRPr sz="1400" b="1">
+                <a:spcPts val="500"/>
+              </a:spcAft>
+              <a:defRPr sz="1200" b="1">
                 <a:solidFill>
                   <a:srgbClr val="FB923C"/>
                 </a:solidFill>
@@ -4679,41 +4884,68 @@
           <a:p>
             <a:pPr>
               <a:spcAft>
-                <a:spcPts val="300"/>
-              </a:spcAft>
-              <a:defRPr sz="1100">
-                <a:solidFill>
-                  <a:srgbClr val="94A3B8"/>
-                </a:solidFill>
-              </a:defRPr>
-            </a:pPr>
-            <a:r>
-              <a:t>ISL lessons exist off the counter — apps, courses,</a:t>
-            </a:r>
-          </a:p>
-          <a:p>
-            <a:pPr>
-              <a:spcAft>
-                <a:spcPts val="300"/>
-              </a:spcAft>
-              <a:defRPr sz="1100">
-                <a:solidFill>
-                  <a:srgbClr val="94A3B8"/>
-                </a:solidFill>
-              </a:defRPr>
-            </a:pPr>
-            <a:r>
-              <a:t>video libraries. Clerks never see them because</a:t>
-            </a:r>
-          </a:p>
-          <a:p>
-            <a:pPr>
-              <a:spcAft>
-                <a:spcPts val="300"/>
-              </a:spcAft>
-              <a:defRPr sz="1100">
-                <a:solidFill>
-                  <a:srgbClr val="94A3B8"/>
+                <a:spcPts val="200"/>
+              </a:spcAft>
+              <a:defRPr sz="1100">
+                <a:solidFill>
+                  <a:srgbClr val="D0D0D0"/>
+                </a:solidFill>
+              </a:defRPr>
+            </a:pPr>
+            <a:r>
+              <a:t>ISL lessons exist off the counter —</a:t>
+            </a:r>
+          </a:p>
+          <a:p>
+            <a:pPr>
+              <a:spcAft>
+                <a:spcPts val="200"/>
+              </a:spcAft>
+              <a:defRPr sz="1100">
+                <a:solidFill>
+                  <a:srgbClr val="D0D0D0"/>
+                </a:solidFill>
+              </a:defRPr>
+            </a:pPr>
+            <a:r>
+              <a:t>apps, courses, video libraries.</a:t>
+            </a:r>
+          </a:p>
+          <a:p>
+            <a:pPr>
+              <a:spcAft>
+                <a:spcPts val="200"/>
+              </a:spcAft>
+              <a:defRPr sz="1100">
+                <a:solidFill>
+                  <a:srgbClr val="D0D0D0"/>
+                </a:solidFill>
+              </a:defRPr>
+            </a:pPr>
+          </a:p>
+          <a:p>
+            <a:pPr>
+              <a:spcAft>
+                <a:spcPts val="200"/>
+              </a:spcAft>
+              <a:defRPr sz="1100">
+                <a:solidFill>
+                  <a:srgbClr val="D0D0D0"/>
+                </a:solidFill>
+              </a:defRPr>
+            </a:pPr>
+            <a:r>
+              <a:t>Clerks never see them because</a:t>
+            </a:r>
+          </a:p>
+          <a:p>
+            <a:pPr>
+              <a:spcAft>
+                <a:spcPts val="200"/>
+              </a:spcAft>
+              <a:defRPr sz="1100">
+                <a:solidFill>
+                  <a:srgbClr val="D0D0D0"/>
                 </a:solidFill>
               </a:defRPr>
             </a:pPr>
@@ -4724,23 +4956,23 @@
           <a:p>
             <a:pPr>
               <a:spcAft>
-                <a:spcPts val="300"/>
-              </a:spcAft>
-              <a:defRPr sz="1100">
-                <a:solidFill>
-                  <a:srgbClr val="94A3B8"/>
-                </a:solidFill>
-              </a:defRPr>
-            </a:pPr>
-          </a:p>
-          <a:p>
-            <a:pPr>
-              <a:spcAft>
-                <a:spcPts val="300"/>
-              </a:spcAft>
-              <a:defRPr sz="1100">
-                <a:solidFill>
-                  <a:srgbClr val="94A3B8"/>
+                <a:spcPts val="200"/>
+              </a:spcAft>
+              <a:defRPr sz="1100">
+                <a:solidFill>
+                  <a:srgbClr val="D0D0D0"/>
+                </a:solidFill>
+              </a:defRPr>
+            </a:pPr>
+          </a:p>
+          <a:p>
+            <a:pPr>
+              <a:spcAft>
+                <a:spcPts val="200"/>
+              </a:spcAft>
+              <a:defRPr sz="1100">
+                <a:solidFill>
+                  <a:srgbClr val="D0D0D0"/>
                 </a:solidFill>
               </a:defRPr>
             </a:pPr>
@@ -4752,22 +4984,22 @@
       </p:sp>
       <p:sp>
         <p:nvSpPr>
-          <p:cNvPr id="10" name="Rounded Rectangle 9"/>
+          <p:cNvPr id="11" name="Rounded Rectangle 10"/>
           <p:cNvSpPr/>
           <p:nvPr/>
         </p:nvSpPr>
         <p:spPr>
           <a:xfrm>
-            <a:off x="6309360" y="3840480"/>
-            <a:ext cx="5303520" cy="2286000"/>
+            <a:off x="6309360" y="3566160"/>
+            <a:ext cx="5212080" cy="2560320"/>
           </a:xfrm>
           <a:prstGeom prst="roundRect">
             <a:avLst/>
           </a:prstGeom>
           <a:solidFill>
-            <a:srgbClr val="141E30"/>
+            <a:srgbClr val="121C2E"/>
           </a:solidFill>
-          <a:ln w="12700">
+          <a:ln w="15240">
             <a:solidFill>
               <a:srgbClr val="F87171"/>
             </a:solidFill>
@@ -4788,14 +5020,14 @@
           </a:fontRef>
         </p:style>
         <p:txBody>
-          <a:bodyPr rtlCol="0" anchor="ctr" wrap="square" lIns="137160" rIns="137160" tIns="109728"/>
+          <a:bodyPr rtlCol="0" anchor="ctr" wrap="square" lIns="128016" rIns="109728" tIns="91440"/>
           <a:lstStyle/>
           <a:p>
             <a:pPr algn="ctr">
               <a:spcAft>
-                <a:spcPts val="600"/>
-              </a:spcAft>
-              <a:defRPr sz="1400" b="1">
+                <a:spcPts val="500"/>
+              </a:spcAft>
+              <a:defRPr sz="1200" b="1">
                 <a:solidFill>
                   <a:srgbClr val="F87171"/>
                 </a:solidFill>
@@ -4808,41 +5040,68 @@
           <a:p>
             <a:pPr>
               <a:spcAft>
-                <a:spcPts val="300"/>
-              </a:spcAft>
-              <a:defRPr sz="1100">
-                <a:solidFill>
-                  <a:srgbClr val="94A3B8"/>
-                </a:solidFill>
-              </a:defRPr>
-            </a:pPr>
-            <a:r>
-              <a:t>Deaf citizens rely on written notes, family</a:t>
-            </a:r>
-          </a:p>
-          <a:p>
-            <a:pPr>
-              <a:spcAft>
-                <a:spcPts val="300"/>
-              </a:spcAft>
-              <a:defRPr sz="1100">
-                <a:solidFill>
-                  <a:srgbClr val="94A3B8"/>
-                </a:solidFill>
-              </a:defRPr>
-            </a:pPr>
-            <a:r>
-              <a:t>interpreters, or simply leave without service.</a:t>
-            </a:r>
-          </a:p>
-          <a:p>
-            <a:pPr>
-              <a:spcAft>
-                <a:spcPts val="300"/>
-              </a:spcAft>
-              <a:defRPr sz="1100">
-                <a:solidFill>
-                  <a:srgbClr val="94A3B8"/>
+                <a:spcPts val="200"/>
+              </a:spcAft>
+              <a:defRPr sz="1100">
+                <a:solidFill>
+                  <a:srgbClr val="D0D0D0"/>
+                </a:solidFill>
+              </a:defRPr>
+            </a:pPr>
+            <a:r>
+              <a:t>Deaf citizens rely on written notes,</a:t>
+            </a:r>
+          </a:p>
+          <a:p>
+            <a:pPr>
+              <a:spcAft>
+                <a:spcPts val="200"/>
+              </a:spcAft>
+              <a:defRPr sz="1100">
+                <a:solidFill>
+                  <a:srgbClr val="D0D0D0"/>
+                </a:solidFill>
+              </a:defRPr>
+            </a:pPr>
+            <a:r>
+              <a:t>family interpreters, or simply leave</a:t>
+            </a:r>
+          </a:p>
+          <a:p>
+            <a:pPr>
+              <a:spcAft>
+                <a:spcPts val="200"/>
+              </a:spcAft>
+              <a:defRPr sz="1100">
+                <a:solidFill>
+                  <a:srgbClr val="D0D0D0"/>
+                </a:solidFill>
+              </a:defRPr>
+            </a:pPr>
+            <a:r>
+              <a:t>without service.</a:t>
+            </a:r>
+          </a:p>
+          <a:p>
+            <a:pPr>
+              <a:spcAft>
+                <a:spcPts val="200"/>
+              </a:spcAft>
+              <a:defRPr sz="1100">
+                <a:solidFill>
+                  <a:srgbClr val="D0D0D0"/>
+                </a:solidFill>
+              </a:defRPr>
+            </a:pPr>
+          </a:p>
+          <a:p>
+            <a:pPr>
+              <a:spcAft>
+                <a:spcPts val="200"/>
+              </a:spcAft>
+              <a:defRPr sz="1100">
+                <a:solidFill>
+                  <a:srgbClr val="D0D0D0"/>
                 </a:solidFill>
               </a:defRPr>
             </a:pPr>
@@ -4853,57 +5112,42 @@
           <a:p>
             <a:pPr>
               <a:spcAft>
-                <a:spcPts val="300"/>
-              </a:spcAft>
-              <a:defRPr sz="1100">
-                <a:solidFill>
-                  <a:srgbClr val="94A3B8"/>
-                </a:solidFill>
-              </a:defRPr>
-            </a:pPr>
-          </a:p>
-          <a:p>
-            <a:pPr>
-              <a:spcAft>
-                <a:spcPts val="300"/>
-              </a:spcAft>
-              <a:defRPr sz="1100">
-                <a:solidFill>
-                  <a:srgbClr val="94A3B8"/>
-                </a:solidFill>
-              </a:defRPr>
-            </a:pPr>
-            <a:r>
-              <a:t>The RPwD Act 2016 mandates accessibility.</a:t>
-            </a:r>
-          </a:p>
-          <a:p>
-            <a:pPr>
-              <a:spcAft>
-                <a:spcPts val="300"/>
-              </a:spcAft>
-              <a:defRPr sz="1100">
-                <a:solidFill>
-                  <a:srgbClr val="94A3B8"/>
-                </a:solidFill>
-              </a:defRPr>
-            </a:pPr>
-            <a:r>
-              <a:t>Ground-level adoption is minimal.</a:t>
-            </a:r>
-          </a:p>
-        </p:txBody>
-      </p:sp>
-      <p:sp>
-        <p:nvSpPr>
-          <p:cNvPr id="11" name="TextBox 10"/>
+                <a:spcPts val="200"/>
+              </a:spcAft>
+              <a:defRPr sz="1100">
+                <a:solidFill>
+                  <a:srgbClr val="D0D0D0"/>
+                </a:solidFill>
+              </a:defRPr>
+            </a:pPr>
+          </a:p>
+          <a:p>
+            <a:pPr>
+              <a:spcAft>
+                <a:spcPts val="200"/>
+              </a:spcAft>
+              <a:defRPr sz="1100">
+                <a:solidFill>
+                  <a:srgbClr val="D0D0D0"/>
+                </a:solidFill>
+              </a:defRPr>
+            </a:pPr>
+            <a:r>
+              <a:t>RPwD Act 2016 mandates accessibility.</a:t>
+            </a:r>
+          </a:p>
+        </p:txBody>
+      </p:sp>
+      <p:sp>
+        <p:nvSpPr>
+          <p:cNvPr id="12" name="TextBox 11"/>
           <p:cNvSpPr txBox="1"/>
           <p:nvPr/>
         </p:nvSpPr>
         <p:spPr>
           <a:xfrm>
-            <a:off x="457200" y="6400800"/>
-            <a:ext cx="10972800" cy="365760"/>
+            <a:off x="457200" y="6446520"/>
+            <a:ext cx="11247120" cy="274320"/>
           </a:xfrm>
           <a:prstGeom prst="rect">
             <a:avLst/>
@@ -4917,9 +5161,9 @@
           <a:lstStyle/>
           <a:p>
             <a:pPr algn="ctr">
-              <a:defRPr sz="900" b="0">
-                <a:solidFill>
-                  <a:srgbClr val="475569"/>
+              <a:defRPr sz="800" b="0">
+                <a:solidFill>
+                  <a:srgbClr val="505E72"/>
                 </a:solidFill>
               </a:defRPr>
             </a:pPr>
@@ -4963,8 +5207,8 @@
         </p:nvSpPr>
         <p:spPr>
           <a:xfrm>
-            <a:off x="731520" y="320040"/>
-            <a:ext cx="5486400" cy="274320"/>
+            <a:off x="731520" y="274320"/>
+            <a:ext cx="10972800" cy="256032"/>
           </a:xfrm>
           <a:prstGeom prst="rect">
             <a:avLst/>
@@ -4992,90 +5236,20 @@
       </p:sp>
       <p:sp>
         <p:nvSpPr>
-          <p:cNvPr id="3" name="TextBox 2"/>
-          <p:cNvSpPr txBox="1"/>
-          <p:nvPr/>
-        </p:nvSpPr>
-        <p:spPr>
-          <a:xfrm>
-            <a:off x="731520" y="640080"/>
-            <a:ext cx="10058400" cy="640080"/>
+          <p:cNvPr id="3" name="Rectangle 2"/>
+          <p:cNvSpPr/>
+          <p:nvPr/>
+        </p:nvSpPr>
+        <p:spPr>
+          <a:xfrm>
+            <a:off x="731520" y="566928"/>
+            <a:ext cx="1371600" cy="16459"/>
           </a:xfrm>
           <a:prstGeom prst="rect">
             <a:avLst/>
           </a:prstGeom>
-          <a:noFill/>
-        </p:spPr>
-        <p:txBody>
-          <a:bodyPr wrap="square">
-            <a:spAutoFit/>
-          </a:bodyPr>
-          <a:lstStyle/>
-          <a:p>
-            <a:pPr algn="l">
-              <a:defRPr sz="3400" b="1">
-                <a:solidFill>
-                  <a:srgbClr val="FFFFFF"/>
-                </a:solidFill>
-              </a:defRPr>
-            </a:pPr>
-            <a:r>
-              <a:t>One platform. Service, habit, governance.</a:t>
-            </a:r>
-          </a:p>
-        </p:txBody>
-      </p:sp>
-      <p:sp>
-        <p:nvSpPr>
-          <p:cNvPr id="4" name="TextBox 3"/>
-          <p:cNvSpPr txBox="1"/>
-          <p:nvPr/>
-        </p:nvSpPr>
-        <p:spPr>
-          <a:xfrm>
-            <a:off x="731520" y="1234440"/>
-            <a:ext cx="10058400" cy="457200"/>
-          </a:xfrm>
-          <a:prstGeom prst="rect">
-            <a:avLst/>
-          </a:prstGeom>
-          <a:noFill/>
-        </p:spPr>
-        <p:txBody>
-          <a:bodyPr wrap="square">
-            <a:spAutoFit/>
-          </a:bodyPr>
-          <a:lstStyle/>
-          <a:p>
-            <a:pPr algn="l">
-              <a:defRPr sz="1400" b="0">
-                <a:solidFill>
-                  <a:srgbClr val="94A3B8"/>
-                </a:solidFill>
-              </a:defRPr>
-            </a:pPr>
-            <a:r>
-              <a:t>Three products. One counter. 30 seconds.</a:t>
-            </a:r>
-          </a:p>
-        </p:txBody>
-      </p:sp>
-      <p:sp>
-        <p:nvSpPr>
-          <p:cNvPr id="5" name="Rounded Rectangle 4"/>
-          <p:cNvSpPr/>
-          <p:nvPr/>
-        </p:nvSpPr>
-        <p:spPr>
-          <a:xfrm>
-            <a:off x="731520" y="2011680"/>
-            <a:ext cx="3291840" cy="3657600"/>
-          </a:xfrm>
-          <a:prstGeom prst="roundRect">
-            <a:avLst/>
-          </a:prstGeom>
           <a:solidFill>
-            <a:srgbClr val="141E30"/>
+            <a:srgbClr val="C9A961"/>
           </a:solidFill>
           <a:ln>
             <a:noFill/>
@@ -5096,165 +5270,79 @@
           </a:fontRef>
         </p:style>
         <p:txBody>
-          <a:bodyPr rtlCol="0" anchor="ctr" wrap="square" lIns="137160" rIns="137160" tIns="109728"/>
-          <a:lstStyle/>
-          <a:p>
-            <a:pPr algn="ctr">
-              <a:spcAft>
-                <a:spcPts val="600"/>
-              </a:spcAft>
-              <a:defRPr sz="1400" b="1">
-                <a:solidFill>
-                  <a:srgbClr val="4ADE80"/>
-                </a:solidFill>
-              </a:defRPr>
-            </a:pPr>
-            <a:r>
-              <a:t>1 · MOMENT</a:t>
-            </a:r>
-          </a:p>
-          <a:p>
-            <a:pPr>
-              <a:spcAft>
-                <a:spcPts val="300"/>
-              </a:spcAft>
-              <a:defRPr sz="1100">
-                <a:solidFill>
-                  <a:srgbClr val="94A3B8"/>
-                </a:solidFill>
-              </a:defRPr>
-            </a:pPr>
-            <a:r>
-              <a:t>Sanket Sahayak — a two-way service</a:t>
-            </a:r>
-          </a:p>
-          <a:p>
-            <a:pPr>
-              <a:spcAft>
-                <a:spcPts val="300"/>
-              </a:spcAft>
-              <a:defRPr sz="1100">
-                <a:solidFill>
-                  <a:srgbClr val="94A3B8"/>
-                </a:solidFill>
-              </a:defRPr>
-            </a:pPr>
-            <a:r>
-              <a:t>turn at the counter in under 30 seconds.</a:t>
-            </a:r>
-          </a:p>
-          <a:p>
-            <a:pPr>
-              <a:spcAft>
-                <a:spcPts val="300"/>
-              </a:spcAft>
-              <a:defRPr sz="1100">
-                <a:solidFill>
-                  <a:srgbClr val="94A3B8"/>
-                </a:solidFill>
-              </a:defRPr>
-            </a:pPr>
-          </a:p>
-          <a:p>
-            <a:pPr>
-              <a:spcAft>
-                <a:spcPts val="300"/>
-              </a:spcAft>
-              <a:defRPr sz="1100">
-                <a:solidFill>
-                  <a:srgbClr val="94A3B8"/>
-                </a:solidFill>
-              </a:defRPr>
-            </a:pPr>
-            <a:r>
-              <a:t>→ App speaks first</a:t>
-            </a:r>
-          </a:p>
-          <a:p>
-            <a:pPr>
-              <a:spcAft>
-                <a:spcPts val="300"/>
-              </a:spcAft>
-              <a:defRPr sz="1100">
-                <a:solidFill>
-                  <a:srgbClr val="94A3B8"/>
-                </a:solidFill>
-              </a:defRPr>
-            </a:pPr>
-            <a:r>
-              <a:t>→ Citizen signs (camera / one-tap)</a:t>
-            </a:r>
-          </a:p>
-          <a:p>
-            <a:pPr>
-              <a:spcAft>
-                <a:spcPts val="300"/>
-              </a:spcAft>
-              <a:defRPr sz="1100">
-                <a:solidFill>
-                  <a:srgbClr val="94A3B8"/>
-                </a:solidFill>
-              </a:defRPr>
-            </a:pPr>
-            <a:r>
-              <a:t>→ Clerk sees text + hears it</a:t>
-            </a:r>
-          </a:p>
-          <a:p>
-            <a:pPr>
-              <a:spcAft>
-                <a:spcPts val="300"/>
-              </a:spcAft>
-              <a:defRPr sz="1100">
-                <a:solidFill>
-                  <a:srgbClr val="94A3B8"/>
-                </a:solidFill>
-              </a:defRPr>
-            </a:pPr>
-            <a:r>
-              <a:t>→ Clerk taps reply → ISL chips + TTS</a:t>
-            </a:r>
-          </a:p>
-          <a:p>
-            <a:pPr>
-              <a:spcAft>
-                <a:spcPts val="300"/>
-              </a:spcAft>
-              <a:defRPr sz="1100">
-                <a:solidFill>
-                  <a:srgbClr val="94A3B8"/>
-                </a:solidFill>
-              </a:defRPr>
-            </a:pPr>
-            <a:r>
-              <a:t>→ "You helped a citizen" (+25 XP)</a:t>
-            </a:r>
-          </a:p>
-          <a:p>
-            <a:pPr>
-              <a:spcAft>
-                <a:spcPts val="300"/>
-              </a:spcAft>
-              <a:defRPr sz="1100">
-                <a:solidFill>
-                  <a:srgbClr val="94A3B8"/>
-                </a:solidFill>
-              </a:defRPr>
-            </a:pPr>
-          </a:p>
-          <a:p>
-            <a:pPr>
-              <a:spcAft>
-                <a:spcPts val="300"/>
-              </a:spcAft>
-              <a:defRPr sz="1100">
-                <a:solidFill>
-                  <a:srgbClr val="94A3B8"/>
-                </a:solidFill>
-              </a:defRPr>
-            </a:pPr>
-            <a:r>
-              <a:t>This is what wins the clerk.</a:t>
+          <a:bodyPr rtlCol="0" anchor="ctr"/>
+          <a:lstStyle/>
+          <a:p>
+            <a:pPr algn="ctr"/>
+          </a:p>
+        </p:txBody>
+      </p:sp>
+      <p:sp>
+        <p:nvSpPr>
+          <p:cNvPr id="4" name="TextBox 3"/>
+          <p:cNvSpPr txBox="1"/>
+          <p:nvPr/>
+        </p:nvSpPr>
+        <p:spPr>
+          <a:xfrm>
+            <a:off x="731520" y="658368"/>
+            <a:ext cx="10972800" cy="548640"/>
+          </a:xfrm>
+          <a:prstGeom prst="rect">
+            <a:avLst/>
+          </a:prstGeom>
+          <a:noFill/>
+        </p:spPr>
+        <p:txBody>
+          <a:bodyPr wrap="square">
+            <a:spAutoFit/>
+          </a:bodyPr>
+          <a:lstStyle/>
+          <a:p>
+            <a:pPr algn="l">
+              <a:defRPr sz="3200" b="1">
+                <a:solidFill>
+                  <a:srgbClr val="FFFFFF"/>
+                </a:solidFill>
+              </a:defRPr>
+            </a:pPr>
+            <a:r>
+              <a:t>One platform. Service, habit, governance.</a:t>
+            </a:r>
+          </a:p>
+        </p:txBody>
+      </p:sp>
+      <p:sp>
+        <p:nvSpPr>
+          <p:cNvPr id="5" name="TextBox 4"/>
+          <p:cNvSpPr txBox="1"/>
+          <p:nvPr/>
+        </p:nvSpPr>
+        <p:spPr>
+          <a:xfrm>
+            <a:off x="731520" y="1188720"/>
+            <a:ext cx="10972800" cy="320040"/>
+          </a:xfrm>
+          <a:prstGeom prst="rect">
+            <a:avLst/>
+          </a:prstGeom>
+          <a:noFill/>
+        </p:spPr>
+        <p:txBody>
+          <a:bodyPr wrap="square">
+            <a:spAutoFit/>
+          </a:bodyPr>
+          <a:lstStyle/>
+          <a:p>
+            <a:pPr algn="l">
+              <a:defRPr sz="1300" b="0">
+                <a:solidFill>
+                  <a:srgbClr val="8896AA"/>
+                </a:solidFill>
+              </a:defRPr>
+            </a:pPr>
+            <a:r>
+              <a:t>Three products. One counter. 30 seconds.</a:t>
             </a:r>
           </a:p>
         </p:txBody>
@@ -5267,14 +5355,14 @@
         </p:nvSpPr>
         <p:spPr>
           <a:xfrm>
-            <a:off x="4297680" y="2011680"/>
-            <a:ext cx="3291840" cy="3657600"/>
+            <a:off x="731520" y="1828800"/>
+            <a:ext cx="3383280" cy="4206240"/>
           </a:xfrm>
           <a:prstGeom prst="roundRect">
             <a:avLst/>
           </a:prstGeom>
           <a:solidFill>
-            <a:srgbClr val="141E30"/>
+            <a:srgbClr val="121C2E"/>
           </a:solidFill>
           <a:ln>
             <a:noFill/>
@@ -5295,165 +5383,192 @@
           </a:fontRef>
         </p:style>
         <p:txBody>
-          <a:bodyPr rtlCol="0" anchor="ctr" wrap="square" lIns="137160" rIns="137160" tIns="109728"/>
+          <a:bodyPr rtlCol="0" anchor="ctr" wrap="square" lIns="128016" rIns="109728" tIns="91440"/>
           <a:lstStyle/>
           <a:p>
             <a:pPr algn="ctr">
               <a:spcAft>
-                <a:spcPts val="600"/>
-              </a:spcAft>
-              <a:defRPr sz="1400" b="1">
-                <a:solidFill>
-                  <a:srgbClr val="818CF8"/>
-                </a:solidFill>
-              </a:defRPr>
-            </a:pPr>
-            <a:r>
-              <a:t>2 · HABIT</a:t>
-            </a:r>
-          </a:p>
-          <a:p>
-            <a:pPr>
-              <a:spcAft>
-                <a:spcPts val="300"/>
-              </a:spcAft>
-              <a:defRPr sz="1100">
-                <a:solidFill>
-                  <a:srgbClr val="94A3B8"/>
-                </a:solidFill>
-              </a:defRPr>
-            </a:pPr>
-            <a:r>
-              <a:t>ISL Quest — 3-minute gamified lessons.</a:t>
-            </a:r>
-          </a:p>
-          <a:p>
-            <a:pPr>
-              <a:spcAft>
-                <a:spcPts val="300"/>
-              </a:spcAft>
-              <a:defRPr sz="1100">
-                <a:solidFill>
-                  <a:srgbClr val="94A3B8"/>
-                </a:solidFill>
-              </a:defRPr>
-            </a:pPr>
-            <a:r>
-              <a:t>XP, streaks, badges, leaderboards.</a:t>
-            </a:r>
-          </a:p>
-          <a:p>
-            <a:pPr>
-              <a:spcAft>
-                <a:spcPts val="300"/>
-              </a:spcAft>
-              <a:defRPr sz="1100">
-                <a:solidFill>
-                  <a:srgbClr val="94A3B8"/>
-                </a:solidFill>
-              </a:defRPr>
-            </a:pPr>
-            <a:r>
-              <a:t>34 municipal signs across 6 categories.</a:t>
-            </a:r>
-          </a:p>
-          <a:p>
-            <a:pPr>
-              <a:spcAft>
-                <a:spcPts val="300"/>
-              </a:spcAft>
-              <a:defRPr sz="1100">
-                <a:solidFill>
-                  <a:srgbClr val="94A3B8"/>
-                </a:solidFill>
-              </a:defRPr>
-            </a:pPr>
-          </a:p>
-          <a:p>
-            <a:pPr>
-              <a:spcAft>
-                <a:spcPts val="300"/>
-              </a:spcAft>
-              <a:defRPr sz="1100">
-                <a:solidFill>
-                  <a:srgbClr val="94A3B8"/>
-                </a:solidFill>
-              </a:defRPr>
-            </a:pPr>
-            <a:r>
-              <a:t>→ Daily lesson on the same desk</a:t>
-            </a:r>
-          </a:p>
-          <a:p>
-            <a:pPr>
-              <a:spcAft>
-                <a:spcPts val="300"/>
-              </a:spcAft>
-              <a:defRPr sz="1100">
-                <a:solidFill>
-                  <a:srgbClr val="94A3B8"/>
-                </a:solidFill>
-              </a:defRPr>
-            </a:pPr>
-            <a:r>
-              <a:t>→ Webcam practice (MediaPipe)</a:t>
-            </a:r>
-          </a:p>
-          <a:p>
-            <a:pPr>
-              <a:spcAft>
-                <a:spcPts val="300"/>
-              </a:spcAft>
-              <a:defRPr sz="1100">
-                <a:solidFill>
-                  <a:srgbClr val="94A3B8"/>
-                </a:solidFill>
-              </a:defRPr>
-            </a:pPr>
-            <a:r>
-              <a:t>→ Spaced repetition for wrong answers</a:t>
-            </a:r>
-          </a:p>
-          <a:p>
-            <a:pPr>
-              <a:spcAft>
-                <a:spcPts val="300"/>
-              </a:spcAft>
-              <a:defRPr sz="1100">
-                <a:solidFill>
-                  <a:srgbClr val="94A3B8"/>
-                </a:solidFill>
-              </a:defRPr>
-            </a:pPr>
-            <a:r>
-              <a:t>→ Milestone certificates (7/14/21/30 days)</a:t>
-            </a:r>
-          </a:p>
-          <a:p>
-            <a:pPr>
-              <a:spcAft>
-                <a:spcPts val="300"/>
-              </a:spcAft>
-              <a:defRPr sz="1100">
-                <a:solidFill>
-                  <a:srgbClr val="94A3B8"/>
-                </a:solidFill>
-              </a:defRPr>
-            </a:pPr>
-          </a:p>
-          <a:p>
-            <a:pPr>
-              <a:spcAft>
-                <a:spcPts val="300"/>
-              </a:spcAft>
-              <a:defRPr sz="1100">
-                <a:solidFill>
-                  <a:srgbClr val="94A3B8"/>
-                </a:solidFill>
-              </a:defRPr>
-            </a:pPr>
-            <a:r>
-              <a:t>The unit is 3 minutes, not a course.</a:t>
+                <a:spcPts val="500"/>
+              </a:spcAft>
+              <a:defRPr sz="1200" b="1">
+                <a:solidFill>
+                  <a:srgbClr val="4ADE80"/>
+                </a:solidFill>
+              </a:defRPr>
+            </a:pPr>
+            <a:r>
+              <a:t>1  ·  MOMENT</a:t>
+            </a:r>
+          </a:p>
+          <a:p>
+            <a:pPr>
+              <a:spcAft>
+                <a:spcPts val="200"/>
+              </a:spcAft>
+              <a:defRPr sz="1100">
+                <a:solidFill>
+                  <a:srgbClr val="D0D0D0"/>
+                </a:solidFill>
+              </a:defRPr>
+            </a:pPr>
+          </a:p>
+          <a:p>
+            <a:pPr>
+              <a:spcAft>
+                <a:spcPts val="200"/>
+              </a:spcAft>
+              <a:defRPr sz="1100">
+                <a:solidFill>
+                  <a:srgbClr val="D0D0D0"/>
+                </a:solidFill>
+              </a:defRPr>
+            </a:pPr>
+            <a:r>
+              <a:t>Sanket Sahayak</a:t>
+            </a:r>
+          </a:p>
+          <a:p>
+            <a:pPr>
+              <a:spcAft>
+                <a:spcPts val="200"/>
+              </a:spcAft>
+              <a:defRPr sz="1100">
+                <a:solidFill>
+                  <a:srgbClr val="D0D0D0"/>
+                </a:solidFill>
+              </a:defRPr>
+            </a:pPr>
+            <a:r>
+              <a:t>Two-way service turn</a:t>
+            </a:r>
+          </a:p>
+          <a:p>
+            <a:pPr>
+              <a:spcAft>
+                <a:spcPts val="200"/>
+              </a:spcAft>
+              <a:defRPr sz="1100">
+                <a:solidFill>
+                  <a:srgbClr val="D0D0D0"/>
+                </a:solidFill>
+              </a:defRPr>
+            </a:pPr>
+            <a:r>
+              <a:t>at the counter.</a:t>
+            </a:r>
+          </a:p>
+          <a:p>
+            <a:pPr>
+              <a:spcAft>
+                <a:spcPts val="200"/>
+              </a:spcAft>
+              <a:defRPr sz="1100">
+                <a:solidFill>
+                  <a:srgbClr val="D0D0D0"/>
+                </a:solidFill>
+              </a:defRPr>
+            </a:pPr>
+          </a:p>
+          <a:p>
+            <a:pPr>
+              <a:spcAft>
+                <a:spcPts val="200"/>
+              </a:spcAft>
+              <a:defRPr sz="1100">
+                <a:solidFill>
+                  <a:srgbClr val="D0D0D0"/>
+                </a:solidFill>
+              </a:defRPr>
+            </a:pPr>
+            <a:r>
+              <a:t>→ App speaks first</a:t>
+            </a:r>
+          </a:p>
+          <a:p>
+            <a:pPr>
+              <a:spcAft>
+                <a:spcPts val="200"/>
+              </a:spcAft>
+              <a:defRPr sz="1100">
+                <a:solidFill>
+                  <a:srgbClr val="D0D0D0"/>
+                </a:solidFill>
+              </a:defRPr>
+            </a:pPr>
+            <a:r>
+              <a:t>→ Citizen signs (camera)</a:t>
+            </a:r>
+          </a:p>
+          <a:p>
+            <a:pPr>
+              <a:spcAft>
+                <a:spcPts val="200"/>
+              </a:spcAft>
+              <a:defRPr sz="1100">
+                <a:solidFill>
+                  <a:srgbClr val="D0D0D0"/>
+                </a:solidFill>
+              </a:defRPr>
+            </a:pPr>
+            <a:r>
+              <a:t>→ Clerk taps reply</a:t>
+            </a:r>
+          </a:p>
+          <a:p>
+            <a:pPr>
+              <a:spcAft>
+                <a:spcPts val="200"/>
+              </a:spcAft>
+              <a:defRPr sz="1100">
+                <a:solidFill>
+                  <a:srgbClr val="D0D0D0"/>
+                </a:solidFill>
+              </a:defRPr>
+            </a:pPr>
+            <a:r>
+              <a:t>→ ISL chips + TTS</a:t>
+            </a:r>
+          </a:p>
+          <a:p>
+            <a:pPr>
+              <a:spcAft>
+                <a:spcPts val="200"/>
+              </a:spcAft>
+              <a:defRPr sz="1100">
+                <a:solidFill>
+                  <a:srgbClr val="D0D0D0"/>
+                </a:solidFill>
+              </a:defRPr>
+            </a:pPr>
+          </a:p>
+          <a:p>
+            <a:pPr>
+              <a:spcAft>
+                <a:spcPts val="200"/>
+              </a:spcAft>
+              <a:defRPr sz="1100">
+                <a:solidFill>
+                  <a:srgbClr val="D0D0D0"/>
+                </a:solidFill>
+              </a:defRPr>
+            </a:pPr>
+            <a:r>
+              <a:t>30 seconds.</a:t>
+            </a:r>
+          </a:p>
+          <a:p>
+            <a:pPr>
+              <a:spcAft>
+                <a:spcPts val="200"/>
+              </a:spcAft>
+              <a:defRPr sz="1100">
+                <a:solidFill>
+                  <a:srgbClr val="D0D0D0"/>
+                </a:solidFill>
+              </a:defRPr>
+            </a:pPr>
+            <a:r>
+              <a:t>That is the moment.</a:t>
             </a:r>
           </a:p>
         </p:txBody>
@@ -5466,14 +5581,14 @@
         </p:nvSpPr>
         <p:spPr>
           <a:xfrm>
-            <a:off x="7863840" y="2011680"/>
-            <a:ext cx="3566160" cy="3657600"/>
+            <a:off x="4389120" y="1828800"/>
+            <a:ext cx="3383280" cy="4206240"/>
           </a:xfrm>
           <a:prstGeom prst="roundRect">
             <a:avLst/>
           </a:prstGeom>
           <a:solidFill>
-            <a:srgbClr val="141E30"/>
+            <a:srgbClr val="121C2E"/>
           </a:solidFill>
           <a:ln>
             <a:noFill/>
@@ -5494,160 +5609,299 @@
           </a:fontRef>
         </p:style>
         <p:txBody>
-          <a:bodyPr rtlCol="0" anchor="ctr" wrap="square" lIns="137160" rIns="137160" tIns="109728"/>
+          <a:bodyPr rtlCol="0" anchor="ctr" wrap="square" lIns="128016" rIns="109728" tIns="91440"/>
           <a:lstStyle/>
           <a:p>
             <a:pPr algn="ctr">
               <a:spcAft>
-                <a:spcPts val="600"/>
-              </a:spcAft>
-              <a:defRPr sz="1400" b="1">
+                <a:spcPts val="500"/>
+              </a:spcAft>
+              <a:defRPr sz="1200" b="1">
+                <a:solidFill>
+                  <a:srgbClr val="818CF8"/>
+                </a:solidFill>
+              </a:defRPr>
+            </a:pPr>
+            <a:r>
+              <a:t>2  ·  HABIT</a:t>
+            </a:r>
+          </a:p>
+          <a:p>
+            <a:pPr>
+              <a:spcAft>
+                <a:spcPts val="200"/>
+              </a:spcAft>
+              <a:defRPr sz="1100">
+                <a:solidFill>
+                  <a:srgbClr val="D0D0D0"/>
+                </a:solidFill>
+              </a:defRPr>
+            </a:pPr>
+          </a:p>
+          <a:p>
+            <a:pPr>
+              <a:spcAft>
+                <a:spcPts val="200"/>
+              </a:spcAft>
+              <a:defRPr sz="1100">
+                <a:solidFill>
+                  <a:srgbClr val="D0D0D0"/>
+                </a:solidFill>
+              </a:defRPr>
+            </a:pPr>
+            <a:r>
+              <a:t>ISL Quest</a:t>
+            </a:r>
+          </a:p>
+          <a:p>
+            <a:pPr>
+              <a:spcAft>
+                <a:spcPts val="200"/>
+              </a:spcAft>
+              <a:defRPr sz="1100">
+                <a:solidFill>
+                  <a:srgbClr val="D0D0D0"/>
+                </a:solidFill>
+              </a:defRPr>
+            </a:pPr>
+            <a:r>
+              <a:t>3-minute gamified lessons.</a:t>
+            </a:r>
+          </a:p>
+          <a:p>
+            <a:pPr>
+              <a:spcAft>
+                <a:spcPts val="200"/>
+              </a:spcAft>
+              <a:defRPr sz="1100">
+                <a:solidFill>
+                  <a:srgbClr val="D0D0D0"/>
+                </a:solidFill>
+              </a:defRPr>
+            </a:pPr>
+            <a:r>
+              <a:t>XP. Streaks. Badges.</a:t>
+            </a:r>
+          </a:p>
+          <a:p>
+            <a:pPr>
+              <a:spcAft>
+                <a:spcPts val="200"/>
+              </a:spcAft>
+              <a:defRPr sz="1100">
+                <a:solidFill>
+                  <a:srgbClr val="D0D0D0"/>
+                </a:solidFill>
+              </a:defRPr>
+            </a:pPr>
+          </a:p>
+          <a:p>
+            <a:pPr>
+              <a:spcAft>
+                <a:spcPts val="200"/>
+              </a:spcAft>
+              <a:defRPr sz="1100">
+                <a:solidFill>
+                  <a:srgbClr val="D0D0D0"/>
+                </a:solidFill>
+              </a:defRPr>
+            </a:pPr>
+            <a:r>
+              <a:t>→ Daily lesson on desk</a:t>
+            </a:r>
+          </a:p>
+          <a:p>
+            <a:pPr>
+              <a:spcAft>
+                <a:spcPts val="200"/>
+              </a:spcAft>
+              <a:defRPr sz="1100">
+                <a:solidFill>
+                  <a:srgbClr val="D0D0D0"/>
+                </a:solidFill>
+              </a:defRPr>
+            </a:pPr>
+            <a:r>
+              <a:t>→ Webcam practice</a:t>
+            </a:r>
+          </a:p>
+          <a:p>
+            <a:pPr>
+              <a:spcAft>
+                <a:spcPts val="200"/>
+              </a:spcAft>
+              <a:defRPr sz="1100">
+                <a:solidFill>
+                  <a:srgbClr val="D0D0D0"/>
+                </a:solidFill>
+              </a:defRPr>
+            </a:pPr>
+            <a:r>
+              <a:t>→ 34 municipal signs</a:t>
+            </a:r>
+          </a:p>
+          <a:p>
+            <a:pPr>
+              <a:spcAft>
+                <a:spcPts val="200"/>
+              </a:spcAft>
+              <a:defRPr sz="1100">
+                <a:solidFill>
+                  <a:srgbClr val="D0D0D0"/>
+                </a:solidFill>
+              </a:defRPr>
+            </a:pPr>
+            <a:r>
+              <a:t>→ Spaced repetition</a:t>
+            </a:r>
+          </a:p>
+          <a:p>
+            <a:pPr>
+              <a:spcAft>
+                <a:spcPts val="200"/>
+              </a:spcAft>
+              <a:defRPr sz="1100">
+                <a:solidFill>
+                  <a:srgbClr val="D0D0D0"/>
+                </a:solidFill>
+              </a:defRPr>
+            </a:pPr>
+          </a:p>
+          <a:p>
+            <a:pPr>
+              <a:spcAft>
+                <a:spcPts val="200"/>
+              </a:spcAft>
+              <a:defRPr sz="1100">
+                <a:solidFill>
+                  <a:srgbClr val="D0D0D0"/>
+                </a:solidFill>
+              </a:defRPr>
+            </a:pPr>
+            <a:r>
+              <a:t>The unit is 3 minutes,</a:t>
+            </a:r>
+          </a:p>
+          <a:p>
+            <a:pPr>
+              <a:spcAft>
+                <a:spcPts val="200"/>
+              </a:spcAft>
+              <a:defRPr sz="1100">
+                <a:solidFill>
+                  <a:srgbClr val="D0D0D0"/>
+                </a:solidFill>
+              </a:defRPr>
+            </a:pPr>
+            <a:r>
+              <a:t>not a course.</a:t>
+            </a:r>
+          </a:p>
+        </p:txBody>
+      </p:sp>
+      <p:sp>
+        <p:nvSpPr>
+          <p:cNvPr id="8" name="Rounded Rectangle 7"/>
+          <p:cNvSpPr/>
+          <p:nvPr/>
+        </p:nvSpPr>
+        <p:spPr>
+          <a:xfrm>
+            <a:off x="8046720" y="1828800"/>
+            <a:ext cx="3383280" cy="4206240"/>
+          </a:xfrm>
+          <a:prstGeom prst="roundRect">
+            <a:avLst/>
+          </a:prstGeom>
+          <a:solidFill>
+            <a:srgbClr val="121C2E"/>
+          </a:solidFill>
+          <a:ln>
+            <a:noFill/>
+          </a:ln>
+        </p:spPr>
+        <p:style>
+          <a:lnRef idx="1">
+            <a:schemeClr val="accent1"/>
+          </a:lnRef>
+          <a:fillRef idx="3">
+            <a:schemeClr val="accent1"/>
+          </a:fillRef>
+          <a:effectRef idx="2">
+            <a:schemeClr val="accent1"/>
+          </a:effectRef>
+          <a:fontRef idx="minor">
+            <a:schemeClr val="lt1"/>
+          </a:fontRef>
+        </p:style>
+        <p:txBody>
+          <a:bodyPr rtlCol="0" anchor="ctr" wrap="square" lIns="128016" rIns="109728" tIns="91440"/>
+          <a:lstStyle/>
+          <a:p>
+            <a:pPr algn="ctr">
+              <a:spcAft>
+                <a:spcPts val="500"/>
+              </a:spcAft>
+              <a:defRPr sz="1200" b="1">
                 <a:solidFill>
                   <a:srgbClr val="FB923C"/>
                 </a:solidFill>
               </a:defRPr>
             </a:pPr>
             <a:r>
-              <a:t>3 · SCORE</a:t>
-            </a:r>
-          </a:p>
-          <a:p>
-            <a:pPr>
-              <a:spcAft>
-                <a:spcPts val="300"/>
-              </a:spcAft>
-              <a:defRPr sz="1100">
-                <a:solidFill>
-                  <a:srgbClr val="94A3B8"/>
-                </a:solidFill>
-              </a:defRPr>
-            </a:pPr>
-            <a:r>
-              <a:t>Sugamya Score — the departmental</a:t>
-            </a:r>
-          </a:p>
-          <a:p>
-            <a:pPr>
-              <a:spcAft>
-                <a:spcPts val="300"/>
-              </a:spcAft>
-              <a:defRPr sz="1100">
-                <a:solidFill>
-                  <a:srgbClr val="94A3B8"/>
-                </a:solidFill>
-              </a:defRPr>
-            </a:pPr>
-            <a:r>
-              <a:t>compliance metric.</a:t>
-            </a:r>
-          </a:p>
-          <a:p>
-            <a:pPr>
-              <a:spcAft>
-                <a:spcPts val="300"/>
-              </a:spcAft>
-              <a:defRPr sz="1100">
-                <a:solidFill>
-                  <a:srgbClr val="94A3B8"/>
-                </a:solidFill>
-              </a:defRPr>
-            </a:pPr>
-          </a:p>
-          <a:p>
-            <a:pPr>
-              <a:spcAft>
-                <a:spcPts val="300"/>
-              </a:spcAft>
-              <a:defRPr sz="1100">
-                <a:solidFill>
-                  <a:srgbClr val="94A3B8"/>
-                </a:solidFill>
-              </a:defRPr>
-            </a:pPr>
-            <a:r>
-              <a:t>45% Compliance (DAL + streak)</a:t>
-            </a:r>
-          </a:p>
-          <a:p>
-            <a:pPr>
-              <a:spcAft>
-                <a:spcPts val="300"/>
-              </a:spcAft>
-              <a:defRPr sz="1100">
-                <a:solidFill>
-                  <a:srgbClr val="94A3B8"/>
-                </a:solidFill>
-              </a:defRPr>
-            </a:pPr>
-            <a:r>
-              <a:t>30% Citizen Satisfaction (QR feedback)</a:t>
-            </a:r>
-          </a:p>
-          <a:p>
-            <a:pPr>
-              <a:spcAft>
-                <a:spcPts val="300"/>
-              </a:spcAft>
-              <a:defRPr sz="1100">
-                <a:solidFill>
-                  <a:srgbClr val="94A3B8"/>
-                </a:solidFill>
-              </a:defRPr>
-            </a:pPr>
-            <a:r>
-              <a:t>15% Participation (active learners)</a:t>
-            </a:r>
-          </a:p>
-          <a:p>
-            <a:pPr>
-              <a:spcAft>
-                <a:spcPts val="300"/>
-              </a:spcAft>
-              <a:defRPr sz="1100">
-                <a:solidFill>
-                  <a:srgbClr val="94A3B8"/>
-                </a:solidFill>
-              </a:defRPr>
-            </a:pPr>
-            <a:r>
-              <a:t>10% Human Safety Net (escalations)</a:t>
-            </a:r>
-          </a:p>
-          <a:p>
-            <a:pPr>
-              <a:spcAft>
-                <a:spcPts val="300"/>
-              </a:spcAft>
-              <a:defRPr sz="1100">
-                <a:solidFill>
-                  <a:srgbClr val="94A3B8"/>
-                </a:solidFill>
-              </a:defRPr>
-            </a:pPr>
-          </a:p>
-          <a:p>
-            <a:pPr>
-              <a:spcAft>
-                <a:spcPts val="300"/>
-              </a:spcAft>
-              <a:defRPr sz="1100">
-                <a:solidFill>
-                  <a:srgbClr val="94A3B8"/>
-                </a:solidFill>
-              </a:defRPr>
-            </a:pPr>
-            <a:r>
-              <a:t>Rewards honesty, not just completion.</a:t>
-            </a:r>
-          </a:p>
-          <a:p>
-            <a:pPr>
-              <a:spcAft>
-                <a:spcPts val="300"/>
-              </a:spcAft>
-              <a:defRPr sz="1100">
-                <a:solidFill>
-                  <a:srgbClr val="94A3B8"/>
+              <a:t>3  ·  SCORE</a:t>
+            </a:r>
+          </a:p>
+          <a:p>
+            <a:pPr>
+              <a:spcAft>
+                <a:spcPts val="200"/>
+              </a:spcAft>
+              <a:defRPr sz="1100">
+                <a:solidFill>
+                  <a:srgbClr val="D0D0D0"/>
+                </a:solidFill>
+              </a:defRPr>
+            </a:pPr>
+          </a:p>
+          <a:p>
+            <a:pPr>
+              <a:spcAft>
+                <a:spcPts val="200"/>
+              </a:spcAft>
+              <a:defRPr sz="1100">
+                <a:solidFill>
+                  <a:srgbClr val="D0D0D0"/>
+                </a:solidFill>
+              </a:defRPr>
+            </a:pPr>
+            <a:r>
+              <a:t>Sugamya Score</a:t>
+            </a:r>
+          </a:p>
+          <a:p>
+            <a:pPr>
+              <a:spcAft>
+                <a:spcPts val="200"/>
+              </a:spcAft>
+              <a:defRPr sz="1100">
+                <a:solidFill>
+                  <a:srgbClr val="D0D0D0"/>
+                </a:solidFill>
+              </a:defRPr>
+            </a:pPr>
+            <a:r>
+              <a:t>Departmental compliance.</a:t>
+            </a:r>
+          </a:p>
+          <a:p>
+            <a:pPr>
+              <a:spcAft>
+                <a:spcPts val="200"/>
+              </a:spcAft>
+              <a:defRPr sz="1100">
+                <a:solidFill>
+                  <a:srgbClr val="D0D0D0"/>
                 </a:solidFill>
               </a:defRPr>
             </a:pPr>
@@ -5655,18 +5909,132 @@
               <a:t>Real data. Not aspirational.</a:t>
             </a:r>
           </a:p>
-        </p:txBody>
-      </p:sp>
-      <p:sp>
-        <p:nvSpPr>
-          <p:cNvPr id="8" name="TextBox 7"/>
+          <a:p>
+            <a:pPr>
+              <a:spcAft>
+                <a:spcPts val="200"/>
+              </a:spcAft>
+              <a:defRPr sz="1100">
+                <a:solidFill>
+                  <a:srgbClr val="D0D0D0"/>
+                </a:solidFill>
+              </a:defRPr>
+            </a:pPr>
+          </a:p>
+          <a:p>
+            <a:pPr>
+              <a:spcAft>
+                <a:spcPts val="200"/>
+              </a:spcAft>
+              <a:defRPr sz="1100">
+                <a:solidFill>
+                  <a:srgbClr val="D0D0D0"/>
+                </a:solidFill>
+              </a:defRPr>
+            </a:pPr>
+            <a:r>
+              <a:t>45% Compliance</a:t>
+            </a:r>
+          </a:p>
+          <a:p>
+            <a:pPr>
+              <a:spcAft>
+                <a:spcPts val="200"/>
+              </a:spcAft>
+              <a:defRPr sz="1100">
+                <a:solidFill>
+                  <a:srgbClr val="D0D0D0"/>
+                </a:solidFill>
+              </a:defRPr>
+            </a:pPr>
+            <a:r>
+              <a:t>30% Citizen Satisfaction</a:t>
+            </a:r>
+          </a:p>
+          <a:p>
+            <a:pPr>
+              <a:spcAft>
+                <a:spcPts val="200"/>
+              </a:spcAft>
+              <a:defRPr sz="1100">
+                <a:solidFill>
+                  <a:srgbClr val="D0D0D0"/>
+                </a:solidFill>
+              </a:defRPr>
+            </a:pPr>
+            <a:r>
+              <a:t>15% Participation</a:t>
+            </a:r>
+          </a:p>
+          <a:p>
+            <a:pPr>
+              <a:spcAft>
+                <a:spcPts val="200"/>
+              </a:spcAft>
+              <a:defRPr sz="1100">
+                <a:solidFill>
+                  <a:srgbClr val="D0D0D0"/>
+                </a:solidFill>
+              </a:defRPr>
+            </a:pPr>
+            <a:r>
+              <a:t>10% Human Safety Net</a:t>
+            </a:r>
+          </a:p>
+          <a:p>
+            <a:pPr>
+              <a:spcAft>
+                <a:spcPts val="200"/>
+              </a:spcAft>
+              <a:defRPr sz="1100">
+                <a:solidFill>
+                  <a:srgbClr val="D0D0D0"/>
+                </a:solidFill>
+              </a:defRPr>
+            </a:pPr>
+          </a:p>
+          <a:p>
+            <a:pPr>
+              <a:spcAft>
+                <a:spcPts val="200"/>
+              </a:spcAft>
+              <a:defRPr sz="1100">
+                <a:solidFill>
+                  <a:srgbClr val="D0D0D0"/>
+                </a:solidFill>
+              </a:defRPr>
+            </a:pPr>
+            <a:r>
+              <a:t>Rewards honesty,</a:t>
+            </a:r>
+          </a:p>
+          <a:p>
+            <a:pPr>
+              <a:spcAft>
+                <a:spcPts val="200"/>
+              </a:spcAft>
+              <a:defRPr sz="1100">
+                <a:solidFill>
+                  <a:srgbClr val="D0D0D0"/>
+                </a:solidFill>
+              </a:defRPr>
+            </a:pPr>
+            <a:r>
+              <a:t>not just completion.</a:t>
+            </a:r>
+          </a:p>
+        </p:txBody>
+      </p:sp>
+      <p:sp>
+        <p:nvSpPr>
+          <p:cNvPr id="9" name="TextBox 8"/>
           <p:cNvSpPr txBox="1"/>
           <p:nvPr/>
         </p:nvSpPr>
         <p:spPr>
           <a:xfrm>
-            <a:off x="457200" y="6400800"/>
-            <a:ext cx="10972800" cy="365760"/>
+            <a:off x="457200" y="6446520"/>
+            <a:ext cx="11247120" cy="274320"/>
           </a:xfrm>
           <a:prstGeom prst="rect">
             <a:avLst/>
@@ -5680,9 +6048,9 @@
           <a:lstStyle/>
           <a:p>
             <a:pPr algn="ctr">
-              <a:defRPr sz="900" b="0">
-                <a:solidFill>
-                  <a:srgbClr val="475569"/>
+              <a:defRPr sz="800" b="0">
+                <a:solidFill>
+                  <a:srgbClr val="505E72"/>
                 </a:solidFill>
               </a:defRPr>
             </a:pPr>
@@ -5726,8 +6094,8 @@
         </p:nvSpPr>
         <p:spPr>
           <a:xfrm>
-            <a:off x="731520" y="320040"/>
-            <a:ext cx="5486400" cy="274320"/>
+            <a:off x="731520" y="274320"/>
+            <a:ext cx="10972800" cy="256032"/>
           </a:xfrm>
           <a:prstGeom prst="rect">
             <a:avLst/>
@@ -5755,90 +6123,20 @@
       </p:sp>
       <p:sp>
         <p:nvSpPr>
-          <p:cNvPr id="3" name="TextBox 2"/>
-          <p:cNvSpPr txBox="1"/>
-          <p:nvPr/>
-        </p:nvSpPr>
-        <p:spPr>
-          <a:xfrm>
-            <a:off x="731520" y="640080"/>
-            <a:ext cx="10058400" cy="640080"/>
+          <p:cNvPr id="3" name="Rectangle 2"/>
+          <p:cNvSpPr/>
+          <p:nvPr/>
+        </p:nvSpPr>
+        <p:spPr>
+          <a:xfrm>
+            <a:off x="731520" y="566928"/>
+            <a:ext cx="1371600" cy="16459"/>
           </a:xfrm>
           <a:prstGeom prst="rect">
             <a:avLst/>
           </a:prstGeom>
-          <a:noFill/>
-        </p:spPr>
-        <p:txBody>
-          <a:bodyPr wrap="square">
-            <a:spAutoFit/>
-          </a:bodyPr>
-          <a:lstStyle/>
-          <a:p>
-            <a:pPr algn="l">
-              <a:defRPr sz="3400" b="1">
-                <a:solidFill>
-                  <a:srgbClr val="FFFFFF"/>
-                </a:solidFill>
-              </a:defRPr>
-            </a:pPr>
-            <a:r>
-              <a:t>Boring, reliable technology — on a five-minute demo budget.</a:t>
-            </a:r>
-          </a:p>
-        </p:txBody>
-      </p:sp>
-      <p:sp>
-        <p:nvSpPr>
-          <p:cNvPr id="4" name="TextBox 3"/>
-          <p:cNvSpPr txBox="1"/>
-          <p:nvPr/>
-        </p:nvSpPr>
-        <p:spPr>
-          <a:xfrm>
-            <a:off x="731520" y="1234440"/>
-            <a:ext cx="10058400" cy="457200"/>
-          </a:xfrm>
-          <a:prstGeom prst="rect">
-            <a:avLst/>
-          </a:prstGeom>
-          <a:noFill/>
-        </p:spPr>
-        <p:txBody>
-          <a:bodyPr wrap="square">
-            <a:spAutoFit/>
-          </a:bodyPr>
-          <a:lstStyle/>
-          <a:p>
-            <a:pPr algn="l">
-              <a:defRPr sz="1400" b="0">
-                <a:solidFill>
-                  <a:srgbClr val="94A3B8"/>
-                </a:solidFill>
-              </a:defRPr>
-            </a:pPr>
-            <a:r>
-              <a:t>Next.js 14 + MongoDB Atlas + MediaPipe + kNN + Vercel</a:t>
-            </a:r>
-          </a:p>
-        </p:txBody>
-      </p:sp>
-      <p:sp>
-        <p:nvSpPr>
-          <p:cNvPr id="5" name="Rounded Rectangle 4"/>
-          <p:cNvSpPr/>
-          <p:nvPr/>
-        </p:nvSpPr>
-        <p:spPr>
-          <a:xfrm>
-            <a:off x="731520" y="1828800"/>
-            <a:ext cx="2011680" cy="914400"/>
-          </a:xfrm>
-          <a:prstGeom prst="roundRect">
-            <a:avLst/>
-          </a:prstGeom>
           <a:solidFill>
-            <a:srgbClr val="141E30"/>
+            <a:srgbClr val="C9A961"/>
           </a:solidFill>
           <a:ln>
             <a:noFill/>
@@ -5859,37 +6157,79 @@
           </a:fontRef>
         </p:style>
         <p:txBody>
-          <a:bodyPr rtlCol="0" anchor="ctr" wrap="square" lIns="137160" rIns="137160" tIns="109728"/>
-          <a:lstStyle/>
-          <a:p>
-            <a:pPr algn="ctr">
-              <a:spcAft>
-                <a:spcPts val="600"/>
-              </a:spcAft>
-              <a:defRPr sz="1400" b="1">
-                <a:solidFill>
-                  <a:srgbClr val="818CF8"/>
-                </a:solidFill>
-              </a:defRPr>
-            </a:pPr>
-          </a:p>
-          <a:p>
-            <a:pPr>
-              <a:spcAft>
-                <a:spcPts val="300"/>
-              </a:spcAft>
-              <a:defRPr sz="1100">
-                <a:solidFill>
-                  <a:srgbClr val="94A3B8"/>
-                </a:solidFill>
-              </a:defRPr>
-            </a:pPr>
-            <a:r>
-              <a:t>MediaPipe</a:t>
-            </a:r>
-            <a:br/>
-            <a:r>
-              <a:t>21 landmarks</a:t>
+          <a:bodyPr rtlCol="0" anchor="ctr"/>
+          <a:lstStyle/>
+          <a:p>
+            <a:pPr algn="ctr"/>
+          </a:p>
+        </p:txBody>
+      </p:sp>
+      <p:sp>
+        <p:nvSpPr>
+          <p:cNvPr id="4" name="TextBox 3"/>
+          <p:cNvSpPr txBox="1"/>
+          <p:nvPr/>
+        </p:nvSpPr>
+        <p:spPr>
+          <a:xfrm>
+            <a:off x="731520" y="658368"/>
+            <a:ext cx="10972800" cy="548640"/>
+          </a:xfrm>
+          <a:prstGeom prst="rect">
+            <a:avLst/>
+          </a:prstGeom>
+          <a:noFill/>
+        </p:spPr>
+        <p:txBody>
+          <a:bodyPr wrap="square">
+            <a:spAutoFit/>
+          </a:bodyPr>
+          <a:lstStyle/>
+          <a:p>
+            <a:pPr algn="l">
+              <a:defRPr sz="3200" b="1">
+                <a:solidFill>
+                  <a:srgbClr val="FFFFFF"/>
+                </a:solidFill>
+              </a:defRPr>
+            </a:pPr>
+            <a:r>
+              <a:t>Boring, reliable technology.</a:t>
+            </a:r>
+          </a:p>
+        </p:txBody>
+      </p:sp>
+      <p:sp>
+        <p:nvSpPr>
+          <p:cNvPr id="5" name="TextBox 4"/>
+          <p:cNvSpPr txBox="1"/>
+          <p:nvPr/>
+        </p:nvSpPr>
+        <p:spPr>
+          <a:xfrm>
+            <a:off x="731520" y="1188720"/>
+            <a:ext cx="10972800" cy="320040"/>
+          </a:xfrm>
+          <a:prstGeom prst="rect">
+            <a:avLst/>
+          </a:prstGeom>
+          <a:noFill/>
+        </p:spPr>
+        <p:txBody>
+          <a:bodyPr wrap="square">
+            <a:spAutoFit/>
+          </a:bodyPr>
+          <a:lstStyle/>
+          <a:p>
+            <a:pPr algn="l">
+              <a:defRPr sz="1300" b="0">
+                <a:solidFill>
+                  <a:srgbClr val="8896AA"/>
+                </a:solidFill>
+              </a:defRPr>
+            </a:pPr>
+            <a:r>
+              <a:t>Next.js 14  +  MongoDB Atlas  +  MediaPipe  +  kNN  +  Vercel</a:t>
             </a:r>
           </a:p>
         </p:txBody>
@@ -5902,14 +6242,14 @@
         </p:nvSpPr>
         <p:spPr>
           <a:xfrm>
-            <a:off x="3017520" y="1828800"/>
-            <a:ext cx="2011680" cy="914400"/>
+            <a:off x="731520" y="1828800"/>
+            <a:ext cx="1920240" cy="822960"/>
           </a:xfrm>
           <a:prstGeom prst="roundRect">
             <a:avLst/>
           </a:prstGeom>
           <a:solidFill>
-            <a:srgbClr val="141E30"/>
+            <a:srgbClr val="121C2E"/>
           </a:solidFill>
           <a:ln>
             <a:noFill/>
@@ -5930,57 +6270,45 @@
           </a:fontRef>
         </p:style>
         <p:txBody>
-          <a:bodyPr rtlCol="0" anchor="ctr" wrap="square" lIns="137160" rIns="137160" tIns="109728"/>
+          <a:bodyPr rtlCol="0" anchor="ctr" wrap="square" lIns="128016" rIns="109728" tIns="91440"/>
           <a:lstStyle/>
           <a:p>
             <a:pPr algn="ctr">
               <a:spcAft>
-                <a:spcPts val="600"/>
-              </a:spcAft>
-              <a:defRPr sz="1400" b="1">
-                <a:solidFill>
-                  <a:srgbClr val="818CF8"/>
-                </a:solidFill>
-              </a:defRPr>
-            </a:pPr>
-          </a:p>
-          <a:p>
-            <a:pPr>
-              <a:spcAft>
-                <a:spcPts val="300"/>
-              </a:spcAft>
-              <a:defRPr sz="1100">
-                <a:solidFill>
-                  <a:srgbClr val="94A3B8"/>
-                </a:solidFill>
-              </a:defRPr>
-            </a:pPr>
-            <a:r>
-              <a:t>kNN Classifier</a:t>
+                <a:spcPts val="200"/>
+              </a:spcAft>
+              <a:defRPr sz="1100">
+                <a:solidFill>
+                  <a:srgbClr val="D0D0D0"/>
+                </a:solidFill>
+              </a:defRPr>
+            </a:pPr>
+            <a:r>
+              <a:t>📷 MediaPipe</a:t>
             </a:r>
             <a:br/>
             <a:r>
-              <a:t>demo-grade</a:t>
-            </a:r>
-          </a:p>
-        </p:txBody>
-      </p:sp>
-      <p:sp>
-        <p:nvSpPr>
-          <p:cNvPr id="7" name="Rounded Rectangle 6"/>
+              <a:t>21 landmarks</a:t>
+            </a:r>
+          </a:p>
+        </p:txBody>
+      </p:sp>
+      <p:sp>
+        <p:nvSpPr>
+          <p:cNvPr id="7" name="Right Arrow 6"/>
           <p:cNvSpPr/>
           <p:nvPr/>
         </p:nvSpPr>
         <p:spPr>
           <a:xfrm>
-            <a:off x="5303520" y="1828800"/>
-            <a:ext cx="2011680" cy="914400"/>
-          </a:xfrm>
-          <a:prstGeom prst="roundRect">
+            <a:off x="2697480" y="2103120"/>
+            <a:ext cx="182880" cy="228600"/>
+          </a:xfrm>
+          <a:prstGeom prst="rightArrow">
             <a:avLst/>
           </a:prstGeom>
           <a:solidFill>
-            <a:srgbClr val="141E30"/>
+            <a:srgbClr val="505E72"/>
           </a:solidFill>
           <a:ln>
             <a:noFill/>
@@ -6001,38 +6329,10 @@
           </a:fontRef>
         </p:style>
         <p:txBody>
-          <a:bodyPr rtlCol="0" anchor="ctr" wrap="square" lIns="137160" rIns="137160" tIns="109728"/>
-          <a:lstStyle/>
-          <a:p>
-            <a:pPr algn="ctr">
-              <a:spcAft>
-                <a:spcPts val="600"/>
-              </a:spcAft>
-              <a:defRPr sz="1400" b="1">
-                <a:solidFill>
-                  <a:srgbClr val="818CF8"/>
-                </a:solidFill>
-              </a:defRPr>
-            </a:pPr>
-          </a:p>
-          <a:p>
-            <a:pPr>
-              <a:spcAft>
-                <a:spcPts val="300"/>
-              </a:spcAft>
-              <a:defRPr sz="1100">
-                <a:solidFill>
-                  <a:srgbClr val="94A3B8"/>
-                </a:solidFill>
-              </a:defRPr>
-            </a:pPr>
-            <a:r>
-              <a:t>Clerk UI</a:t>
-            </a:r>
-            <a:br/>
-            <a:r>
-              <a:t>React components</a:t>
-            </a:r>
+          <a:bodyPr rtlCol="0" anchor="ctr"/>
+          <a:lstStyle/>
+          <a:p>
+            <a:pPr algn="ctr"/>
           </a:p>
         </p:txBody>
       </p:sp>
@@ -6044,14 +6344,14 @@
         </p:nvSpPr>
         <p:spPr>
           <a:xfrm>
-            <a:off x="7589520" y="1828800"/>
-            <a:ext cx="2011680" cy="914400"/>
+            <a:off x="2926080" y="1828800"/>
+            <a:ext cx="1920240" cy="822960"/>
           </a:xfrm>
           <a:prstGeom prst="roundRect">
             <a:avLst/>
           </a:prstGeom>
           <a:solidFill>
-            <a:srgbClr val="141E30"/>
+            <a:srgbClr val="121C2E"/>
           </a:solidFill>
           <a:ln>
             <a:noFill/>
@@ -6072,57 +6372,45 @@
           </a:fontRef>
         </p:style>
         <p:txBody>
-          <a:bodyPr rtlCol="0" anchor="ctr" wrap="square" lIns="137160" rIns="137160" tIns="109728"/>
+          <a:bodyPr rtlCol="0" anchor="ctr" wrap="square" lIns="128016" rIns="109728" tIns="91440"/>
           <a:lstStyle/>
           <a:p>
             <a:pPr algn="ctr">
               <a:spcAft>
-                <a:spcPts val="600"/>
-              </a:spcAft>
-              <a:defRPr sz="1400" b="1">
-                <a:solidFill>
-                  <a:srgbClr val="818CF8"/>
-                </a:solidFill>
-              </a:defRPr>
-            </a:pPr>
-          </a:p>
-          <a:p>
-            <a:pPr>
-              <a:spcAft>
-                <a:spcPts val="300"/>
-              </a:spcAft>
-              <a:defRPr sz="1100">
-                <a:solidFill>
-                  <a:srgbClr val="94A3B8"/>
-                </a:solidFill>
-              </a:defRPr>
-            </a:pPr>
-            <a:r>
-              <a:t>API Routes</a:t>
+                <a:spcPts val="200"/>
+              </a:spcAft>
+              <a:defRPr sz="1100">
+                <a:solidFill>
+                  <a:srgbClr val="D0D0D0"/>
+                </a:solidFill>
+              </a:defRPr>
+            </a:pPr>
+            <a:r>
+              <a:t>🧠 kNN</a:t>
             </a:r>
             <a:br/>
             <a:r>
-              <a:t>serverless</a:t>
-            </a:r>
-          </a:p>
-        </p:txBody>
-      </p:sp>
-      <p:sp>
-        <p:nvSpPr>
-          <p:cNvPr id="9" name="Rounded Rectangle 8"/>
+              <a:t>k=3, conf≥0.45</a:t>
+            </a:r>
+          </a:p>
+        </p:txBody>
+      </p:sp>
+      <p:sp>
+        <p:nvSpPr>
+          <p:cNvPr id="9" name="Right Arrow 8"/>
           <p:cNvSpPr/>
           <p:nvPr/>
         </p:nvSpPr>
         <p:spPr>
           <a:xfrm>
-            <a:off x="9875520" y="1828800"/>
-            <a:ext cx="2011680" cy="914400"/>
-          </a:xfrm>
-          <a:prstGeom prst="roundRect">
+            <a:off x="4892040" y="2103120"/>
+            <a:ext cx="182880" cy="228600"/>
+          </a:xfrm>
+          <a:prstGeom prst="rightArrow">
             <a:avLst/>
           </a:prstGeom>
           <a:solidFill>
-            <a:srgbClr val="141E30"/>
+            <a:srgbClr val="505E72"/>
           </a:solidFill>
           <a:ln>
             <a:noFill/>
@@ -6143,38 +6431,10 @@
           </a:fontRef>
         </p:style>
         <p:txBody>
-          <a:bodyPr rtlCol="0" anchor="ctr" wrap="square" lIns="137160" rIns="137160" tIns="109728"/>
-          <a:lstStyle/>
-          <a:p>
-            <a:pPr algn="ctr">
-              <a:spcAft>
-                <a:spcPts val="600"/>
-              </a:spcAft>
-              <a:defRPr sz="1400" b="1">
-                <a:solidFill>
-                  <a:srgbClr val="818CF8"/>
-                </a:solidFill>
-              </a:defRPr>
-            </a:pPr>
-          </a:p>
-          <a:p>
-            <a:pPr>
-              <a:spcAft>
-                <a:spcPts val="300"/>
-              </a:spcAft>
-              <a:defRPr sz="1100">
-                <a:solidFill>
-                  <a:srgbClr val="94A3B8"/>
-                </a:solidFill>
-              </a:defRPr>
-            </a:pPr>
-            <a:r>
-              <a:t>MongoDB Atlas</a:t>
-            </a:r>
-            <a:br/>
-            <a:r>
-              <a:t>users, modules</a:t>
-            </a:r>
+          <a:bodyPr rtlCol="0" anchor="ctr"/>
+          <a:lstStyle/>
+          <a:p>
+            <a:pPr algn="ctr"/>
           </a:p>
         </p:txBody>
       </p:sp>
@@ -6186,14 +6446,14 @@
         </p:nvSpPr>
         <p:spPr>
           <a:xfrm>
-            <a:off x="731520" y="3017520"/>
-            <a:ext cx="3291840" cy="1828800"/>
+            <a:off x="5120640" y="1828800"/>
+            <a:ext cx="1920240" cy="822960"/>
           </a:xfrm>
           <a:prstGeom prst="roundRect">
             <a:avLst/>
           </a:prstGeom>
           <a:solidFill>
-            <a:srgbClr val="141E30"/>
+            <a:srgbClr val="121C2E"/>
           </a:solidFill>
           <a:ln>
             <a:noFill/>
@@ -6214,86 +6474,45 @@
           </a:fontRef>
         </p:style>
         <p:txBody>
-          <a:bodyPr rtlCol="0" anchor="ctr" wrap="square" lIns="137160" rIns="137160" tIns="109728"/>
+          <a:bodyPr rtlCol="0" anchor="ctr" wrap="square" lIns="128016" rIns="109728" tIns="91440"/>
           <a:lstStyle/>
           <a:p>
             <a:pPr algn="ctr">
               <a:spcAft>
-                <a:spcPts val="600"/>
-              </a:spcAft>
-              <a:defRPr sz="1400" b="1">
-                <a:solidFill>
-                  <a:srgbClr val="C9A961"/>
-                </a:solidFill>
-              </a:defRPr>
-            </a:pPr>
-            <a:r>
-              <a:t>FRONTEND</a:t>
-            </a:r>
-          </a:p>
-          <a:p>
-            <a:pPr>
-              <a:spcAft>
-                <a:spcPts val="300"/>
-              </a:spcAft>
-              <a:defRPr sz="1100">
-                <a:solidFill>
-                  <a:srgbClr val="94A3B8"/>
-                </a:solidFill>
-              </a:defRPr>
-            </a:pPr>
-            <a:r>
-              <a:t>Next.js 14 App Router · Tailwind CSS</a:t>
-            </a:r>
-          </a:p>
-          <a:p>
-            <a:pPr>
-              <a:spcAft>
-                <a:spcPts val="300"/>
-              </a:spcAft>
-              <a:defRPr sz="1100">
-                <a:solidFill>
-                  <a:srgbClr val="94A3B8"/>
-                </a:solidFill>
-              </a:defRPr>
-            </a:pPr>
-            <a:r>
-              <a:t>PWA · dark mode · EN/HI/MR</a:t>
-            </a:r>
-          </a:p>
-          <a:p>
-            <a:pPr>
-              <a:spcAft>
-                <a:spcPts val="300"/>
-              </a:spcAft>
-              <a:defRPr sz="1100">
-                <a:solidFill>
-                  <a:srgbClr val="94A3B8"/>
-                </a:solidFill>
-              </a:defRPr>
-            </a:pPr>
-            <a:r>
-              <a:t>Recharts · jsPDF · ServiceWorker</a:t>
-            </a:r>
-          </a:p>
-        </p:txBody>
-      </p:sp>
-      <p:sp>
-        <p:nvSpPr>
-          <p:cNvPr id="11" name="Rounded Rectangle 10"/>
+                <a:spcPts val="200"/>
+              </a:spcAft>
+              <a:defRPr sz="1100">
+                <a:solidFill>
+                  <a:srgbClr val="D0D0D0"/>
+                </a:solidFill>
+              </a:defRPr>
+            </a:pPr>
+            <a:r>
+              <a:t>💬 Clerk UI</a:t>
+            </a:r>
+            <a:br/>
+            <a:r>
+              <a:t>React</a:t>
+            </a:r>
+          </a:p>
+        </p:txBody>
+      </p:sp>
+      <p:sp>
+        <p:nvSpPr>
+          <p:cNvPr id="11" name="Right Arrow 10"/>
           <p:cNvSpPr/>
           <p:nvPr/>
         </p:nvSpPr>
         <p:spPr>
           <a:xfrm>
-            <a:off x="4297680" y="3017520"/>
-            <a:ext cx="3291840" cy="1828800"/>
-          </a:xfrm>
-          <a:prstGeom prst="roundRect">
+            <a:off x="7086599" y="2103120"/>
+            <a:ext cx="182880" cy="228600"/>
+          </a:xfrm>
+          <a:prstGeom prst="rightArrow">
             <a:avLst/>
           </a:prstGeom>
           <a:solidFill>
-            <a:srgbClr val="141E30"/>
+            <a:srgbClr val="505E72"/>
           </a:solidFill>
           <a:ln>
             <a:noFill/>
@@ -6314,82 +6533,10 @@
           </a:fontRef>
         </p:style>
         <p:txBody>
-          <a:bodyPr rtlCol="0" anchor="ctr" wrap="square" lIns="137160" rIns="137160" tIns="109728"/>
-          <a:lstStyle/>
-          <a:p>
-            <a:pPr algn="ctr">
-              <a:spcAft>
-                <a:spcPts val="600"/>
-              </a:spcAft>
-              <a:defRPr sz="1400" b="1">
-                <a:solidFill>
-                  <a:srgbClr val="FB923C"/>
-                </a:solidFill>
-              </a:defRPr>
-            </a:pPr>
-            <a:r>
-              <a:t>RECOGNITION — HONEST</a:t>
-            </a:r>
-          </a:p>
-          <a:p>
-            <a:pPr>
-              <a:spcAft>
-                <a:spcPts val="300"/>
-              </a:spcAft>
-              <a:defRPr sz="1100">
-                <a:solidFill>
-                  <a:srgbClr val="94A3B8"/>
-                </a:solidFill>
-              </a:defRPr>
-            </a:pPr>
-            <a:r>
-              <a:t>Euclidean kNN · k=3 · conf ≥0.45</a:t>
-            </a:r>
-          </a:p>
-          <a:p>
-            <a:pPr>
-              <a:spcAft>
-                <a:spcPts val="300"/>
-              </a:spcAft>
-              <a:defRPr sz="1100">
-                <a:solidFill>
-                  <a:srgbClr val="94A3B8"/>
-                </a:solidFill>
-              </a:defRPr>
-            </a:pPr>
-            <a:r>
-              <a:t>Wrist-relative normalization</a:t>
-            </a:r>
-          </a:p>
-          <a:p>
-            <a:pPr>
-              <a:spcAft>
-                <a:spcPts val="300"/>
-              </a:spcAft>
-              <a:defRPr sz="1100">
-                <a:solidFill>
-                  <a:srgbClr val="94A3B8"/>
-                </a:solidFill>
-              </a:defRPr>
-            </a:pPr>
-            <a:r>
-              <a:t>15-frame temporal smoothing</a:t>
-            </a:r>
-          </a:p>
-          <a:p>
-            <a:pPr>
-              <a:spcAft>
-                <a:spcPts val="300"/>
-              </a:spcAft>
-              <a:defRPr sz="1100">
-                <a:solidFill>
-                  <a:srgbClr val="94A3B8"/>
-                </a:solidFill>
-              </a:defRPr>
-            </a:pPr>
-            <a:r>
-              <a:t>On-device. No server round-trip.</a:t>
-            </a:r>
+          <a:bodyPr rtlCol="0" anchor="ctr"/>
+          <a:lstStyle/>
+          <a:p>
+            <a:pPr algn="ctr"/>
           </a:p>
         </p:txBody>
       </p:sp>
@@ -6401,14 +6548,14 @@
         </p:nvSpPr>
         <p:spPr>
           <a:xfrm>
-            <a:off x="7863840" y="3017520"/>
-            <a:ext cx="3566160" cy="1828800"/>
+            <a:off x="7315199" y="1828800"/>
+            <a:ext cx="1920240" cy="822960"/>
           </a:xfrm>
           <a:prstGeom prst="roundRect">
             <a:avLst/>
           </a:prstGeom>
           <a:solidFill>
-            <a:srgbClr val="141E30"/>
+            <a:srgbClr val="121C2E"/>
           </a:solidFill>
           <a:ln>
             <a:noFill/>
@@ -6429,101 +6576,45 @@
           </a:fontRef>
         </p:style>
         <p:txBody>
-          <a:bodyPr rtlCol="0" anchor="ctr" wrap="square" lIns="137160" rIns="137160" tIns="109728"/>
+          <a:bodyPr rtlCol="0" anchor="ctr" wrap="square" lIns="128016" rIns="109728" tIns="91440"/>
           <a:lstStyle/>
           <a:p>
             <a:pPr algn="ctr">
               <a:spcAft>
-                <a:spcPts val="600"/>
-              </a:spcAft>
-              <a:defRPr sz="1400" b="1">
-                <a:solidFill>
-                  <a:srgbClr val="4ADE80"/>
-                </a:solidFill>
-              </a:defRPr>
-            </a:pPr>
-            <a:r>
-              <a:t>ESCALATION — THE MOAT</a:t>
-            </a:r>
-          </a:p>
-          <a:p>
-            <a:pPr>
-              <a:spcAft>
-                <a:spcPts val="300"/>
-              </a:spcAft>
-              <a:defRPr sz="1100">
-                <a:solidFill>
-                  <a:srgbClr val="94A3B8"/>
-                </a:solidFill>
-              </a:defRPr>
-            </a:pPr>
-            <a:r>
-              <a:t>Low-confidence sign → Call interpreter</a:t>
-            </a:r>
-          </a:p>
-          <a:p>
-            <a:pPr>
-              <a:spcAft>
-                <a:spcPts val="300"/>
-              </a:spcAft>
-              <a:defRPr sz="1100">
-                <a:solidFill>
-                  <a:srgbClr val="94A3B8"/>
-                </a:solidFill>
-              </a:defRPr>
-            </a:pPr>
-            <a:r>
-              <a:t>WebSocket relay → text chat + ISL chips</a:t>
-            </a:r>
-          </a:p>
-          <a:p>
-            <a:pPr>
-              <a:spcAft>
-                <a:spcPts val="300"/>
-              </a:spcAft>
-              <a:defRPr sz="1100">
-                <a:solidFill>
-                  <a:srgbClr val="94A3B8"/>
-                </a:solidFill>
-              </a:defRPr>
-            </a:pPr>
-            <a:r>
-              <a:t>WebRTC video (Phase 2)</a:t>
-            </a:r>
-          </a:p>
-          <a:p>
-            <a:pPr>
-              <a:spcAft>
-                <a:spcPts val="300"/>
-              </a:spcAft>
-              <a:defRPr sz="1100">
-                <a:solidFill>
-                  <a:srgbClr val="94A3B8"/>
-                </a:solidFill>
-              </a:defRPr>
-            </a:pPr>
-            <a:r>
-              <a:t>Every escalation logged → Sugamya Score</a:t>
-            </a:r>
-          </a:p>
-        </p:txBody>
-      </p:sp>
-      <p:sp>
-        <p:nvSpPr>
-          <p:cNvPr id="13" name="Rounded Rectangle 12"/>
+                <a:spcPts val="200"/>
+              </a:spcAft>
+              <a:defRPr sz="1100">
+                <a:solidFill>
+                  <a:srgbClr val="D0D0D0"/>
+                </a:solidFill>
+              </a:defRPr>
+            </a:pPr>
+            <a:r>
+              <a:t>🔄 API</a:t>
+            </a:r>
+            <a:br/>
+            <a:r>
+              <a:t>Serverless</a:t>
+            </a:r>
+          </a:p>
+        </p:txBody>
+      </p:sp>
+      <p:sp>
+        <p:nvSpPr>
+          <p:cNvPr id="13" name="Right Arrow 12"/>
           <p:cNvSpPr/>
           <p:nvPr/>
         </p:nvSpPr>
         <p:spPr>
           <a:xfrm>
-            <a:off x="731520" y="5120640"/>
-            <a:ext cx="10698480" cy="1097280"/>
-          </a:xfrm>
-          <a:prstGeom prst="roundRect">
+            <a:off x="9281160" y="2103120"/>
+            <a:ext cx="182880" cy="228600"/>
+          </a:xfrm>
+          <a:prstGeom prst="rightArrow">
             <a:avLst/>
           </a:prstGeom>
           <a:solidFill>
-            <a:srgbClr val="141E30"/>
+            <a:srgbClr val="505E72"/>
           </a:solidFill>
           <a:ln>
             <a:noFill/>
@@ -6544,50 +6635,476 @@
           </a:fontRef>
         </p:style>
         <p:txBody>
-          <a:bodyPr rtlCol="0" anchor="ctr" wrap="square" lIns="137160" rIns="137160" tIns="109728"/>
+          <a:bodyPr rtlCol="0" anchor="ctr"/>
+          <a:lstStyle/>
+          <a:p>
+            <a:pPr algn="ctr"/>
+          </a:p>
+        </p:txBody>
+      </p:sp>
+      <p:sp>
+        <p:nvSpPr>
+          <p:cNvPr id="14" name="Rounded Rectangle 13"/>
+          <p:cNvSpPr/>
+          <p:nvPr/>
+        </p:nvSpPr>
+        <p:spPr>
+          <a:xfrm>
+            <a:off x="9509760" y="1828800"/>
+            <a:ext cx="1920240" cy="822960"/>
+          </a:xfrm>
+          <a:prstGeom prst="roundRect">
+            <a:avLst/>
+          </a:prstGeom>
+          <a:solidFill>
+            <a:srgbClr val="121C2E"/>
+          </a:solidFill>
+          <a:ln>
+            <a:noFill/>
+          </a:ln>
+        </p:spPr>
+        <p:style>
+          <a:lnRef idx="1">
+            <a:schemeClr val="accent1"/>
+          </a:lnRef>
+          <a:fillRef idx="3">
+            <a:schemeClr val="accent1"/>
+          </a:fillRef>
+          <a:effectRef idx="2">
+            <a:schemeClr val="accent1"/>
+          </a:effectRef>
+          <a:fontRef idx="minor">
+            <a:schemeClr val="lt1"/>
+          </a:fontRef>
+        </p:style>
+        <p:txBody>
+          <a:bodyPr rtlCol="0" anchor="ctr" wrap="square" lIns="128016" rIns="109728" tIns="91440"/>
           <a:lstStyle/>
           <a:p>
             <a:pPr algn="ctr">
               <a:spcAft>
-                <a:spcPts val="600"/>
-              </a:spcAft>
-              <a:defRPr sz="1400" b="1">
+                <a:spcPts val="200"/>
+              </a:spcAft>
+              <a:defRPr sz="1100">
+                <a:solidFill>
+                  <a:srgbClr val="D0D0D0"/>
+                </a:solidFill>
+              </a:defRPr>
+            </a:pPr>
+            <a:r>
+              <a:t>🗄️ MongoDB</a:t>
+            </a:r>
+            <a:br/>
+            <a:r>
+              <a:t>Atlas</a:t>
+            </a:r>
+          </a:p>
+        </p:txBody>
+      </p:sp>
+      <p:sp>
+        <p:nvSpPr>
+          <p:cNvPr id="15" name="Rounded Rectangle 14"/>
+          <p:cNvSpPr/>
+          <p:nvPr/>
+        </p:nvSpPr>
+        <p:spPr>
+          <a:xfrm>
+            <a:off x="731520" y="3017520"/>
+            <a:ext cx="3291840" cy="1645920"/>
+          </a:xfrm>
+          <a:prstGeom prst="roundRect">
+            <a:avLst/>
+          </a:prstGeom>
+          <a:solidFill>
+            <a:srgbClr val="121C2E"/>
+          </a:solidFill>
+          <a:ln>
+            <a:noFill/>
+          </a:ln>
+        </p:spPr>
+        <p:style>
+          <a:lnRef idx="1">
+            <a:schemeClr val="accent1"/>
+          </a:lnRef>
+          <a:fillRef idx="3">
+            <a:schemeClr val="accent1"/>
+          </a:fillRef>
+          <a:effectRef idx="2">
+            <a:schemeClr val="accent1"/>
+          </a:effectRef>
+          <a:fontRef idx="minor">
+            <a:schemeClr val="lt1"/>
+          </a:fontRef>
+        </p:style>
+        <p:txBody>
+          <a:bodyPr rtlCol="0" anchor="ctr" wrap="square" lIns="128016" rIns="109728" tIns="91440"/>
+          <a:lstStyle/>
+          <a:p>
+            <a:pPr algn="ctr">
+              <a:spcAft>
+                <a:spcPts val="500"/>
+              </a:spcAft>
+              <a:defRPr sz="1200" b="1">
+                <a:solidFill>
+                  <a:srgbClr val="C9A961"/>
+                </a:solidFill>
+              </a:defRPr>
+            </a:pPr>
+            <a:r>
+              <a:t>FRONTEND</a:t>
+            </a:r>
+          </a:p>
+          <a:p>
+            <a:pPr>
+              <a:spcAft>
+                <a:spcPts val="200"/>
+              </a:spcAft>
+              <a:defRPr sz="1100">
+                <a:solidFill>
+                  <a:srgbClr val="D0D0D0"/>
+                </a:solidFill>
+              </a:defRPr>
+            </a:pPr>
+            <a:r>
+              <a:t>Next.js 14 · Tailwind CSS</a:t>
+            </a:r>
+          </a:p>
+          <a:p>
+            <a:pPr>
+              <a:spcAft>
+                <a:spcPts val="200"/>
+              </a:spcAft>
+              <a:defRPr sz="1100">
+                <a:solidFill>
+                  <a:srgbClr val="D0D0D0"/>
+                </a:solidFill>
+              </a:defRPr>
+            </a:pPr>
+            <a:r>
+              <a:t>PWA · Dark mode · EN / HI / MR</a:t>
+            </a:r>
+          </a:p>
+          <a:p>
+            <a:pPr>
+              <a:spcAft>
+                <a:spcPts val="200"/>
+              </a:spcAft>
+              <a:defRPr sz="1100">
+                <a:solidFill>
+                  <a:srgbClr val="D0D0D0"/>
+                </a:solidFill>
+              </a:defRPr>
+            </a:pPr>
+            <a:r>
+              <a:t>Recharts · jsPDF · ServiceWorker</a:t>
+            </a:r>
+          </a:p>
+        </p:txBody>
+      </p:sp>
+      <p:sp>
+        <p:nvSpPr>
+          <p:cNvPr id="16" name="Rounded Rectangle 15"/>
+          <p:cNvSpPr/>
+          <p:nvPr/>
+        </p:nvSpPr>
+        <p:spPr>
+          <a:xfrm>
+            <a:off x="4297680" y="3017520"/>
+            <a:ext cx="3291840" cy="1645920"/>
+          </a:xfrm>
+          <a:prstGeom prst="roundRect">
+            <a:avLst/>
+          </a:prstGeom>
+          <a:solidFill>
+            <a:srgbClr val="121C2E"/>
+          </a:solidFill>
+          <a:ln>
+            <a:noFill/>
+          </a:ln>
+        </p:spPr>
+        <p:style>
+          <a:lnRef idx="1">
+            <a:schemeClr val="accent1"/>
+          </a:lnRef>
+          <a:fillRef idx="3">
+            <a:schemeClr val="accent1"/>
+          </a:fillRef>
+          <a:effectRef idx="2">
+            <a:schemeClr val="accent1"/>
+          </a:effectRef>
+          <a:fontRef idx="minor">
+            <a:schemeClr val="lt1"/>
+          </a:fontRef>
+        </p:style>
+        <p:txBody>
+          <a:bodyPr rtlCol="0" anchor="ctr" wrap="square" lIns="128016" rIns="109728" tIns="91440"/>
+          <a:lstStyle/>
+          <a:p>
+            <a:pPr algn="ctr">
+              <a:spcAft>
+                <a:spcPts val="500"/>
+              </a:spcAft>
+              <a:defRPr sz="1200" b="1">
+                <a:solidFill>
+                  <a:srgbClr val="FB923C"/>
+                </a:solidFill>
+              </a:defRPr>
+            </a:pPr>
+            <a:r>
+              <a:t>RECOGNITION</a:t>
+            </a:r>
+          </a:p>
+          <a:p>
+            <a:pPr>
+              <a:spcAft>
+                <a:spcPts val="200"/>
+              </a:spcAft>
+              <a:defRPr sz="1100">
+                <a:solidFill>
+                  <a:srgbClr val="D0D0D0"/>
+                </a:solidFill>
+              </a:defRPr>
+            </a:pPr>
+            <a:r>
+              <a:t>Euclidean kNN over 21 landmarks</a:t>
+            </a:r>
+          </a:p>
+          <a:p>
+            <a:pPr>
+              <a:spcAft>
+                <a:spcPts val="200"/>
+              </a:spcAft>
+              <a:defRPr sz="1100">
+                <a:solidFill>
+                  <a:srgbClr val="D0D0D0"/>
+                </a:solidFill>
+              </a:defRPr>
+            </a:pPr>
+            <a:r>
+              <a:t>Wrist-relative normalization</a:t>
+            </a:r>
+          </a:p>
+          <a:p>
+            <a:pPr>
+              <a:spcAft>
+                <a:spcPts val="200"/>
+              </a:spcAft>
+              <a:defRPr sz="1100">
+                <a:solidFill>
+                  <a:srgbClr val="D0D0D0"/>
+                </a:solidFill>
+              </a:defRPr>
+            </a:pPr>
+            <a:r>
+              <a:t>15-frame temporal smoothing</a:t>
+            </a:r>
+          </a:p>
+          <a:p>
+            <a:pPr>
+              <a:spcAft>
+                <a:spcPts val="200"/>
+              </a:spcAft>
+              <a:defRPr sz="1100">
+                <a:solidFill>
+                  <a:srgbClr val="D0D0D0"/>
+                </a:solidFill>
+              </a:defRPr>
+            </a:pPr>
+            <a:r>
+              <a:t>On-device — no server round-trip</a:t>
+            </a:r>
+          </a:p>
+        </p:txBody>
+      </p:sp>
+      <p:sp>
+        <p:nvSpPr>
+          <p:cNvPr id="17" name="Rounded Rectangle 16"/>
+          <p:cNvSpPr/>
+          <p:nvPr/>
+        </p:nvSpPr>
+        <p:spPr>
+          <a:xfrm>
+            <a:off x="7863840" y="3017520"/>
+            <a:ext cx="3566160" cy="1645920"/>
+          </a:xfrm>
+          <a:prstGeom prst="roundRect">
+            <a:avLst/>
+          </a:prstGeom>
+          <a:solidFill>
+            <a:srgbClr val="121C2E"/>
+          </a:solidFill>
+          <a:ln>
+            <a:noFill/>
+          </a:ln>
+        </p:spPr>
+        <p:style>
+          <a:lnRef idx="1">
+            <a:schemeClr val="accent1"/>
+          </a:lnRef>
+          <a:fillRef idx="3">
+            <a:schemeClr val="accent1"/>
+          </a:fillRef>
+          <a:effectRef idx="2">
+            <a:schemeClr val="accent1"/>
+          </a:effectRef>
+          <a:fontRef idx="minor">
+            <a:schemeClr val="lt1"/>
+          </a:fontRef>
+        </p:style>
+        <p:txBody>
+          <a:bodyPr rtlCol="0" anchor="ctr" wrap="square" lIns="128016" rIns="109728" tIns="91440"/>
+          <a:lstStyle/>
+          <a:p>
+            <a:pPr algn="ctr">
+              <a:spcAft>
+                <a:spcPts val="500"/>
+              </a:spcAft>
+              <a:defRPr sz="1200" b="1">
+                <a:solidFill>
+                  <a:srgbClr val="4ADE80"/>
+                </a:solidFill>
+              </a:defRPr>
+            </a:pPr>
+            <a:r>
+              <a:t>ESCALATION</a:t>
+            </a:r>
+          </a:p>
+          <a:p>
+            <a:pPr>
+              <a:spcAft>
+                <a:spcPts val="200"/>
+              </a:spcAft>
+              <a:defRPr sz="1100">
+                <a:solidFill>
+                  <a:srgbClr val="D0D0D0"/>
+                </a:solidFill>
+              </a:defRPr>
+            </a:pPr>
+            <a:r>
+              <a:t>Low-confidence → Call interpreter</a:t>
+            </a:r>
+          </a:p>
+          <a:p>
+            <a:pPr>
+              <a:spcAft>
+                <a:spcPts val="200"/>
+              </a:spcAft>
+              <a:defRPr sz="1100">
+                <a:solidFill>
+                  <a:srgbClr val="D0D0D0"/>
+                </a:solidFill>
+              </a:defRPr>
+            </a:pPr>
+            <a:r>
+              <a:t>WebSocket relay · text + ISL chips</a:t>
+            </a:r>
+          </a:p>
+          <a:p>
+            <a:pPr>
+              <a:spcAft>
+                <a:spcPts val="200"/>
+              </a:spcAft>
+              <a:defRPr sz="1100">
+                <a:solidFill>
+                  <a:srgbClr val="D0D0D0"/>
+                </a:solidFill>
+              </a:defRPr>
+            </a:pPr>
+            <a:r>
+              <a:t>WebRTC video (Phase 2)</a:t>
+            </a:r>
+          </a:p>
+          <a:p>
+            <a:pPr>
+              <a:spcAft>
+                <a:spcPts val="200"/>
+              </a:spcAft>
+              <a:defRPr sz="1100">
+                <a:solidFill>
+                  <a:srgbClr val="D0D0D0"/>
+                </a:solidFill>
+              </a:defRPr>
+            </a:pPr>
+            <a:r>
+              <a:t>Every relay logged → Score</a:t>
+            </a:r>
+          </a:p>
+        </p:txBody>
+      </p:sp>
+      <p:sp>
+        <p:nvSpPr>
+          <p:cNvPr id="18" name="Rounded Rectangle 17"/>
+          <p:cNvSpPr/>
+          <p:nvPr/>
+        </p:nvSpPr>
+        <p:spPr>
+          <a:xfrm>
+            <a:off x="731520" y="5029200"/>
+            <a:ext cx="10698480" cy="914400"/>
+          </a:xfrm>
+          <a:prstGeom prst="roundRect">
+            <a:avLst/>
+          </a:prstGeom>
+          <a:solidFill>
+            <a:srgbClr val="121C2E"/>
+          </a:solidFill>
+          <a:ln>
+            <a:noFill/>
+          </a:ln>
+        </p:spPr>
+        <p:style>
+          <a:lnRef idx="1">
+            <a:schemeClr val="accent1"/>
+          </a:lnRef>
+          <a:fillRef idx="3">
+            <a:schemeClr val="accent1"/>
+          </a:fillRef>
+          <a:effectRef idx="2">
+            <a:schemeClr val="accent1"/>
+          </a:effectRef>
+          <a:fontRef idx="minor">
+            <a:schemeClr val="lt1"/>
+          </a:fontRef>
+        </p:style>
+        <p:txBody>
+          <a:bodyPr rtlCol="0" anchor="ctr" wrap="square" lIns="182880"/>
+          <a:lstStyle/>
+          <a:p>
+            <a:pPr algn="ctr">
+              <a:defRPr sz="1100" b="1">
                 <a:solidFill>
                   <a:srgbClr val="818CF8"/>
                 </a:solidFill>
               </a:defRPr>
             </a:pPr>
             <a:r>
-              <a:t>RESILIENT DATA</a:t>
-            </a:r>
-          </a:p>
-          <a:p>
-            <a:pPr>
-              <a:spcAft>
-                <a:spcPts val="300"/>
-              </a:spcAft>
-              <a:defRPr sz="1100">
-                <a:solidFill>
-                  <a:srgbClr val="94A3B8"/>
-                </a:solidFill>
-              </a:defRPr>
-            </a:pPr>
-            <a:r>
-              <a:t>Fail-fast connection (2s timeouts). If MongoDB is down → mock data. Demo cannot crash. On-device ML means no internet dependency for core flow.</a:t>
-            </a:r>
-          </a:p>
-        </p:txBody>
-      </p:sp>
-      <p:sp>
-        <p:nvSpPr>
-          <p:cNvPr id="14" name="TextBox 13"/>
+              <a:t>RESILIENT</a:t>
+            </a:r>
+          </a:p>
+          <a:p>
+            <a:pPr>
+              <a:defRPr sz="1100">
+                <a:solidFill>
+                  <a:srgbClr val="D0D0D0"/>
+                </a:solidFill>
+              </a:defRPr>
+            </a:pPr>
+            <a:r>
+              <a:t>Fail-fast DB (2s timeout) → mock fallback. Demo cannot crash. On-device ML → no internet dependency.</a:t>
+            </a:r>
+          </a:p>
+        </p:txBody>
+      </p:sp>
+      <p:sp>
+        <p:nvSpPr>
+          <p:cNvPr id="19" name="TextBox 18"/>
           <p:cNvSpPr txBox="1"/>
           <p:nvPr/>
         </p:nvSpPr>
         <p:spPr>
           <a:xfrm>
-            <a:off x="457200" y="6400800"/>
-            <a:ext cx="10972800" cy="365760"/>
+            <a:off x="457200" y="6446520"/>
+            <a:ext cx="11247120" cy="274320"/>
           </a:xfrm>
           <a:prstGeom prst="rect">
             <a:avLst/>
@@ -6601,9 +7118,9 @@
           <a:lstStyle/>
           <a:p>
             <a:pPr algn="ctr">
-              <a:defRPr sz="900" b="0">
-                <a:solidFill>
-                  <a:srgbClr val="475569"/>
+              <a:defRPr sz="800" b="0">
+                <a:solidFill>
+                  <a:srgbClr val="505E72"/>
                 </a:solidFill>
               </a:defRPr>
             </a:pPr>
@@ -6647,8 +7164,8 @@
         </p:nvSpPr>
         <p:spPr>
           <a:xfrm>
-            <a:off x="731520" y="320040"/>
-            <a:ext cx="5486400" cy="274320"/>
+            <a:off x="731520" y="274320"/>
+            <a:ext cx="10972800" cy="256032"/>
           </a:xfrm>
           <a:prstGeom prst="rect">
             <a:avLst/>
@@ -6676,95 +7193,23 @@
       </p:sp>
       <p:sp>
         <p:nvSpPr>
-          <p:cNvPr id="3" name="TextBox 2"/>
-          <p:cNvSpPr txBox="1"/>
-          <p:nvPr/>
-        </p:nvSpPr>
-        <p:spPr>
-          <a:xfrm>
-            <a:off x="731520" y="640080"/>
-            <a:ext cx="10058400" cy="640080"/>
+          <p:cNvPr id="3" name="Rectangle 2"/>
+          <p:cNvSpPr/>
+          <p:nvPr/>
+        </p:nvSpPr>
+        <p:spPr>
+          <a:xfrm>
+            <a:off x="731520" y="566928"/>
+            <a:ext cx="1371600" cy="16459"/>
           </a:xfrm>
           <a:prstGeom prst="rect">
             <a:avLst/>
           </a:prstGeom>
-          <a:noFill/>
-        </p:spPr>
-        <p:txBody>
-          <a:bodyPr wrap="square">
-            <a:spAutoFit/>
-          </a:bodyPr>
-          <a:lstStyle/>
-          <a:p>
-            <a:pPr algn="l">
-              <a:defRPr sz="3400" b="1">
-                <a:solidFill>
-                  <a:srgbClr val="FFFFFF"/>
-                </a:solidFill>
-              </a:defRPr>
-            </a:pPr>
-            <a:r>
-              <a:t>Inclusive by law, not by charity.</a:t>
-            </a:r>
-          </a:p>
-        </p:txBody>
-      </p:sp>
-      <p:sp>
-        <p:nvSpPr>
-          <p:cNvPr id="4" name="TextBox 3"/>
-          <p:cNvSpPr txBox="1"/>
-          <p:nvPr/>
-        </p:nvSpPr>
-        <p:spPr>
-          <a:xfrm>
-            <a:off x="731520" y="1234440"/>
-            <a:ext cx="10058400" cy="457200"/>
-          </a:xfrm>
-          <a:prstGeom prst="rect">
-            <a:avLst/>
-          </a:prstGeom>
-          <a:noFill/>
-        </p:spPr>
-        <p:txBody>
-          <a:bodyPr wrap="square">
-            <a:spAutoFit/>
-          </a:bodyPr>
-          <a:lstStyle/>
-          <a:p>
-            <a:pPr algn="l">
-              <a:defRPr sz="1400" b="0">
-                <a:solidFill>
-                  <a:srgbClr val="94A3B8"/>
-                </a:solidFill>
-              </a:defRPr>
-            </a:pPr>
-            <a:r>
-              <a:t>A simple, measurable, low-cost policy framework for municipal accessibility compliance.</a:t>
-            </a:r>
-          </a:p>
-        </p:txBody>
-      </p:sp>
-      <p:sp>
-        <p:nvSpPr>
-          <p:cNvPr id="5" name="Rounded Rectangle 4"/>
-          <p:cNvSpPr/>
-          <p:nvPr/>
-        </p:nvSpPr>
-        <p:spPr>
-          <a:xfrm>
-            <a:off x="731520" y="2011680"/>
-            <a:ext cx="5303520" cy="2286000"/>
-          </a:xfrm>
-          <a:prstGeom prst="roundRect">
-            <a:avLst/>
-          </a:prstGeom>
           <a:solidFill>
-            <a:srgbClr val="141E30"/>
+            <a:srgbClr val="C9A961"/>
           </a:solidFill>
-          <a:ln w="12700">
-            <a:solidFill>
-              <a:srgbClr val="C9A961"/>
-            </a:solidFill>
+          <a:ln>
+            <a:noFill/>
           </a:ln>
         </p:spPr>
         <p:style>
@@ -6782,108 +7227,79 @@
           </a:fontRef>
         </p:style>
         <p:txBody>
-          <a:bodyPr rtlCol="0" anchor="ctr" wrap="square" lIns="137160" rIns="137160" tIns="109728"/>
-          <a:lstStyle/>
-          <a:p>
-            <a:pPr algn="ctr">
-              <a:spcAft>
-                <a:spcPts val="600"/>
-              </a:spcAft>
-              <a:defRPr sz="1400" b="1">
-                <a:solidFill>
-                  <a:srgbClr val="C9A961"/>
-                </a:solidFill>
-              </a:defRPr>
-            </a:pPr>
-            <a:r>
-              <a:t>THE RECOMMENDATION</a:t>
-            </a:r>
-          </a:p>
-          <a:p>
-            <a:pPr>
-              <a:spcAft>
-                <a:spcPts val="300"/>
-              </a:spcAft>
-              <a:defRPr sz="1100">
-                <a:solidFill>
-                  <a:srgbClr val="94A3B8"/>
-                </a:solidFill>
-              </a:defRPr>
-            </a:pPr>
-            <a:r>
-              <a:t>Make ISL proficiency a mandatory annual</a:t>
-            </a:r>
-          </a:p>
-          <a:p>
-            <a:pPr>
-              <a:spcAft>
-                <a:spcPts val="300"/>
-              </a:spcAft>
-              <a:defRPr sz="1100">
-                <a:solidFill>
-                  <a:srgbClr val="94A3B8"/>
-                </a:solidFill>
-              </a:defRPr>
-            </a:pPr>
-            <a:r>
-              <a:t>requirement for all municipal public-facing</a:t>
-            </a:r>
-          </a:p>
-          <a:p>
-            <a:pPr>
-              <a:spcAft>
-                <a:spcPts val="300"/>
-              </a:spcAft>
-              <a:defRPr sz="1100">
-                <a:solidFill>
-                  <a:srgbClr val="94A3B8"/>
-                </a:solidFill>
-              </a:defRPr>
-            </a:pPr>
-            <a:r>
-              <a:t>staff, delivered through a digital platform</a:t>
-            </a:r>
-          </a:p>
-          <a:p>
-            <a:pPr>
-              <a:spcAft>
-                <a:spcPts val="300"/>
-              </a:spcAft>
-              <a:defRPr sz="1100">
-                <a:solidFill>
-                  <a:srgbClr val="94A3B8"/>
-                </a:solidFill>
-              </a:defRPr>
-            </a:pPr>
-            <a:r>
-              <a:t>with real-time compliance tracking.</a:t>
-            </a:r>
-          </a:p>
-          <a:p>
-            <a:pPr>
-              <a:spcAft>
-                <a:spcPts val="300"/>
-              </a:spcAft>
-              <a:defRPr sz="1100">
-                <a:solidFill>
-                  <a:srgbClr val="94A3B8"/>
-                </a:solidFill>
-              </a:defRPr>
-            </a:pPr>
-          </a:p>
-          <a:p>
-            <a:pPr>
-              <a:spcAft>
-                <a:spcPts val="300"/>
-              </a:spcAft>
-              <a:defRPr sz="1100">
-                <a:solidFill>
-                  <a:srgbClr val="94A3B8"/>
-                </a:solidFill>
-              </a:defRPr>
-            </a:pPr>
-            <a:r>
-              <a:t>Enforce via RPwD Act 2016 + Sugamya Bharat Abhiyan.</a:t>
+          <a:bodyPr rtlCol="0" anchor="ctr"/>
+          <a:lstStyle/>
+          <a:p>
+            <a:pPr algn="ctr"/>
+          </a:p>
+        </p:txBody>
+      </p:sp>
+      <p:sp>
+        <p:nvSpPr>
+          <p:cNvPr id="4" name="TextBox 3"/>
+          <p:cNvSpPr txBox="1"/>
+          <p:nvPr/>
+        </p:nvSpPr>
+        <p:spPr>
+          <a:xfrm>
+            <a:off x="731520" y="658368"/>
+            <a:ext cx="10972800" cy="548640"/>
+          </a:xfrm>
+          <a:prstGeom prst="rect">
+            <a:avLst/>
+          </a:prstGeom>
+          <a:noFill/>
+        </p:spPr>
+        <p:txBody>
+          <a:bodyPr wrap="square">
+            <a:spAutoFit/>
+          </a:bodyPr>
+          <a:lstStyle/>
+          <a:p>
+            <a:pPr algn="l">
+              <a:defRPr sz="3200" b="1">
+                <a:solidFill>
+                  <a:srgbClr val="FFFFFF"/>
+                </a:solidFill>
+              </a:defRPr>
+            </a:pPr>
+            <a:r>
+              <a:t>Inclusive by law, not by charity.</a:t>
+            </a:r>
+          </a:p>
+        </p:txBody>
+      </p:sp>
+      <p:sp>
+        <p:nvSpPr>
+          <p:cNvPr id="5" name="TextBox 4"/>
+          <p:cNvSpPr txBox="1"/>
+          <p:nvPr/>
+        </p:nvSpPr>
+        <p:spPr>
+          <a:xfrm>
+            <a:off x="731520" y="1188720"/>
+            <a:ext cx="10972800" cy="320040"/>
+          </a:xfrm>
+          <a:prstGeom prst="rect">
+            <a:avLst/>
+          </a:prstGeom>
+          <a:noFill/>
+        </p:spPr>
+        <p:txBody>
+          <a:bodyPr wrap="square">
+            <a:spAutoFit/>
+          </a:bodyPr>
+          <a:lstStyle/>
+          <a:p>
+            <a:pPr algn="l">
+              <a:defRPr sz="1300" b="0">
+                <a:solidFill>
+                  <a:srgbClr val="8896AA"/>
+                </a:solidFill>
+              </a:defRPr>
+            </a:pPr>
+            <a:r>
+              <a:t>Mandate ISL training for every public-facing clerk.</a:t>
             </a:r>
           </a:p>
         </p:txBody>
@@ -6896,17 +7312,19 @@
         </p:nvSpPr>
         <p:spPr>
           <a:xfrm>
-            <a:off x="6309360" y="2011680"/>
-            <a:ext cx="5303520" cy="2286000"/>
+            <a:off x="731520" y="1828800"/>
+            <a:ext cx="5212080" cy="2743200"/>
           </a:xfrm>
           <a:prstGeom prst="roundRect">
             <a:avLst/>
           </a:prstGeom>
           <a:solidFill>
-            <a:srgbClr val="141E30"/>
+            <a:srgbClr val="121C2E"/>
           </a:solidFill>
-          <a:ln>
-            <a:noFill/>
+          <a:ln w="15240">
+            <a:solidFill>
+              <a:srgbClr val="C9A961"/>
+            </a:solidFill>
           </a:ln>
         </p:spPr>
         <p:style>
@@ -6924,111 +7342,162 @@
           </a:fontRef>
         </p:style>
         <p:txBody>
-          <a:bodyPr rtlCol="0" anchor="ctr" wrap="square" lIns="137160" rIns="137160" tIns="109728"/>
+          <a:bodyPr rtlCol="0" anchor="ctr" wrap="square" lIns="128016" rIns="109728" tIns="91440"/>
           <a:lstStyle/>
           <a:p>
             <a:pPr algn="ctr">
               <a:spcAft>
-                <a:spcPts val="600"/>
-              </a:spcAft>
-              <a:defRPr sz="1400" b="1">
-                <a:solidFill>
-                  <a:srgbClr val="FB923C"/>
-                </a:solidFill>
-              </a:defRPr>
-            </a:pPr>
-            <a:r>
-              <a:t>MEASURABLE KPIs</a:t>
-            </a:r>
-          </a:p>
-          <a:p>
-            <a:pPr>
-              <a:spcAft>
-                <a:spcPts val="300"/>
-              </a:spcAft>
-              <a:defRPr sz="1100">
-                <a:solidFill>
-                  <a:srgbClr val="94A3B8"/>
-                </a:solidFill>
-              </a:defRPr>
-            </a:pPr>
-            <a:r>
-              <a:t>Daily Active Learners (DAL)         &gt;70%</a:t>
-            </a:r>
-          </a:p>
-          <a:p>
-            <a:pPr>
-              <a:spcAft>
-                <a:spcPts val="300"/>
-              </a:spcAft>
-              <a:defRPr sz="1100">
-                <a:solidFill>
-                  <a:srgbClr val="94A3B8"/>
-                </a:solidFill>
-              </a:defRPr>
-            </a:pPr>
-            <a:r>
-              <a:t>30-day Streak Achievement           &gt;50%</a:t>
-            </a:r>
-          </a:p>
-          <a:p>
-            <a:pPr>
-              <a:spcAft>
-                <a:spcPts val="300"/>
-              </a:spcAft>
-              <a:defRPr sz="1100">
-                <a:solidFill>
-                  <a:srgbClr val="94A3B8"/>
-                </a:solidFill>
-              </a:defRPr>
-            </a:pPr>
-            <a:r>
-              <a:t>Curriculum Completion               &gt;40%</a:t>
-            </a:r>
-          </a:p>
-          <a:p>
-            <a:pPr>
-              <a:spcAft>
-                <a:spcPts val="300"/>
-              </a:spcAft>
-              <a:defRPr sz="1100">
-                <a:solidFill>
-                  <a:srgbClr val="94A3B8"/>
-                </a:solidFill>
-              </a:defRPr>
-            </a:pPr>
-            <a:r>
-              <a:t>Citizen Satisfaction Score          &gt;4.0 / 5.0</a:t>
-            </a:r>
-          </a:p>
-          <a:p>
-            <a:pPr>
-              <a:spcAft>
-                <a:spcPts val="300"/>
-              </a:spcAft>
-              <a:defRPr sz="1100">
-                <a:solidFill>
-                  <a:srgbClr val="94A3B8"/>
-                </a:solidFill>
-              </a:defRPr>
-            </a:pPr>
-            <a:r>
-              <a:t>QR Scan Volume                      1 / clerk / week</a:t>
-            </a:r>
-          </a:p>
-          <a:p>
-            <a:pPr>
-              <a:spcAft>
-                <a:spcPts val="300"/>
-              </a:spcAft>
-              <a:defRPr sz="1100">
-                <a:solidFill>
-                  <a:srgbClr val="94A3B8"/>
-                </a:solidFill>
-              </a:defRPr>
-            </a:pPr>
-            <a:r>
-              <a:t>ISL Champions                       10% of enrolled</a:t>
+                <a:spcPts val="500"/>
+              </a:spcAft>
+              <a:defRPr sz="1200" b="1">
+                <a:solidFill>
+                  <a:srgbClr val="C9A961"/>
+                </a:solidFill>
+              </a:defRPr>
+            </a:pPr>
+            <a:r>
+              <a:t>THE RECOMMENDATION</a:t>
+            </a:r>
+          </a:p>
+          <a:p>
+            <a:pPr>
+              <a:spcAft>
+                <a:spcPts val="200"/>
+              </a:spcAft>
+              <a:defRPr sz="1100">
+                <a:solidFill>
+                  <a:srgbClr val="D0D0D0"/>
+                </a:solidFill>
+              </a:defRPr>
+            </a:pPr>
+          </a:p>
+          <a:p>
+            <a:pPr>
+              <a:spcAft>
+                <a:spcPts val="200"/>
+              </a:spcAft>
+              <a:defRPr sz="1100">
+                <a:solidFill>
+                  <a:srgbClr val="D0D0D0"/>
+                </a:solidFill>
+              </a:defRPr>
+            </a:pPr>
+            <a:r>
+              <a:t>Make ISL proficiency a mandatory</a:t>
+            </a:r>
+          </a:p>
+          <a:p>
+            <a:pPr>
+              <a:spcAft>
+                <a:spcPts val="200"/>
+              </a:spcAft>
+              <a:defRPr sz="1100">
+                <a:solidFill>
+                  <a:srgbClr val="D0D0D0"/>
+                </a:solidFill>
+              </a:defRPr>
+            </a:pPr>
+            <a:r>
+              <a:t>annual requirement for all municipal</a:t>
+            </a:r>
+          </a:p>
+          <a:p>
+            <a:pPr>
+              <a:spcAft>
+                <a:spcPts val="200"/>
+              </a:spcAft>
+              <a:defRPr sz="1100">
+                <a:solidFill>
+                  <a:srgbClr val="D0D0D0"/>
+                </a:solidFill>
+              </a:defRPr>
+            </a:pPr>
+            <a:r>
+              <a:t>public-facing staff.</a:t>
+            </a:r>
+          </a:p>
+          <a:p>
+            <a:pPr>
+              <a:spcAft>
+                <a:spcPts val="200"/>
+              </a:spcAft>
+              <a:defRPr sz="1100">
+                <a:solidFill>
+                  <a:srgbClr val="D0D0D0"/>
+                </a:solidFill>
+              </a:defRPr>
+            </a:pPr>
+          </a:p>
+          <a:p>
+            <a:pPr>
+              <a:spcAft>
+                <a:spcPts val="200"/>
+              </a:spcAft>
+              <a:defRPr sz="1100">
+                <a:solidFill>
+                  <a:srgbClr val="D0D0D0"/>
+                </a:solidFill>
+              </a:defRPr>
+            </a:pPr>
+            <a:r>
+              <a:t>Delivered through a digital platform</a:t>
+            </a:r>
+          </a:p>
+          <a:p>
+            <a:pPr>
+              <a:spcAft>
+                <a:spcPts val="200"/>
+              </a:spcAft>
+              <a:defRPr sz="1100">
+                <a:solidFill>
+                  <a:srgbClr val="D0D0D0"/>
+                </a:solidFill>
+              </a:defRPr>
+            </a:pPr>
+            <a:r>
+              <a:t>with real-time compliance tracking.</a:t>
+            </a:r>
+          </a:p>
+          <a:p>
+            <a:pPr>
+              <a:spcAft>
+                <a:spcPts val="200"/>
+              </a:spcAft>
+              <a:defRPr sz="1100">
+                <a:solidFill>
+                  <a:srgbClr val="D0D0D0"/>
+                </a:solidFill>
+              </a:defRPr>
+            </a:pPr>
+          </a:p>
+          <a:p>
+            <a:pPr>
+              <a:spcAft>
+                <a:spcPts val="200"/>
+              </a:spcAft>
+              <a:defRPr sz="1100">
+                <a:solidFill>
+                  <a:srgbClr val="D0D0D0"/>
+                </a:solidFill>
+              </a:defRPr>
+            </a:pPr>
+            <a:r>
+              <a:t>Enforce via RPwD Act 2016 +</a:t>
+            </a:r>
+          </a:p>
+          <a:p>
+            <a:pPr>
+              <a:spcAft>
+                <a:spcPts val="200"/>
+              </a:spcAft>
+              <a:defRPr sz="1100">
+                <a:solidFill>
+                  <a:srgbClr val="D0D0D0"/>
+                </a:solidFill>
+              </a:defRPr>
+            </a:pPr>
+            <a:r>
+              <a:t>Sugamya Bharat Abhiyan.</a:t>
             </a:r>
           </a:p>
         </p:txBody>
@@ -7041,14 +7510,14 @@
         </p:nvSpPr>
         <p:spPr>
           <a:xfrm>
-            <a:off x="731520" y="4572000"/>
-            <a:ext cx="10789920" cy="1645920"/>
+            <a:off x="6309360" y="1828800"/>
+            <a:ext cx="5212080" cy="2743200"/>
           </a:xfrm>
           <a:prstGeom prst="roundRect">
             <a:avLst/>
           </a:prstGeom>
           <a:solidFill>
-            <a:srgbClr val="141E30"/>
+            <a:srgbClr val="121C2E"/>
           </a:solidFill>
           <a:ln>
             <a:noFill/>
@@ -7069,125 +7538,224 @@
           </a:fontRef>
         </p:style>
         <p:txBody>
-          <a:bodyPr rtlCol="0" anchor="ctr" wrap="square" lIns="137160" rIns="137160" tIns="109728"/>
+          <a:bodyPr rtlCol="0" anchor="ctr" wrap="square" lIns="128016" rIns="109728" tIns="91440"/>
           <a:lstStyle/>
           <a:p>
             <a:pPr algn="ctr">
               <a:spcAft>
+                <a:spcPts val="500"/>
+              </a:spcAft>
+              <a:defRPr sz="1200" b="1">
+                <a:solidFill>
+                  <a:srgbClr val="FB923C"/>
+                </a:solidFill>
+              </a:defRPr>
+            </a:pPr>
+            <a:r>
+              <a:t>MEASURABLE KPIs</a:t>
+            </a:r>
+          </a:p>
+          <a:p>
+            <a:pPr>
+              <a:spcAft>
+                <a:spcPts val="200"/>
+              </a:spcAft>
+              <a:defRPr sz="1100">
+                <a:solidFill>
+                  <a:srgbClr val="D0D0D0"/>
+                </a:solidFill>
+              </a:defRPr>
+            </a:pPr>
+          </a:p>
+          <a:p>
+            <a:pPr>
+              <a:spcAft>
+                <a:spcPts val="200"/>
+              </a:spcAft>
+              <a:defRPr sz="1100">
+                <a:solidFill>
+                  <a:srgbClr val="D0D0D0"/>
+                </a:solidFill>
+              </a:defRPr>
+            </a:pPr>
+            <a:r>
+              <a:t>Daily Active Learners         &gt; 70%</a:t>
+            </a:r>
+          </a:p>
+          <a:p>
+            <a:pPr>
+              <a:spcAft>
+                <a:spcPts val="200"/>
+              </a:spcAft>
+              <a:defRPr sz="1100">
+                <a:solidFill>
+                  <a:srgbClr val="D0D0D0"/>
+                </a:solidFill>
+              </a:defRPr>
+            </a:pPr>
+            <a:r>
+              <a:t>30-day Streak                 &gt; 50%</a:t>
+            </a:r>
+          </a:p>
+          <a:p>
+            <a:pPr>
+              <a:spcAft>
+                <a:spcPts val="200"/>
+              </a:spcAft>
+              <a:defRPr sz="1100">
+                <a:solidFill>
+                  <a:srgbClr val="D0D0D0"/>
+                </a:solidFill>
+              </a:defRPr>
+            </a:pPr>
+            <a:r>
+              <a:t>Curriculum Completion         &gt; 40%</a:t>
+            </a:r>
+          </a:p>
+          <a:p>
+            <a:pPr>
+              <a:spcAft>
+                <a:spcPts val="200"/>
+              </a:spcAft>
+              <a:defRPr sz="1100">
+                <a:solidFill>
+                  <a:srgbClr val="D0D0D0"/>
+                </a:solidFill>
+              </a:defRPr>
+            </a:pPr>
+            <a:r>
+              <a:t>Citizen Satisfaction          &gt; 4.0 / 5.0</a:t>
+            </a:r>
+          </a:p>
+          <a:p>
+            <a:pPr>
+              <a:spcAft>
+                <a:spcPts val="200"/>
+              </a:spcAft>
+              <a:defRPr sz="1100">
+                <a:solidFill>
+                  <a:srgbClr val="D0D0D0"/>
+                </a:solidFill>
+              </a:defRPr>
+            </a:pPr>
+            <a:r>
+              <a:t>QR Scan Volume                1 / clerk / week</a:t>
+            </a:r>
+          </a:p>
+          <a:p>
+            <a:pPr>
+              <a:spcAft>
+                <a:spcPts val="200"/>
+              </a:spcAft>
+              <a:defRPr sz="1100">
+                <a:solidFill>
+                  <a:srgbClr val="D0D0D0"/>
+                </a:solidFill>
+              </a:defRPr>
+            </a:pPr>
+            <a:r>
+              <a:t>ISL Champions                 10% of enrolled</a:t>
+            </a:r>
+          </a:p>
+        </p:txBody>
+      </p:sp>
+      <p:sp>
+        <p:nvSpPr>
+          <p:cNvPr id="8" name="Rounded Rectangle 7"/>
+          <p:cNvSpPr/>
+          <p:nvPr/>
+        </p:nvSpPr>
+        <p:spPr>
+          <a:xfrm>
+            <a:off x="731520" y="4846320"/>
+            <a:ext cx="10789920" cy="1280160"/>
+          </a:xfrm>
+          <a:prstGeom prst="roundRect">
+            <a:avLst/>
+          </a:prstGeom>
+          <a:solidFill>
+            <a:srgbClr val="121C2E"/>
+          </a:solidFill>
+          <a:ln w="12700">
+            <a:solidFill>
+              <a:srgbClr val="4ADE80"/>
+            </a:solidFill>
+          </a:ln>
+        </p:spPr>
+        <p:style>
+          <a:lnRef idx="1">
+            <a:schemeClr val="accent1"/>
+          </a:lnRef>
+          <a:fillRef idx="3">
+            <a:schemeClr val="accent1"/>
+          </a:fillRef>
+          <a:effectRef idx="2">
+            <a:schemeClr val="accent1"/>
+          </a:effectRef>
+          <a:fontRef idx="minor">
+            <a:schemeClr val="lt1"/>
+          </a:fontRef>
+        </p:style>
+        <p:txBody>
+          <a:bodyPr rtlCol="0" anchor="ctr" wrap="square" lIns="182880" tIns="91440"/>
+          <a:lstStyle/>
+          <a:p>
+            <a:pPr algn="ctr">
+              <a:spcAft>
                 <a:spcPts val="600"/>
               </a:spcAft>
-              <a:defRPr sz="1400" b="1">
+              <a:defRPr sz="1300" b="1">
                 <a:solidFill>
                   <a:srgbClr val="4ADE80"/>
                 </a:solidFill>
               </a:defRPr>
             </a:pPr>
             <a:r>
-              <a:t>COST — ₹2,50,000 / YEAR PER MUNICIPALITY (UP TO 500 CLERKS)</a:t>
-            </a:r>
-          </a:p>
-          <a:p>
-            <a:pPr>
-              <a:spcAft>
-                <a:spcPts val="300"/>
-              </a:spcAft>
-              <a:defRPr sz="1100">
-                <a:solidFill>
-                  <a:srgbClr val="94A3B8"/>
-                </a:solidFill>
-              </a:defRPr>
-            </a:pPr>
-            <a:r>
-              <a:t>Platform license (500 clerk accounts)              ₹1,80,000</a:t>
-            </a:r>
-          </a:p>
-          <a:p>
-            <a:pPr>
-              <a:spcAft>
-                <a:spcPts val="300"/>
-              </a:spcAft>
-              <a:defRPr sz="1100">
-                <a:solidFill>
-                  <a:srgbClr val="94A3B8"/>
-                </a:solidFill>
-              </a:defRPr>
-            </a:pPr>
-            <a:r>
-              <a:t>Self-paced ISL curriculum (25+ municipal signs)    Included</a:t>
-            </a:r>
-          </a:p>
-          <a:p>
-            <a:pPr>
-              <a:spcAft>
-                <a:spcPts val="300"/>
-              </a:spcAft>
-              <a:defRPr sz="1100">
-                <a:solidFill>
-                  <a:srgbClr val="94A3B8"/>
-                </a:solidFill>
-              </a:defRPr>
-            </a:pPr>
-            <a:r>
-              <a:t>Human interpreter relay — deaf ↔ trained clerk     Included</a:t>
-            </a:r>
-          </a:p>
-          <a:p>
-            <a:pPr>
-              <a:spcAft>
-                <a:spcPts val="300"/>
-              </a:spcAft>
-              <a:defRPr sz="1100">
-                <a:solidFill>
-                  <a:srgbClr val="94A3B8"/>
-                </a:solidFill>
-              </a:defRPr>
-            </a:pPr>
-            <a:r>
-              <a:t>Admin dashboard, analytics &amp; QR feedback           Included</a:t>
-            </a:r>
-          </a:p>
-          <a:p>
-            <a:pPr>
-              <a:spcAft>
-                <a:spcPts val="300"/>
-              </a:spcAft>
-              <a:defRPr sz="1100">
-                <a:solidFill>
-                  <a:srgbClr val="94A3B8"/>
-                </a:solidFill>
-              </a:defRPr>
-            </a:pPr>
-            <a:r>
-              <a:t>Technical support &amp; maintenance                    ₹70,000</a:t>
-            </a:r>
-          </a:p>
-          <a:p>
-            <a:pPr>
-              <a:spcAft>
-                <a:spcPts val="300"/>
-              </a:spcAft>
-              <a:defRPr sz="1100">
-                <a:solidFill>
-                  <a:srgbClr val="94A3B8"/>
-                </a:solidFill>
-              </a:defRPr>
-            </a:pPr>
-            <a:r>
-              <a:t>Per clerk per year                                 ₹500</a:t>
-            </a:r>
-          </a:p>
-        </p:txBody>
-      </p:sp>
-      <p:sp>
-        <p:nvSpPr>
-          <p:cNvPr id="8" name="TextBox 7"/>
+              <a:t>COST BREAKDOWN  —  ₹2,50,000 / year per municipality (500 clerks)</a:t>
+            </a:r>
+          </a:p>
+          <a:p>
+            <a:pPr>
+              <a:spcAft>
+                <a:spcPts val="200"/>
+              </a:spcAft>
+              <a:defRPr sz="1000">
+                <a:solidFill>
+                  <a:srgbClr val="D0D0D0"/>
+                </a:solidFill>
+              </a:defRPr>
+            </a:pPr>
+            <a:r>
+              <a:t>Platform license (500 accounts)     ₹1,80,000     |     Curriculum + relay + dashboard     Included     |     Support     ₹70,000</a:t>
+            </a:r>
+          </a:p>
+          <a:p>
+            <a:pPr>
+              <a:spcAft>
+                <a:spcPts val="200"/>
+              </a:spcAft>
+              <a:defRPr sz="1000">
+                <a:solidFill>
+                  <a:srgbClr val="D0D0D0"/>
+                </a:solidFill>
+              </a:defRPr>
+            </a:pPr>
+            <a:r>
+              <a:t>Per clerk per year     ₹500</a:t>
+            </a:r>
+          </a:p>
+        </p:txBody>
+      </p:sp>
+      <p:sp>
+        <p:nvSpPr>
+          <p:cNvPr id="9" name="TextBox 8"/>
           <p:cNvSpPr txBox="1"/>
           <p:nvPr/>
         </p:nvSpPr>
         <p:spPr>
           <a:xfrm>
-            <a:off x="457200" y="6400800"/>
-            <a:ext cx="10972800" cy="365760"/>
+            <a:off x="457200" y="6446520"/>
+            <a:ext cx="11247120" cy="274320"/>
           </a:xfrm>
           <a:prstGeom prst="rect">
             <a:avLst/>
@@ -7201,9 +7769,9 @@
           <a:lstStyle/>
           <a:p>
             <a:pPr algn="ctr">
-              <a:defRPr sz="900" b="0">
-                <a:solidFill>
-                  <a:srgbClr val="475569"/>
+              <a:defRPr sz="800" b="0">
+                <a:solidFill>
+                  <a:srgbClr val="505E72"/>
                 </a:solidFill>
               </a:defRPr>
             </a:pPr>
@@ -7247,8 +7815,8 @@
         </p:nvSpPr>
         <p:spPr>
           <a:xfrm>
-            <a:off x="731520" y="320040"/>
-            <a:ext cx="5486400" cy="274320"/>
+            <a:off x="731520" y="274320"/>
+            <a:ext cx="10972800" cy="256032"/>
           </a:xfrm>
           <a:prstGeom prst="rect">
             <a:avLst/>
@@ -7276,90 +7844,20 @@
       </p:sp>
       <p:sp>
         <p:nvSpPr>
-          <p:cNvPr id="3" name="TextBox 2"/>
-          <p:cNvSpPr txBox="1"/>
-          <p:nvPr/>
-        </p:nvSpPr>
-        <p:spPr>
-          <a:xfrm>
-            <a:off x="731520" y="640080"/>
-            <a:ext cx="10058400" cy="640080"/>
+          <p:cNvPr id="3" name="Rectangle 2"/>
+          <p:cNvSpPr/>
+          <p:nvPr/>
+        </p:nvSpPr>
+        <p:spPr>
+          <a:xfrm>
+            <a:off x="731520" y="566928"/>
+            <a:ext cx="1371600" cy="16459"/>
           </a:xfrm>
           <a:prstGeom prst="rect">
             <a:avLst/>
           </a:prstGeom>
-          <a:noFill/>
-        </p:spPr>
-        <p:txBody>
-          <a:bodyPr wrap="square">
-            <a:spAutoFit/>
-          </a:bodyPr>
-          <a:lstStyle/>
-          <a:p>
-            <a:pPr algn="l">
-              <a:defRPr sz="3400" b="1">
-                <a:solidFill>
-                  <a:srgbClr val="FFFFFF"/>
-                </a:solidFill>
-              </a:defRPr>
-            </a:pPr>
-            <a:r>
-              <a:t>Already built. Already working.</a:t>
-            </a:r>
-          </a:p>
-        </p:txBody>
-      </p:sp>
-      <p:sp>
-        <p:nvSpPr>
-          <p:cNvPr id="4" name="TextBox 3"/>
-          <p:cNvSpPr txBox="1"/>
-          <p:nvPr/>
-        </p:nvSpPr>
-        <p:spPr>
-          <a:xfrm>
-            <a:off x="731520" y="1234440"/>
-            <a:ext cx="10058400" cy="457200"/>
-          </a:xfrm>
-          <a:prstGeom prst="rect">
-            <a:avLst/>
-          </a:prstGeom>
-          <a:noFill/>
-        </p:spPr>
-        <p:txBody>
-          <a:bodyPr wrap="square">
-            <a:spAutoFit/>
-          </a:bodyPr>
-          <a:lstStyle/>
-          <a:p>
-            <a:pPr algn="l">
-              <a:defRPr sz="1400" b="0">
-                <a:solidFill>
-                  <a:srgbClr val="94A3B8"/>
-                </a:solidFill>
-              </a:defRPr>
-            </a:pPr>
-            <a:r>
-              <a:t>Not a concept — a fully functional application deployed on Vercel with MongoDB Atlas.</a:t>
-            </a:r>
-          </a:p>
-        </p:txBody>
-      </p:sp>
-      <p:sp>
-        <p:nvSpPr>
-          <p:cNvPr id="5" name="Rounded Rectangle 4"/>
-          <p:cNvSpPr/>
-          <p:nvPr/>
-        </p:nvSpPr>
-        <p:spPr>
-          <a:xfrm>
-            <a:off x="731520" y="2011680"/>
-            <a:ext cx="5303520" cy="3840480"/>
-          </a:xfrm>
-          <a:prstGeom prst="roundRect">
-            <a:avLst/>
-          </a:prstGeom>
           <a:solidFill>
-            <a:srgbClr val="141E30"/>
+            <a:srgbClr val="C9A961"/>
           </a:solidFill>
           <a:ln>
             <a:noFill/>
@@ -7380,171 +7878,79 @@
           </a:fontRef>
         </p:style>
         <p:txBody>
-          <a:bodyPr rtlCol="0" anchor="ctr" wrap="square" lIns="137160" rIns="137160" tIns="109728"/>
-          <a:lstStyle/>
-          <a:p>
-            <a:pPr algn="ctr">
-              <a:spcAft>
-                <a:spcPts val="600"/>
-              </a:spcAft>
-              <a:defRPr sz="1400" b="1">
-                <a:solidFill>
-                  <a:srgbClr val="4ADE80"/>
-                </a:solidFill>
-              </a:defRPr>
-            </a:pPr>
-            <a:r>
-              <a:t>WHAT'S READY NOW</a:t>
-            </a:r>
-          </a:p>
-          <a:p>
-            <a:pPr>
-              <a:spcAft>
-                <a:spcPts val="300"/>
-              </a:spcAft>
-              <a:defRPr sz="1100">
-                <a:solidFill>
-                  <a:srgbClr val="94A3B8"/>
-                </a:solidFill>
-              </a:defRPr>
-            </a:pPr>
-            <a:r>
-              <a:t>✓  Next.js 14 app with 34 ISL signs</a:t>
-            </a:r>
-          </a:p>
-          <a:p>
-            <a:pPr>
-              <a:spcAft>
-                <a:spcPts val="300"/>
-              </a:spcAft>
-              <a:defRPr sz="1100">
-                <a:solidFill>
-                  <a:srgbClr val="94A3B8"/>
-                </a:solidFill>
-              </a:defRPr>
-            </a:pPr>
-            <a:r>
-              <a:t>✓  Live webcam hand tracking (MediaPipe)</a:t>
-            </a:r>
-          </a:p>
-          <a:p>
-            <a:pPr>
-              <a:spcAft>
-                <a:spcPts val="300"/>
-              </a:spcAft>
-              <a:defRPr sz="1100">
-                <a:solidFill>
-                  <a:srgbClr val="94A3B8"/>
-                </a:solidFill>
-              </a:defRPr>
-            </a:pPr>
-            <a:r>
-              <a:t>✓  kNN classifier — trainable per user</a:t>
-            </a:r>
-          </a:p>
-          <a:p>
-            <a:pPr>
-              <a:spcAft>
-                <a:spcPts val="300"/>
-              </a:spcAft>
-              <a:defRPr sz="1100">
-                <a:solidFill>
-                  <a:srgbClr val="94A3B8"/>
-                </a:solidFill>
-              </a:defRPr>
-            </a:pPr>
-            <a:r>
-              <a:t>✓  Human interpreter relay (simulated)</a:t>
-            </a:r>
-          </a:p>
-          <a:p>
-            <a:pPr>
-              <a:spcAft>
-                <a:spcPts val="300"/>
-              </a:spcAft>
-              <a:defRPr sz="1100">
-                <a:solidFill>
-                  <a:srgbClr val="94A3B8"/>
-                </a:solidFill>
-              </a:defRPr>
-            </a:pPr>
-            <a:r>
-              <a:t>✓  Gamification (XP, streaks, badges, levels)</a:t>
-            </a:r>
-          </a:p>
-          <a:p>
-            <a:pPr>
-              <a:spcAft>
-                <a:spcPts val="300"/>
-              </a:spcAft>
-              <a:defRPr sz="1100">
-                <a:solidFill>
-                  <a:srgbClr val="94A3B8"/>
-                </a:solidFill>
-              </a:defRPr>
-            </a:pPr>
-            <a:r>
-              <a:t>✓  Admin dashboard with real analytics</a:t>
-            </a:r>
-          </a:p>
-          <a:p>
-            <a:pPr>
-              <a:spcAft>
-                <a:spcPts val="300"/>
-              </a:spcAft>
-              <a:defRPr sz="1100">
-                <a:solidFill>
-                  <a:srgbClr val="94A3B8"/>
-                </a:solidFill>
-              </a:defRPr>
-            </a:pPr>
-            <a:r>
-              <a:t>✓  Citizen QR feedback loop</a:t>
-            </a:r>
-          </a:p>
-          <a:p>
-            <a:pPr>
-              <a:spcAft>
-                <a:spcPts val="300"/>
-              </a:spcAft>
-              <a:defRPr sz="1100">
-                <a:solidFill>
-                  <a:srgbClr val="94A3B8"/>
-                </a:solidFill>
-              </a:defRPr>
-            </a:pPr>
-            <a:r>
-              <a:t>✓  Auth (JWT + bcrypt + httpOnly cookies)</a:t>
-            </a:r>
-          </a:p>
-          <a:p>
-            <a:pPr>
-              <a:spcAft>
-                <a:spcPts val="300"/>
-              </a:spcAft>
-              <a:defRPr sz="1100">
-                <a:solidFill>
-                  <a:srgbClr val="94A3B8"/>
-                </a:solidFill>
-              </a:defRPr>
-            </a:pPr>
-            <a:r>
-              <a:t>✓  Mock DB fallback — zero crash risk</a:t>
-            </a:r>
-          </a:p>
-          <a:p>
-            <a:pPr>
-              <a:spcAft>
-                <a:spcPts val="300"/>
-              </a:spcAft>
-              <a:defRPr sz="1100">
-                <a:solidFill>
-                  <a:srgbClr val="94A3B8"/>
-                </a:solidFill>
-              </a:defRPr>
-            </a:pPr>
-            <a:r>
-              <a:t>✓  PWA offline mode</a:t>
+          <a:bodyPr rtlCol="0" anchor="ctr"/>
+          <a:lstStyle/>
+          <a:p>
+            <a:pPr algn="ctr"/>
+          </a:p>
+        </p:txBody>
+      </p:sp>
+      <p:sp>
+        <p:nvSpPr>
+          <p:cNvPr id="4" name="TextBox 3"/>
+          <p:cNvSpPr txBox="1"/>
+          <p:nvPr/>
+        </p:nvSpPr>
+        <p:spPr>
+          <a:xfrm>
+            <a:off x="731520" y="658368"/>
+            <a:ext cx="10972800" cy="548640"/>
+          </a:xfrm>
+          <a:prstGeom prst="rect">
+            <a:avLst/>
+          </a:prstGeom>
+          <a:noFill/>
+        </p:spPr>
+        <p:txBody>
+          <a:bodyPr wrap="square">
+            <a:spAutoFit/>
+          </a:bodyPr>
+          <a:lstStyle/>
+          <a:p>
+            <a:pPr algn="l">
+              <a:defRPr sz="3200" b="1">
+                <a:solidFill>
+                  <a:srgbClr val="FFFFFF"/>
+                </a:solidFill>
+              </a:defRPr>
+            </a:pPr>
+            <a:r>
+              <a:t>Already built. Already working.</a:t>
+            </a:r>
+          </a:p>
+        </p:txBody>
+      </p:sp>
+      <p:sp>
+        <p:nvSpPr>
+          <p:cNvPr id="5" name="TextBox 4"/>
+          <p:cNvSpPr txBox="1"/>
+          <p:nvPr/>
+        </p:nvSpPr>
+        <p:spPr>
+          <a:xfrm>
+            <a:off x="731520" y="1188720"/>
+            <a:ext cx="10972800" cy="320040"/>
+          </a:xfrm>
+          <a:prstGeom prst="rect">
+            <a:avLst/>
+          </a:prstGeom>
+          <a:noFill/>
+        </p:spPr>
+        <p:txBody>
+          <a:bodyPr wrap="square">
+            <a:spAutoFit/>
+          </a:bodyPr>
+          <a:lstStyle/>
+          <a:p>
+            <a:pPr algn="l">
+              <a:defRPr sz="1300" b="0">
+                <a:solidFill>
+                  <a:srgbClr val="8896AA"/>
+                </a:solidFill>
+              </a:defRPr>
+            </a:pPr>
+            <a:r>
+              <a:t>Not a concept — a fully functional application deployed on Vercel.</a:t>
             </a:r>
           </a:p>
         </p:txBody>
@@ -7557,14 +7963,14 @@
         </p:nvSpPr>
         <p:spPr>
           <a:xfrm>
-            <a:off x="6309360" y="2011680"/>
-            <a:ext cx="5303520" cy="1828800"/>
+            <a:off x="731520" y="1828800"/>
+            <a:ext cx="5212080" cy="3840480"/>
           </a:xfrm>
           <a:prstGeom prst="roundRect">
             <a:avLst/>
           </a:prstGeom>
           <a:solidFill>
-            <a:srgbClr val="141E30"/>
+            <a:srgbClr val="121C2E"/>
           </a:solidFill>
           <a:ln>
             <a:noFill/>
@@ -7585,93 +7991,183 @@
           </a:fontRef>
         </p:style>
         <p:txBody>
-          <a:bodyPr rtlCol="0" anchor="ctr" wrap="square" lIns="137160" rIns="137160" tIns="109728"/>
+          <a:bodyPr rtlCol="0" anchor="ctr" wrap="square" lIns="128016" rIns="109728" tIns="91440"/>
           <a:lstStyle/>
           <a:p>
             <a:pPr algn="ctr">
               <a:spcAft>
-                <a:spcPts val="600"/>
-              </a:spcAft>
-              <a:defRPr sz="1400" b="1">
-                <a:solidFill>
-                  <a:srgbClr val="818CF8"/>
-                </a:solidFill>
-              </a:defRPr>
-            </a:pPr>
-            <a:r>
-              <a:t>PILOT TIMELINE</a:t>
-            </a:r>
-          </a:p>
-          <a:p>
-            <a:pPr>
-              <a:spcAft>
-                <a:spcPts val="300"/>
-              </a:spcAft>
-              <a:defRPr sz="1100">
-                <a:solidFill>
-                  <a:srgbClr val="94A3B8"/>
-                </a:solidFill>
-              </a:defRPr>
-            </a:pPr>
-            <a:r>
-              <a:t>Month 1: Deploy in 1 municipality, 3 departments</a:t>
-            </a:r>
-          </a:p>
-          <a:p>
-            <a:pPr>
-              <a:spcAft>
-                <a:spcPts val="300"/>
-              </a:spcAft>
-              <a:defRPr sz="1100">
-                <a:solidFill>
-                  <a:srgbClr val="94A3B8"/>
-                </a:solidFill>
-              </a:defRPr>
-            </a:pPr>
-            <a:r>
-              <a:t>Month 2: Onboard &amp; train 50–100 clerks</a:t>
-            </a:r>
-          </a:p>
-          <a:p>
-            <a:pPr>
-              <a:spcAft>
-                <a:spcPts val="300"/>
-              </a:spcAft>
-              <a:defRPr sz="1100">
-                <a:solidFill>
-                  <a:srgbClr val="94A3B8"/>
-                </a:solidFill>
-              </a:defRPr>
-            </a:pPr>
-            <a:r>
-              <a:t>Month 3: Measure DAL, collect QR feedback, iterate</a:t>
-            </a:r>
-          </a:p>
-          <a:p>
-            <a:pPr>
-              <a:spcAft>
-                <a:spcPts val="300"/>
-              </a:spcAft>
-              <a:defRPr sz="1100">
-                <a:solidFill>
-                  <a:srgbClr val="94A3B8"/>
-                </a:solidFill>
-              </a:defRPr>
-            </a:pPr>
-          </a:p>
-          <a:p>
-            <a:pPr>
-              <a:spcAft>
-                <a:spcPts val="300"/>
-              </a:spcAft>
-              <a:defRPr sz="1100">
-                <a:solidFill>
-                  <a:srgbClr val="94A3B8"/>
-                </a:solidFill>
-              </a:defRPr>
-            </a:pPr>
-            <a:r>
-              <a:t>Phase 2: Live human interpreter via WebRTC</a:t>
+                <a:spcPts val="500"/>
+              </a:spcAft>
+              <a:defRPr sz="1200" b="1">
+                <a:solidFill>
+                  <a:srgbClr val="4ADE80"/>
+                </a:solidFill>
+              </a:defRPr>
+            </a:pPr>
+            <a:r>
+              <a:t>WHAT'S READY NOW</a:t>
+            </a:r>
+          </a:p>
+          <a:p>
+            <a:pPr>
+              <a:spcAft>
+                <a:spcPts val="200"/>
+              </a:spcAft>
+              <a:defRPr sz="1100">
+                <a:solidFill>
+                  <a:srgbClr val="D0D0D0"/>
+                </a:solidFill>
+              </a:defRPr>
+            </a:pPr>
+          </a:p>
+          <a:p>
+            <a:pPr>
+              <a:spcAft>
+                <a:spcPts val="200"/>
+              </a:spcAft>
+              <a:defRPr sz="1100">
+                <a:solidFill>
+                  <a:srgbClr val="D0D0D0"/>
+                </a:solidFill>
+              </a:defRPr>
+            </a:pPr>
+            <a:r>
+              <a:t>✓  Next.js 14 app — 34 ISL signs</a:t>
+            </a:r>
+          </a:p>
+          <a:p>
+            <a:pPr>
+              <a:spcAft>
+                <a:spcPts val="200"/>
+              </a:spcAft>
+              <a:defRPr sz="1100">
+                <a:solidFill>
+                  <a:srgbClr val="D0D0D0"/>
+                </a:solidFill>
+              </a:defRPr>
+            </a:pPr>
+            <a:r>
+              <a:t>✓  Live webcam tracking (MediaPipe)</a:t>
+            </a:r>
+          </a:p>
+          <a:p>
+            <a:pPr>
+              <a:spcAft>
+                <a:spcPts val="200"/>
+              </a:spcAft>
+              <a:defRPr sz="1100">
+                <a:solidFill>
+                  <a:srgbClr val="D0D0D0"/>
+                </a:solidFill>
+              </a:defRPr>
+            </a:pPr>
+            <a:r>
+              <a:t>✓  kNN classifier — trainable per user</a:t>
+            </a:r>
+          </a:p>
+          <a:p>
+            <a:pPr>
+              <a:spcAft>
+                <a:spcPts val="200"/>
+              </a:spcAft>
+              <a:defRPr sz="1100">
+                <a:solidFill>
+                  <a:srgbClr val="D0D0D0"/>
+                </a:solidFill>
+              </a:defRPr>
+            </a:pPr>
+            <a:r>
+              <a:t>✓  Human interpreter relay (simulated)</a:t>
+            </a:r>
+          </a:p>
+          <a:p>
+            <a:pPr>
+              <a:spcAft>
+                <a:spcPts val="200"/>
+              </a:spcAft>
+              <a:defRPr sz="1100">
+                <a:solidFill>
+                  <a:srgbClr val="D0D0D0"/>
+                </a:solidFill>
+              </a:defRPr>
+            </a:pPr>
+            <a:r>
+              <a:t>✓  Gamification (XP, streaks, badges)</a:t>
+            </a:r>
+          </a:p>
+          <a:p>
+            <a:pPr>
+              <a:spcAft>
+                <a:spcPts val="200"/>
+              </a:spcAft>
+              <a:defRPr sz="1100">
+                <a:solidFill>
+                  <a:srgbClr val="D0D0D0"/>
+                </a:solidFill>
+              </a:defRPr>
+            </a:pPr>
+            <a:r>
+              <a:t>✓  Admin dashboard + real analytics</a:t>
+            </a:r>
+          </a:p>
+          <a:p>
+            <a:pPr>
+              <a:spcAft>
+                <a:spcPts val="200"/>
+              </a:spcAft>
+              <a:defRPr sz="1100">
+                <a:solidFill>
+                  <a:srgbClr val="D0D0D0"/>
+                </a:solidFill>
+              </a:defRPr>
+            </a:pPr>
+            <a:r>
+              <a:t>✓  Citizen QR feedback loop</a:t>
+            </a:r>
+          </a:p>
+          <a:p>
+            <a:pPr>
+              <a:spcAft>
+                <a:spcPts val="200"/>
+              </a:spcAft>
+              <a:defRPr sz="1100">
+                <a:solidFill>
+                  <a:srgbClr val="D0D0D0"/>
+                </a:solidFill>
+              </a:defRPr>
+            </a:pPr>
+            <a:r>
+              <a:t>✓  Auth (JWT + bcrypt)</a:t>
+            </a:r>
+          </a:p>
+          <a:p>
+            <a:pPr>
+              <a:spcAft>
+                <a:spcPts val="200"/>
+              </a:spcAft>
+              <a:defRPr sz="1100">
+                <a:solidFill>
+                  <a:srgbClr val="D0D0D0"/>
+                </a:solidFill>
+              </a:defRPr>
+            </a:pPr>
+            <a:r>
+              <a:t>✓  Mock DB fallback — zero crash</a:t>
+            </a:r>
+          </a:p>
+          <a:p>
+            <a:pPr>
+              <a:spcAft>
+                <a:spcPts val="200"/>
+              </a:spcAft>
+              <a:defRPr sz="1100">
+                <a:solidFill>
+                  <a:srgbClr val="D0D0D0"/>
+                </a:solidFill>
+              </a:defRPr>
+            </a:pPr>
+            <a:r>
+              <a:t>✓  PWA offline mode</a:t>
             </a:r>
           </a:p>
         </p:txBody>
@@ -7684,14 +8180,14 @@
         </p:nvSpPr>
         <p:spPr>
           <a:xfrm>
-            <a:off x="6309360" y="4114800"/>
-            <a:ext cx="5303520" cy="1737360"/>
+            <a:off x="6309360" y="1828800"/>
+            <a:ext cx="5212080" cy="1463040"/>
           </a:xfrm>
           <a:prstGeom prst="roundRect">
             <a:avLst/>
           </a:prstGeom>
           <a:solidFill>
-            <a:srgbClr val="141E30"/>
+            <a:srgbClr val="121C2E"/>
           </a:solidFill>
           <a:ln>
             <a:noFill/>
@@ -7712,14 +8208,201 @@
           </a:fontRef>
         </p:style>
         <p:txBody>
-          <a:bodyPr rtlCol="0" anchor="ctr" wrap="square" lIns="137160" rIns="137160" tIns="109728"/>
+          <a:bodyPr rtlCol="0" anchor="ctr" wrap="square" lIns="128016" rIns="109728" tIns="91440"/>
           <a:lstStyle/>
           <a:p>
             <a:pPr algn="ctr">
               <a:spcAft>
-                <a:spcPts val="600"/>
-              </a:spcAft>
-              <a:defRPr sz="1400" b="1">
+                <a:spcPts val="500"/>
+              </a:spcAft>
+              <a:defRPr sz="1200" b="1">
+                <a:solidFill>
+                  <a:srgbClr val="818CF8"/>
+                </a:solidFill>
+              </a:defRPr>
+            </a:pPr>
+            <a:r>
+              <a:t>PILOT TIMELINE</a:t>
+            </a:r>
+          </a:p>
+          <a:p>
+            <a:pPr>
+              <a:spcAft>
+                <a:spcPts val="200"/>
+              </a:spcAft>
+              <a:defRPr sz="1100">
+                <a:solidFill>
+                  <a:srgbClr val="D0D0D0"/>
+                </a:solidFill>
+              </a:defRPr>
+            </a:pPr>
+            <a:r>
+              <a:t>Month 1 → Deploy in 1 municipality, 3 depts</a:t>
+            </a:r>
+          </a:p>
+          <a:p>
+            <a:pPr>
+              <a:spcAft>
+                <a:spcPts val="200"/>
+              </a:spcAft>
+              <a:defRPr sz="1100">
+                <a:solidFill>
+                  <a:srgbClr val="D0D0D0"/>
+                </a:solidFill>
+              </a:defRPr>
+            </a:pPr>
+            <a:r>
+              <a:t>Month 2 → Onboard 50–100 clerks</a:t>
+            </a:r>
+          </a:p>
+          <a:p>
+            <a:pPr>
+              <a:spcAft>
+                <a:spcPts val="200"/>
+              </a:spcAft>
+              <a:defRPr sz="1100">
+                <a:solidFill>
+                  <a:srgbClr val="D0D0D0"/>
+                </a:solidFill>
+              </a:defRPr>
+            </a:pPr>
+            <a:r>
+              <a:t>Month 3 → Measure DAL, iterate</a:t>
+            </a:r>
+          </a:p>
+        </p:txBody>
+      </p:sp>
+      <p:sp>
+        <p:nvSpPr>
+          <p:cNvPr id="8" name="Rounded Rectangle 7"/>
+          <p:cNvSpPr/>
+          <p:nvPr/>
+        </p:nvSpPr>
+        <p:spPr>
+          <a:xfrm>
+            <a:off x="6309360" y="3474720"/>
+            <a:ext cx="5212080" cy="1097280"/>
+          </a:xfrm>
+          <a:prstGeom prst="roundRect">
+            <a:avLst/>
+          </a:prstGeom>
+          <a:solidFill>
+            <a:srgbClr val="121C2E"/>
+          </a:solidFill>
+          <a:ln w="15240">
+            <a:solidFill>
+              <a:srgbClr val="C4B5FD"/>
+            </a:solidFill>
+          </a:ln>
+        </p:spPr>
+        <p:style>
+          <a:lnRef idx="1">
+            <a:schemeClr val="accent1"/>
+          </a:lnRef>
+          <a:fillRef idx="3">
+            <a:schemeClr val="accent1"/>
+          </a:fillRef>
+          <a:effectRef idx="2">
+            <a:schemeClr val="accent1"/>
+          </a:effectRef>
+          <a:fontRef idx="minor">
+            <a:schemeClr val="lt1"/>
+          </a:fontRef>
+        </p:style>
+        <p:txBody>
+          <a:bodyPr rtlCol="0" anchor="ctr" wrap="square" lIns="128016" rIns="109728" tIns="91440"/>
+          <a:lstStyle/>
+          <a:p>
+            <a:pPr algn="ctr">
+              <a:spcAft>
+                <a:spcPts val="500"/>
+              </a:spcAft>
+              <a:defRPr sz="1200" b="1">
+                <a:solidFill>
+                  <a:srgbClr val="C4B5FD"/>
+                </a:solidFill>
+              </a:defRPr>
+            </a:pPr>
+            <a:r>
+              <a:t>FUTURE  ·  LIVE EMERGENCY INTERPRETER</a:t>
+            </a:r>
+          </a:p>
+          <a:p>
+            <a:pPr>
+              <a:spcAft>
+                <a:spcPts val="200"/>
+              </a:spcAft>
+              <a:defRPr sz="1100">
+                <a:solidFill>
+                  <a:srgbClr val="D0D0D0"/>
+                </a:solidFill>
+              </a:defRPr>
+            </a:pPr>
+            <a:r>
+              <a:t>Phase 2 → WebRTC video relay for low-confidence signs</a:t>
+            </a:r>
+          </a:p>
+          <a:p>
+            <a:pPr>
+              <a:spcAft>
+                <a:spcPts val="200"/>
+              </a:spcAft>
+              <a:defRPr sz="1100">
+                <a:solidFill>
+                  <a:srgbClr val="D0D0D0"/>
+                </a:solidFill>
+              </a:defRPr>
+            </a:pPr>
+            <a:r>
+              <a:t>When AI can't read → trained human joins live via video call</a:t>
+            </a:r>
+          </a:p>
+        </p:txBody>
+      </p:sp>
+      <p:sp>
+        <p:nvSpPr>
+          <p:cNvPr id="9" name="Rounded Rectangle 8"/>
+          <p:cNvSpPr/>
+          <p:nvPr/>
+        </p:nvSpPr>
+        <p:spPr>
+          <a:xfrm>
+            <a:off x="6309360" y="4754880"/>
+            <a:ext cx="5212080" cy="914400"/>
+          </a:xfrm>
+          <a:prstGeom prst="roundRect">
+            <a:avLst/>
+          </a:prstGeom>
+          <a:solidFill>
+            <a:srgbClr val="121C2E"/>
+          </a:solidFill>
+          <a:ln>
+            <a:noFill/>
+          </a:ln>
+        </p:spPr>
+        <p:style>
+          <a:lnRef idx="1">
+            <a:schemeClr val="accent1"/>
+          </a:lnRef>
+          <a:fillRef idx="3">
+            <a:schemeClr val="accent1"/>
+          </a:fillRef>
+          <a:effectRef idx="2">
+            <a:schemeClr val="accent1"/>
+          </a:effectRef>
+          <a:fontRef idx="minor">
+            <a:schemeClr val="lt1"/>
+          </a:fontRef>
+        </p:style>
+        <p:txBody>
+          <a:bodyPr rtlCol="0" anchor="ctr" wrap="square" lIns="128016" rIns="109728" tIns="91440"/>
+          <a:lstStyle/>
+          <a:p>
+            <a:pPr algn="ctr">
+              <a:spcAft>
+                <a:spcPts val="500"/>
+              </a:spcAft>
+              <a:defRPr sz="1200" b="1">
                 <a:solidFill>
                   <a:srgbClr val="FB923C"/>
                 </a:solidFill>
@@ -7732,75 +8415,30 @@
           <a:p>
             <a:pPr>
               <a:spcAft>
-                <a:spcPts val="300"/>
-              </a:spcAft>
-              <a:defRPr sz="1100">
-                <a:solidFill>
-                  <a:srgbClr val="94A3B8"/>
-                </a:solidFill>
-              </a:defRPr>
-            </a:pPr>
-            <a:r>
-              <a:t>Deploy: Vercel · serverless · auto-scaling</a:t>
-            </a:r>
-          </a:p>
-          <a:p>
-            <a:pPr>
-              <a:spcAft>
-                <a:spcPts val="300"/>
-              </a:spcAft>
-              <a:defRPr sz="1100">
-                <a:solidFill>
-                  <a:srgbClr val="94A3B8"/>
-                </a:solidFill>
-              </a:defRPr>
-            </a:pPr>
-            <a:r>
-              <a:t>DB: MongoDB Atlas · real data · fail-fast</a:t>
-            </a:r>
-          </a:p>
-          <a:p>
-            <a:pPr>
-              <a:spcAft>
-                <a:spcPts val="300"/>
-              </a:spcAft>
-              <a:defRPr sz="1100">
-                <a:solidFill>
-                  <a:srgbClr val="94A3B8"/>
-                </a:solidFill>
-              </a:defRPr>
-            </a:pPr>
-            <a:r>
-              <a:t>ML: On-device MediaPipe + kNN · no server</a:t>
-            </a:r>
-          </a:p>
-          <a:p>
-            <a:pPr>
-              <a:spcAft>
-                <a:spcPts val="300"/>
-              </a:spcAft>
-              <a:defRPr sz="1100">
-                <a:solidFill>
-                  <a:srgbClr val="94A3B8"/>
-                </a:solidFill>
-              </a:defRPr>
-            </a:pPr>
-            <a:r>
-              <a:t>Cost: ₹2.5L/yr · ₹500/clerk/yr</a:t>
-            </a:r>
-          </a:p>
-        </p:txBody>
-      </p:sp>
-      <p:sp>
-        <p:nvSpPr>
-          <p:cNvPr id="8" name="TextBox 7"/>
+                <a:spcPts val="200"/>
+              </a:spcAft>
+              <a:defRPr sz="1100">
+                <a:solidFill>
+                  <a:srgbClr val="D0D0D0"/>
+                </a:solidFill>
+              </a:defRPr>
+            </a:pPr>
+            <a:r>
+              <a:t>Deploy Vercel · DB Atlas · ML on-device · Cost ₹500/clerk/yr</a:t>
+            </a:r>
+          </a:p>
+        </p:txBody>
+      </p:sp>
+      <p:sp>
+        <p:nvSpPr>
+          <p:cNvPr id="10" name="TextBox 9"/>
           <p:cNvSpPr txBox="1"/>
           <p:nvPr/>
         </p:nvSpPr>
         <p:spPr>
           <a:xfrm>
-            <a:off x="457200" y="6400800"/>
-            <a:ext cx="10972800" cy="365760"/>
+            <a:off x="457200" y="6446520"/>
+            <a:ext cx="11247120" cy="274320"/>
           </a:xfrm>
           <a:prstGeom prst="rect">
             <a:avLst/>
@@ -7814,9 +8452,9 @@
           <a:lstStyle/>
           <a:p>
             <a:pPr algn="ctr">
-              <a:defRPr sz="900" b="0">
-                <a:solidFill>
-                  <a:srgbClr val="475569"/>
+              <a:defRPr sz="800" b="0">
+                <a:solidFill>
+                  <a:srgbClr val="505E72"/>
                 </a:solidFill>
               </a:defRPr>
             </a:pPr>
@@ -7860,8 +8498,8 @@
         </p:nvSpPr>
         <p:spPr>
           <a:xfrm>
-            <a:off x="731520" y="320040"/>
-            <a:ext cx="5486400" cy="274320"/>
+            <a:off x="731520" y="274320"/>
+            <a:ext cx="10972800" cy="256032"/>
           </a:xfrm>
           <a:prstGeom prst="rect">
             <a:avLst/>
@@ -7889,90 +8527,20 @@
       </p:sp>
       <p:sp>
         <p:nvSpPr>
-          <p:cNvPr id="3" name="TextBox 2"/>
-          <p:cNvSpPr txBox="1"/>
-          <p:nvPr/>
-        </p:nvSpPr>
-        <p:spPr>
-          <a:xfrm>
-            <a:off x="731520" y="640080"/>
-            <a:ext cx="10058400" cy="640080"/>
+          <p:cNvPr id="3" name="Rectangle 2"/>
+          <p:cNvSpPr/>
+          <p:nvPr/>
+        </p:nvSpPr>
+        <p:spPr>
+          <a:xfrm>
+            <a:off x="731520" y="566928"/>
+            <a:ext cx="1371600" cy="16459"/>
           </a:xfrm>
           <a:prstGeom prst="rect">
             <a:avLst/>
           </a:prstGeom>
-          <a:noFill/>
-        </p:spPr>
-        <p:txBody>
-          <a:bodyPr wrap="square">
-            <a:spAutoFit/>
-          </a:bodyPr>
-          <a:lstStyle/>
-          <a:p>
-            <a:pPr algn="l">
-              <a:defRPr sz="3400" b="1">
-                <a:solidFill>
-                  <a:srgbClr val="FFFFFF"/>
-                </a:solidFill>
-              </a:defRPr>
-            </a:pPr>
-            <a:r>
-              <a:t>One office to the nation — prove assists, not installs.</a:t>
-            </a:r>
-          </a:p>
-        </p:txBody>
-      </p:sp>
-      <p:sp>
-        <p:nvSpPr>
-          <p:cNvPr id="4" name="TextBox 3"/>
-          <p:cNvSpPr txBox="1"/>
-          <p:nvPr/>
-        </p:nvSpPr>
-        <p:spPr>
-          <a:xfrm>
-            <a:off x="731520" y="1234440"/>
-            <a:ext cx="10058400" cy="457200"/>
-          </a:xfrm>
-          <a:prstGeom prst="rect">
-            <a:avLst/>
-          </a:prstGeom>
-          <a:noFill/>
-        </p:spPr>
-        <p:txBody>
-          <a:bodyPr wrap="square">
-            <a:spAutoFit/>
-          </a:bodyPr>
-          <a:lstStyle/>
-          <a:p>
-            <a:pPr algn="l">
-              <a:defRPr sz="1400" b="0">
-                <a:solidFill>
-                  <a:srgbClr val="94A3B8"/>
-                </a:solidFill>
-              </a:defRPr>
-            </a:pPr>
-            <a:r>
-              <a:t>A phased rollout designed for sustainable, measurable growth.</a:t>
-            </a:r>
-          </a:p>
-        </p:txBody>
-      </p:sp>
-      <p:sp>
-        <p:nvSpPr>
-          <p:cNvPr id="5" name="Rounded Rectangle 4"/>
-          <p:cNvSpPr/>
-          <p:nvPr/>
-        </p:nvSpPr>
-        <p:spPr>
-          <a:xfrm>
-            <a:off x="548640" y="2011680"/>
-            <a:ext cx="2103120" cy="2743200"/>
-          </a:xfrm>
-          <a:prstGeom prst="roundRect">
-            <a:avLst/>
-          </a:prstGeom>
           <a:solidFill>
-            <a:srgbClr val="141E30"/>
+            <a:srgbClr val="C9A961"/>
           </a:solidFill>
           <a:ln>
             <a:noFill/>
@@ -7993,91 +8561,99 @@
           </a:fontRef>
         </p:style>
         <p:txBody>
-          <a:bodyPr rtlCol="0" anchor="ctr" wrap="square" lIns="137160" rIns="137160" tIns="109728"/>
-          <a:lstStyle/>
-          <a:p>
-            <a:pPr algn="ctr">
-              <a:spcAft>
-                <a:spcPts val="600"/>
-              </a:spcAft>
-              <a:defRPr sz="1400" b="1">
-                <a:solidFill>
-                  <a:srgbClr val="4ADE80"/>
-                </a:solidFill>
-              </a:defRPr>
-            </a:pPr>
-            <a:r>
-              <a:t>PILOT</a:t>
-            </a:r>
-          </a:p>
-          <a:p>
-            <a:pPr>
-              <a:spcAft>
-                <a:spcPts val="300"/>
-              </a:spcAft>
-              <a:defRPr sz="1100">
-                <a:solidFill>
-                  <a:srgbClr val="94A3B8"/>
-                </a:solidFill>
-              </a:defRPr>
-            </a:pPr>
-            <a:r>
-              <a:t>Months 1–3</a:t>
-            </a:r>
-          </a:p>
-          <a:p>
-            <a:pPr>
-              <a:spcAft>
-                <a:spcPts val="300"/>
-              </a:spcAft>
-              <a:defRPr sz="1100">
-                <a:solidFill>
-                  <a:srgbClr val="94A3B8"/>
-                </a:solidFill>
-              </a:defRPr>
-            </a:pPr>
-          </a:p>
-          <a:p>
-            <a:pPr>
-              <a:spcAft>
-                <a:spcPts val="300"/>
-              </a:spcAft>
-              <a:defRPr sz="1100">
-                <a:solidFill>
-                  <a:srgbClr val="94A3B8"/>
-                </a:solidFill>
-              </a:defRPr>
-            </a:pPr>
-            <a:r>
-              <a:t>1 municipality</a:t>
-            </a:r>
-            <a:br/>
-            <a:r>
-              <a:t>3 departments</a:t>
-            </a:r>
-            <a:br/>
-            <a:r>
-              <a:t>50–100 clerks</a:t>
-            </a:r>
-          </a:p>
-        </p:txBody>
-      </p:sp>
-      <p:sp>
-        <p:nvSpPr>
-          <p:cNvPr id="6" name="Right Arrow 5"/>
+          <a:bodyPr rtlCol="0" anchor="ctr"/>
+          <a:lstStyle/>
+          <a:p>
+            <a:pPr algn="ctr"/>
+          </a:p>
+        </p:txBody>
+      </p:sp>
+      <p:sp>
+        <p:nvSpPr>
+          <p:cNvPr id="4" name="TextBox 3"/>
+          <p:cNvSpPr txBox="1"/>
+          <p:nvPr/>
+        </p:nvSpPr>
+        <p:spPr>
+          <a:xfrm>
+            <a:off x="731520" y="658368"/>
+            <a:ext cx="10972800" cy="548640"/>
+          </a:xfrm>
+          <a:prstGeom prst="rect">
+            <a:avLst/>
+          </a:prstGeom>
+          <a:noFill/>
+        </p:spPr>
+        <p:txBody>
+          <a:bodyPr wrap="square">
+            <a:spAutoFit/>
+          </a:bodyPr>
+          <a:lstStyle/>
+          <a:p>
+            <a:pPr algn="l">
+              <a:defRPr sz="3200" b="1">
+                <a:solidFill>
+                  <a:srgbClr val="FFFFFF"/>
+                </a:solidFill>
+              </a:defRPr>
+            </a:pPr>
+            <a:r>
+              <a:t>One office to the nation.</a:t>
+            </a:r>
+          </a:p>
+        </p:txBody>
+      </p:sp>
+      <p:sp>
+        <p:nvSpPr>
+          <p:cNvPr id="5" name="TextBox 4"/>
+          <p:cNvSpPr txBox="1"/>
+          <p:nvPr/>
+        </p:nvSpPr>
+        <p:spPr>
+          <a:xfrm>
+            <a:off x="731520" y="1188720"/>
+            <a:ext cx="10972800" cy="320040"/>
+          </a:xfrm>
+          <a:prstGeom prst="rect">
+            <a:avLst/>
+          </a:prstGeom>
+          <a:noFill/>
+        </p:spPr>
+        <p:txBody>
+          <a:bodyPr wrap="square">
+            <a:spAutoFit/>
+          </a:bodyPr>
+          <a:lstStyle/>
+          <a:p>
+            <a:pPr algn="l">
+              <a:defRPr sz="1300" b="0">
+                <a:solidFill>
+                  <a:srgbClr val="8896AA"/>
+                </a:solidFill>
+              </a:defRPr>
+            </a:pPr>
+            <a:r>
+              <a:t>Prove assists, not installs.</a:t>
+            </a:r>
+          </a:p>
+        </p:txBody>
+      </p:sp>
+      <p:sp>
+        <p:nvSpPr>
+          <p:cNvPr id="6" name="Rounded Rectangle 5"/>
           <p:cNvSpPr/>
           <p:nvPr/>
         </p:nvSpPr>
         <p:spPr>
           <a:xfrm>
-            <a:off x="2697480" y="3108960"/>
-            <a:ext cx="137160" cy="274320"/>
-          </a:xfrm>
-          <a:prstGeom prst="rightArrow">
+            <a:off x="548640" y="1828800"/>
+            <a:ext cx="2011680" cy="2743200"/>
+          </a:xfrm>
+          <a:prstGeom prst="roundRect">
             <a:avLst/>
           </a:prstGeom>
           <a:solidFill>
-            <a:srgbClr val="94A3B8"/>
+            <a:srgbClr val="121C2E"/>
           </a:solidFill>
           <a:ln>
             <a:noFill/>
@@ -8098,29 +8674,91 @@
           </a:fontRef>
         </p:style>
         <p:txBody>
-          <a:bodyPr rtlCol="0" anchor="ctr"/>
-          <a:lstStyle/>
-          <a:p>
-            <a:pPr algn="ctr"/>
-          </a:p>
-        </p:txBody>
-      </p:sp>
-      <p:sp>
-        <p:nvSpPr>
-          <p:cNvPr id="7" name="Rounded Rectangle 6"/>
+          <a:bodyPr rtlCol="0" anchor="ctr" wrap="square" lIns="128016" rIns="109728" tIns="91440"/>
+          <a:lstStyle/>
+          <a:p>
+            <a:pPr algn="ctr">
+              <a:spcAft>
+                <a:spcPts val="500"/>
+              </a:spcAft>
+              <a:defRPr sz="1200" b="1">
+                <a:solidFill>
+                  <a:srgbClr val="4ADE80"/>
+                </a:solidFill>
+              </a:defRPr>
+            </a:pPr>
+            <a:r>
+              <a:t>PILOT</a:t>
+            </a:r>
+          </a:p>
+          <a:p>
+            <a:pPr>
+              <a:spcAft>
+                <a:spcPts val="200"/>
+              </a:spcAft>
+              <a:defRPr sz="1100">
+                <a:solidFill>
+                  <a:srgbClr val="D0D0D0"/>
+                </a:solidFill>
+              </a:defRPr>
+            </a:pPr>
+            <a:r>
+              <a:t>Months 1–3</a:t>
+            </a:r>
+          </a:p>
+          <a:p>
+            <a:pPr>
+              <a:spcAft>
+                <a:spcPts val="200"/>
+              </a:spcAft>
+              <a:defRPr sz="1100">
+                <a:solidFill>
+                  <a:srgbClr val="D0D0D0"/>
+                </a:solidFill>
+              </a:defRPr>
+            </a:pPr>
+          </a:p>
+          <a:p>
+            <a:pPr>
+              <a:spcAft>
+                <a:spcPts val="200"/>
+              </a:spcAft>
+              <a:defRPr sz="1100">
+                <a:solidFill>
+                  <a:srgbClr val="D0D0D0"/>
+                </a:solidFill>
+              </a:defRPr>
+            </a:pPr>
+            <a:r>
+              <a:t>1 municipality</a:t>
+            </a:r>
+            <a:br/>
+            <a:r>
+              <a:t>3 departments</a:t>
+            </a:r>
+            <a:br/>
+            <a:r>
+              <a:t>50–100 clerks</a:t>
+            </a:r>
+          </a:p>
+        </p:txBody>
+      </p:sp>
+      <p:sp>
+        <p:nvSpPr>
+          <p:cNvPr id="7" name="Right Arrow 6"/>
           <p:cNvSpPr/>
           <p:nvPr/>
         </p:nvSpPr>
         <p:spPr>
           <a:xfrm>
-            <a:off x="2834640" y="2011680"/>
-            <a:ext cx="2103120" cy="2743200"/>
-          </a:xfrm>
-          <a:prstGeom prst="roundRect">
+            <a:off x="2606040" y="2926080"/>
+            <a:ext cx="182880" cy="228600"/>
+          </a:xfrm>
+          <a:prstGeom prst="rightArrow">
             <a:avLst/>
           </a:prstGeom>
           <a:solidFill>
-            <a:srgbClr val="141E30"/>
+            <a:srgbClr val="505E72"/>
           </a:solidFill>
           <a:ln>
             <a:noFill/>
@@ -8141,91 +8779,29 @@
           </a:fontRef>
         </p:style>
         <p:txBody>
-          <a:bodyPr rtlCol="0" anchor="ctr" wrap="square" lIns="137160" rIns="137160" tIns="109728"/>
-          <a:lstStyle/>
-          <a:p>
-            <a:pPr algn="ctr">
-              <a:spcAft>
-                <a:spcPts val="600"/>
-              </a:spcAft>
-              <a:defRPr sz="1400" b="1">
-                <a:solidFill>
-                  <a:srgbClr val="818CF8"/>
-                </a:solidFill>
-              </a:defRPr>
-            </a:pPr>
-            <a:r>
-              <a:t>CITY-WIDE</a:t>
-            </a:r>
-          </a:p>
-          <a:p>
-            <a:pPr>
-              <a:spcAft>
-                <a:spcPts val="300"/>
-              </a:spcAft>
-              <a:defRPr sz="1100">
-                <a:solidFill>
-                  <a:srgbClr val="94A3B8"/>
-                </a:solidFill>
-              </a:defRPr>
-            </a:pPr>
-            <a:r>
-              <a:t>Months 4–6</a:t>
-            </a:r>
-          </a:p>
-          <a:p>
-            <a:pPr>
-              <a:spcAft>
-                <a:spcPts val="300"/>
-              </a:spcAft>
-              <a:defRPr sz="1100">
-                <a:solidFill>
-                  <a:srgbClr val="94A3B8"/>
-                </a:solidFill>
-              </a:defRPr>
-            </a:pPr>
-          </a:p>
-          <a:p>
-            <a:pPr>
-              <a:spcAft>
-                <a:spcPts val="300"/>
-              </a:spcAft>
-              <a:defRPr sz="1100">
-                <a:solidFill>
-                  <a:srgbClr val="94A3B8"/>
-                </a:solidFill>
-              </a:defRPr>
-            </a:pPr>
-            <a:r>
-              <a:t>All departments</a:t>
-            </a:r>
-            <a:br/>
-            <a:r>
-              <a:t>500+ clerks</a:t>
-            </a:r>
-            <a:br/>
-            <a:r>
-              <a:t>5–10 offices</a:t>
-            </a:r>
-          </a:p>
-        </p:txBody>
-      </p:sp>
-      <p:sp>
-        <p:nvSpPr>
-          <p:cNvPr id="8" name="Right Arrow 7"/>
+          <a:bodyPr rtlCol="0" anchor="ctr"/>
+          <a:lstStyle/>
+          <a:p>
+            <a:pPr algn="ctr"/>
+          </a:p>
+        </p:txBody>
+      </p:sp>
+      <p:sp>
+        <p:nvSpPr>
+          <p:cNvPr id="8" name="Rounded Rectangle 7"/>
           <p:cNvSpPr/>
           <p:nvPr/>
         </p:nvSpPr>
         <p:spPr>
           <a:xfrm>
-            <a:off x="4983480" y="3108960"/>
-            <a:ext cx="137160" cy="274320"/>
-          </a:xfrm>
-          <a:prstGeom prst="rightArrow">
+            <a:off x="2834640" y="1828800"/>
+            <a:ext cx="2011680" cy="2743200"/>
+          </a:xfrm>
+          <a:prstGeom prst="roundRect">
             <a:avLst/>
           </a:prstGeom>
           <a:solidFill>
-            <a:srgbClr val="94A3B8"/>
+            <a:srgbClr val="121C2E"/>
           </a:solidFill>
           <a:ln>
             <a:noFill/>
@@ -8246,29 +8822,91 @@
           </a:fontRef>
         </p:style>
         <p:txBody>
-          <a:bodyPr rtlCol="0" anchor="ctr"/>
-          <a:lstStyle/>
-          <a:p>
-            <a:pPr algn="ctr"/>
-          </a:p>
-        </p:txBody>
-      </p:sp>
-      <p:sp>
-        <p:nvSpPr>
-          <p:cNvPr id="9" name="Rounded Rectangle 8"/>
+          <a:bodyPr rtlCol="0" anchor="ctr" wrap="square" lIns="128016" rIns="109728" tIns="91440"/>
+          <a:lstStyle/>
+          <a:p>
+            <a:pPr algn="ctr">
+              <a:spcAft>
+                <a:spcPts val="500"/>
+              </a:spcAft>
+              <a:defRPr sz="1200" b="1">
+                <a:solidFill>
+                  <a:srgbClr val="818CF8"/>
+                </a:solidFill>
+              </a:defRPr>
+            </a:pPr>
+            <a:r>
+              <a:t>CITY-WIDE</a:t>
+            </a:r>
+          </a:p>
+          <a:p>
+            <a:pPr>
+              <a:spcAft>
+                <a:spcPts val="200"/>
+              </a:spcAft>
+              <a:defRPr sz="1100">
+                <a:solidFill>
+                  <a:srgbClr val="D0D0D0"/>
+                </a:solidFill>
+              </a:defRPr>
+            </a:pPr>
+            <a:r>
+              <a:t>Months 4–6</a:t>
+            </a:r>
+          </a:p>
+          <a:p>
+            <a:pPr>
+              <a:spcAft>
+                <a:spcPts val="200"/>
+              </a:spcAft>
+              <a:defRPr sz="1100">
+                <a:solidFill>
+                  <a:srgbClr val="D0D0D0"/>
+                </a:solidFill>
+              </a:defRPr>
+            </a:pPr>
+          </a:p>
+          <a:p>
+            <a:pPr>
+              <a:spcAft>
+                <a:spcPts val="200"/>
+              </a:spcAft>
+              <a:defRPr sz="1100">
+                <a:solidFill>
+                  <a:srgbClr val="D0D0D0"/>
+                </a:solidFill>
+              </a:defRPr>
+            </a:pPr>
+            <a:r>
+              <a:t>All departments</a:t>
+            </a:r>
+            <a:br/>
+            <a:r>
+              <a:t>500+ clerks</a:t>
+            </a:r>
+            <a:br/>
+            <a:r>
+              <a:t>5–10 offices</a:t>
+            </a:r>
+          </a:p>
+        </p:txBody>
+      </p:sp>
+      <p:sp>
+        <p:nvSpPr>
+          <p:cNvPr id="9" name="Right Arrow 8"/>
           <p:cNvSpPr/>
           <p:nvPr/>
         </p:nvSpPr>
         <p:spPr>
           <a:xfrm>
-            <a:off x="5120640" y="2011680"/>
-            <a:ext cx="2103120" cy="2743200"/>
-          </a:xfrm>
-          <a:prstGeom prst="roundRect">
+            <a:off x="4892040" y="2926080"/>
+            <a:ext cx="182880" cy="228600"/>
+          </a:xfrm>
+          <a:prstGeom prst="rightArrow">
             <a:avLst/>
           </a:prstGeom>
           <a:solidFill>
-            <a:srgbClr val="141E30"/>
+            <a:srgbClr val="505E72"/>
           </a:solidFill>
           <a:ln>
             <a:noFill/>
@@ -8289,91 +8927,29 @@
           </a:fontRef>
         </p:style>
         <p:txBody>
-          <a:bodyPr rtlCol="0" anchor="ctr" wrap="square" lIns="137160" rIns="137160" tIns="109728"/>
-          <a:lstStyle/>
-          <a:p>
-            <a:pPr algn="ctr">
-              <a:spcAft>
-                <a:spcPts val="600"/>
-              </a:spcAft>
-              <a:defRPr sz="1400" b="1">
-                <a:solidFill>
-                  <a:srgbClr val="FB923C"/>
-                </a:solidFill>
-              </a:defRPr>
-            </a:pPr>
-            <a:r>
-              <a:t>REGIONAL</a:t>
-            </a:r>
-          </a:p>
-          <a:p>
-            <a:pPr>
-              <a:spcAft>
-                <a:spcPts val="300"/>
-              </a:spcAft>
-              <a:defRPr sz="1100">
-                <a:solidFill>
-                  <a:srgbClr val="94A3B8"/>
-                </a:solidFill>
-              </a:defRPr>
-            </a:pPr>
-            <a:r>
-              <a:t>Months 7–12</a:t>
-            </a:r>
-          </a:p>
-          <a:p>
-            <a:pPr>
-              <a:spcAft>
-                <a:spcPts val="300"/>
-              </a:spcAft>
-              <a:defRPr sz="1100">
-                <a:solidFill>
-                  <a:srgbClr val="94A3B8"/>
-                </a:solidFill>
-              </a:defRPr>
-            </a:pPr>
-          </a:p>
-          <a:p>
-            <a:pPr>
-              <a:spcAft>
-                <a:spcPts val="300"/>
-              </a:spcAft>
-              <a:defRPr sz="1100">
-                <a:solidFill>
-                  <a:srgbClr val="94A3B8"/>
-                </a:solidFill>
-              </a:defRPr>
-            </a:pPr>
-            <a:r>
-              <a:t>5 Tier 2/3 cities</a:t>
-            </a:r>
-            <a:br/>
-            <a:r>
-              <a:t>5,000+ clerks</a:t>
-            </a:r>
-            <a:br/>
-            <a:r>
-              <a:t>Gujarat + Maharashtra</a:t>
-            </a:r>
-          </a:p>
-        </p:txBody>
-      </p:sp>
-      <p:sp>
-        <p:nvSpPr>
-          <p:cNvPr id="10" name="Right Arrow 9"/>
+          <a:bodyPr rtlCol="0" anchor="ctr"/>
+          <a:lstStyle/>
+          <a:p>
+            <a:pPr algn="ctr"/>
+          </a:p>
+        </p:txBody>
+      </p:sp>
+      <p:sp>
+        <p:nvSpPr>
+          <p:cNvPr id="10" name="Rounded Rectangle 9"/>
           <p:cNvSpPr/>
           <p:nvPr/>
         </p:nvSpPr>
         <p:spPr>
           <a:xfrm>
-            <a:off x="7269479" y="3108960"/>
-            <a:ext cx="137160" cy="274320"/>
-          </a:xfrm>
-          <a:prstGeom prst="rightArrow">
+            <a:off x="5120640" y="1828800"/>
+            <a:ext cx="2011680" cy="2743200"/>
+          </a:xfrm>
+          <a:prstGeom prst="roundRect">
             <a:avLst/>
           </a:prstGeom>
           <a:solidFill>
-            <a:srgbClr val="94A3B8"/>
+            <a:srgbClr val="121C2E"/>
           </a:solidFill>
           <a:ln>
             <a:noFill/>
@@ -8394,29 +8970,87 @@
           </a:fontRef>
         </p:style>
         <p:txBody>
-          <a:bodyPr rtlCol="0" anchor="ctr"/>
-          <a:lstStyle/>
-          <a:p>
-            <a:pPr algn="ctr"/>
-          </a:p>
-        </p:txBody>
-      </p:sp>
-      <p:sp>
-        <p:nvSpPr>
-          <p:cNvPr id="11" name="Rounded Rectangle 10"/>
+          <a:bodyPr rtlCol="0" anchor="ctr" wrap="square" lIns="128016" rIns="109728" tIns="91440"/>
+          <a:lstStyle/>
+          <a:p>
+            <a:pPr algn="ctr">
+              <a:spcAft>
+                <a:spcPts val="500"/>
+              </a:spcAft>
+              <a:defRPr sz="1200" b="1">
+                <a:solidFill>
+                  <a:srgbClr val="FB923C"/>
+                </a:solidFill>
+              </a:defRPr>
+            </a:pPr>
+            <a:r>
+              <a:t>REGIONAL</a:t>
+            </a:r>
+          </a:p>
+          <a:p>
+            <a:pPr>
+              <a:spcAft>
+                <a:spcPts val="200"/>
+              </a:spcAft>
+              <a:defRPr sz="1100">
+                <a:solidFill>
+                  <a:srgbClr val="D0D0D0"/>
+                </a:solidFill>
+              </a:defRPr>
+            </a:pPr>
+            <a:r>
+              <a:t>Months 7–12</a:t>
+            </a:r>
+          </a:p>
+          <a:p>
+            <a:pPr>
+              <a:spcAft>
+                <a:spcPts val="200"/>
+              </a:spcAft>
+              <a:defRPr sz="1100">
+                <a:solidFill>
+                  <a:srgbClr val="D0D0D0"/>
+                </a:solidFill>
+              </a:defRPr>
+            </a:pPr>
+          </a:p>
+          <a:p>
+            <a:pPr>
+              <a:spcAft>
+                <a:spcPts val="200"/>
+              </a:spcAft>
+              <a:defRPr sz="1100">
+                <a:solidFill>
+                  <a:srgbClr val="D0D0D0"/>
+                </a:solidFill>
+              </a:defRPr>
+            </a:pPr>
+            <a:r>
+              <a:t>5 Tier 2/3 cities</a:t>
+            </a:r>
+            <a:br/>
+            <a:r>
+              <a:t>5,000+ clerks</a:t>
+            </a:r>
+          </a:p>
+        </p:txBody>
+      </p:sp>
+      <p:sp>
+        <p:nvSpPr>
+          <p:cNvPr id="11" name="Right Arrow 10"/>
           <p:cNvSpPr/>
           <p:nvPr/>
         </p:nvSpPr>
         <p:spPr>
           <a:xfrm>
-            <a:off x="7406640" y="2011680"/>
-            <a:ext cx="2103120" cy="2743200"/>
-          </a:xfrm>
-          <a:prstGeom prst="roundRect">
+            <a:off x="7178040" y="2926080"/>
+            <a:ext cx="182880" cy="228600"/>
+          </a:xfrm>
+          <a:prstGeom prst="rightArrow">
             <a:avLst/>
           </a:prstGeom>
           <a:solidFill>
-            <a:srgbClr val="141E30"/>
+            <a:srgbClr val="505E72"/>
           </a:solidFill>
           <a:ln>
             <a:noFill/>
@@ -8437,91 +9071,29 @@
           </a:fontRef>
         </p:style>
         <p:txBody>
-          <a:bodyPr rtlCol="0" anchor="ctr" wrap="square" lIns="137160" rIns="137160" tIns="109728"/>
-          <a:lstStyle/>
-          <a:p>
-            <a:pPr algn="ctr">
-              <a:spcAft>
-                <a:spcPts val="600"/>
-              </a:spcAft>
-              <a:defRPr sz="1400" b="1">
-                <a:solidFill>
-                  <a:srgbClr val="C9A961"/>
-                </a:solidFill>
-              </a:defRPr>
-            </a:pPr>
-            <a:r>
-              <a:t>STATE</a:t>
-            </a:r>
-          </a:p>
-          <a:p>
-            <a:pPr>
-              <a:spcAft>
-                <a:spcPts val="300"/>
-              </a:spcAft>
-              <a:defRPr sz="1100">
-                <a:solidFill>
-                  <a:srgbClr val="94A3B8"/>
-                </a:solidFill>
-              </a:defRPr>
-            </a:pPr>
-            <a:r>
-              <a:t>Year 2</a:t>
-            </a:r>
-          </a:p>
-          <a:p>
-            <a:pPr>
-              <a:spcAft>
-                <a:spcPts val="300"/>
-              </a:spcAft>
-              <a:defRPr sz="1100">
-                <a:solidFill>
-                  <a:srgbClr val="94A3B8"/>
-                </a:solidFill>
-              </a:defRPr>
-            </a:pPr>
-          </a:p>
-          <a:p>
-            <a:pPr>
-              <a:spcAft>
-                <a:spcPts val="300"/>
-              </a:spcAft>
-              <a:defRPr sz="1100">
-                <a:solidFill>
-                  <a:srgbClr val="94A3B8"/>
-                </a:solidFill>
-              </a:defRPr>
-            </a:pPr>
-            <a:r>
-              <a:t>Gujarat + Maharashtra</a:t>
-            </a:r>
-            <a:br/>
-            <a:r>
-              <a:t>25,000+ certified</a:t>
-            </a:r>
-            <a:br/>
-            <a:r>
-              <a:t>Govt MoU</a:t>
-            </a:r>
-          </a:p>
-        </p:txBody>
-      </p:sp>
-      <p:sp>
-        <p:nvSpPr>
-          <p:cNvPr id="12" name="Right Arrow 11"/>
+          <a:bodyPr rtlCol="0" anchor="ctr"/>
+          <a:lstStyle/>
+          <a:p>
+            <a:pPr algn="ctr"/>
+          </a:p>
+        </p:txBody>
+      </p:sp>
+      <p:sp>
+        <p:nvSpPr>
+          <p:cNvPr id="12" name="Rounded Rectangle 11"/>
           <p:cNvSpPr/>
           <p:nvPr/>
         </p:nvSpPr>
         <p:spPr>
           <a:xfrm>
-            <a:off x="9555480" y="3108960"/>
-            <a:ext cx="137160" cy="274320"/>
-          </a:xfrm>
-          <a:prstGeom prst="rightArrow">
+            <a:off x="7406640" y="1828800"/>
+            <a:ext cx="2011680" cy="2743200"/>
+          </a:xfrm>
+          <a:prstGeom prst="roundRect">
             <a:avLst/>
           </a:prstGeom>
           <a:solidFill>
-            <a:srgbClr val="94A3B8"/>
+            <a:srgbClr val="121C2E"/>
           </a:solidFill>
           <a:ln>
             <a:noFill/>
@@ -8542,29 +9114,87 @@
           </a:fontRef>
         </p:style>
         <p:txBody>
-          <a:bodyPr rtlCol="0" anchor="ctr"/>
-          <a:lstStyle/>
-          <a:p>
-            <a:pPr algn="ctr"/>
-          </a:p>
-        </p:txBody>
-      </p:sp>
-      <p:sp>
-        <p:nvSpPr>
-          <p:cNvPr id="13" name="Rounded Rectangle 12"/>
+          <a:bodyPr rtlCol="0" anchor="ctr" wrap="square" lIns="128016" rIns="109728" tIns="91440"/>
+          <a:lstStyle/>
+          <a:p>
+            <a:pPr algn="ctr">
+              <a:spcAft>
+                <a:spcPts val="500"/>
+              </a:spcAft>
+              <a:defRPr sz="1200" b="1">
+                <a:solidFill>
+                  <a:srgbClr val="C9A961"/>
+                </a:solidFill>
+              </a:defRPr>
+            </a:pPr>
+            <a:r>
+              <a:t>STATE</a:t>
+            </a:r>
+          </a:p>
+          <a:p>
+            <a:pPr>
+              <a:spcAft>
+                <a:spcPts val="200"/>
+              </a:spcAft>
+              <a:defRPr sz="1100">
+                <a:solidFill>
+                  <a:srgbClr val="D0D0D0"/>
+                </a:solidFill>
+              </a:defRPr>
+            </a:pPr>
+            <a:r>
+              <a:t>Year 2</a:t>
+            </a:r>
+          </a:p>
+          <a:p>
+            <a:pPr>
+              <a:spcAft>
+                <a:spcPts val="200"/>
+              </a:spcAft>
+              <a:defRPr sz="1100">
+                <a:solidFill>
+                  <a:srgbClr val="D0D0D0"/>
+                </a:solidFill>
+              </a:defRPr>
+            </a:pPr>
+          </a:p>
+          <a:p>
+            <a:pPr>
+              <a:spcAft>
+                <a:spcPts val="200"/>
+              </a:spcAft>
+              <a:defRPr sz="1100">
+                <a:solidFill>
+                  <a:srgbClr val="D0D0D0"/>
+                </a:solidFill>
+              </a:defRPr>
+            </a:pPr>
+            <a:r>
+              <a:t>Gujarat + Maharashtra</a:t>
+            </a:r>
+            <a:br/>
+            <a:r>
+              <a:t>25,000+ certified</a:t>
+            </a:r>
+          </a:p>
+        </p:txBody>
+      </p:sp>
+      <p:sp>
+        <p:nvSpPr>
+          <p:cNvPr id="13" name="Right Arrow 12"/>
           <p:cNvSpPr/>
           <p:nvPr/>
         </p:nvSpPr>
         <p:spPr>
           <a:xfrm>
-            <a:off x="9692640" y="2011680"/>
-            <a:ext cx="2103120" cy="2743200"/>
-          </a:xfrm>
-          <a:prstGeom prst="roundRect">
+            <a:off x="9464040" y="2926080"/>
+            <a:ext cx="182880" cy="228600"/>
+          </a:xfrm>
+          <a:prstGeom prst="rightArrow">
             <a:avLst/>
           </a:prstGeom>
           <a:solidFill>
-            <a:srgbClr val="141E30"/>
+            <a:srgbClr val="505E72"/>
           </a:solidFill>
           <a:ln>
             <a:noFill/>
@@ -8585,72 +9215,10 @@
           </a:fontRef>
         </p:style>
         <p:txBody>
-          <a:bodyPr rtlCol="0" anchor="ctr" wrap="square" lIns="137160" rIns="137160" tIns="109728"/>
-          <a:lstStyle/>
-          <a:p>
-            <a:pPr algn="ctr">
-              <a:spcAft>
-                <a:spcPts val="600"/>
-              </a:spcAft>
-              <a:defRPr sz="1400" b="1">
-                <a:solidFill>
-                  <a:srgbClr val="F87171"/>
-                </a:solidFill>
-              </a:defRPr>
-            </a:pPr>
-            <a:r>
-              <a:t>NATIONAL</a:t>
-            </a:r>
-          </a:p>
-          <a:p>
-            <a:pPr>
-              <a:spcAft>
-                <a:spcPts val="300"/>
-              </a:spcAft>
-              <a:defRPr sz="1100">
-                <a:solidFill>
-                  <a:srgbClr val="94A3B8"/>
-                </a:solidFill>
-              </a:defRPr>
-            </a:pPr>
-            <a:r>
-              <a:t>Years 3–5</a:t>
-            </a:r>
-          </a:p>
-          <a:p>
-            <a:pPr>
-              <a:spcAft>
-                <a:spcPts val="300"/>
-              </a:spcAft>
-              <a:defRPr sz="1100">
-                <a:solidFill>
-                  <a:srgbClr val="94A3B8"/>
-                </a:solidFill>
-              </a:defRPr>
-            </a:pPr>
-          </a:p>
-          <a:p>
-            <a:pPr>
-              <a:spcAft>
-                <a:spcPts val="300"/>
-              </a:spcAft>
-              <a:defRPr sz="1100">
-                <a:solidFill>
-                  <a:srgbClr val="94A3B8"/>
-                </a:solidFill>
-              </a:defRPr>
-            </a:pPr>
-            <a:r>
-              <a:t>36 states &amp; UTs</a:t>
-            </a:r>
-            <a:br/>
-            <a:r>
-              <a:t>500,000+ trained</a:t>
-            </a:r>
-            <a:br/>
-            <a:r>
-              <a:t>DEPwD adoption</a:t>
-            </a:r>
+          <a:bodyPr rtlCol="0" anchor="ctr"/>
+          <a:lstStyle/>
+          <a:p>
+            <a:pPr algn="ctr"/>
           </a:p>
         </p:txBody>
       </p:sp>
@@ -8662,14 +9230,14 @@
         </p:nvSpPr>
         <p:spPr>
           <a:xfrm>
-            <a:off x="731520" y="5120640"/>
-            <a:ext cx="10789920" cy="1097280"/>
+            <a:off x="9692640" y="1828800"/>
+            <a:ext cx="2011680" cy="2743200"/>
           </a:xfrm>
           <a:prstGeom prst="roundRect">
             <a:avLst/>
           </a:prstGeom>
           <a:solidFill>
-            <a:srgbClr val="141E30"/>
+            <a:srgbClr val="121C2E"/>
           </a:solidFill>
           <a:ln>
             <a:noFill/>
@@ -8690,14 +9258,115 @@
           </a:fontRef>
         </p:style>
         <p:txBody>
-          <a:bodyPr rtlCol="0" anchor="ctr" wrap="square" lIns="137160" rIns="137160" tIns="109728"/>
+          <a:bodyPr rtlCol="0" anchor="ctr" wrap="square" lIns="128016" rIns="109728" tIns="91440"/>
           <a:lstStyle/>
           <a:p>
             <a:pPr algn="ctr">
               <a:spcAft>
-                <a:spcPts val="600"/>
-              </a:spcAft>
-              <a:defRPr sz="1400" b="1">
+                <a:spcPts val="500"/>
+              </a:spcAft>
+              <a:defRPr sz="1200" b="1">
+                <a:solidFill>
+                  <a:srgbClr val="F87171"/>
+                </a:solidFill>
+              </a:defRPr>
+            </a:pPr>
+            <a:r>
+              <a:t>NATIONAL</a:t>
+            </a:r>
+          </a:p>
+          <a:p>
+            <a:pPr>
+              <a:spcAft>
+                <a:spcPts val="200"/>
+              </a:spcAft>
+              <a:defRPr sz="1100">
+                <a:solidFill>
+                  <a:srgbClr val="D0D0D0"/>
+                </a:solidFill>
+              </a:defRPr>
+            </a:pPr>
+            <a:r>
+              <a:t>Years 3–5</a:t>
+            </a:r>
+          </a:p>
+          <a:p>
+            <a:pPr>
+              <a:spcAft>
+                <a:spcPts val="200"/>
+              </a:spcAft>
+              <a:defRPr sz="1100">
+                <a:solidFill>
+                  <a:srgbClr val="D0D0D0"/>
+                </a:solidFill>
+              </a:defRPr>
+            </a:pPr>
+          </a:p>
+          <a:p>
+            <a:pPr>
+              <a:spcAft>
+                <a:spcPts val="200"/>
+              </a:spcAft>
+              <a:defRPr sz="1100">
+                <a:solidFill>
+                  <a:srgbClr val="D0D0D0"/>
+                </a:solidFill>
+              </a:defRPr>
+            </a:pPr>
+            <a:r>
+              <a:t>36 states &amp; UTs</a:t>
+            </a:r>
+            <a:br/>
+            <a:r>
+              <a:t>500,000+ trained</a:t>
+            </a:r>
+          </a:p>
+        </p:txBody>
+      </p:sp>
+      <p:sp>
+        <p:nvSpPr>
+          <p:cNvPr id="15" name="Rounded Rectangle 14"/>
+          <p:cNvSpPr/>
+          <p:nvPr/>
+        </p:nvSpPr>
+        <p:spPr>
+          <a:xfrm>
+            <a:off x="731520" y="4937760"/>
+            <a:ext cx="10698480" cy="1097280"/>
+          </a:xfrm>
+          <a:prstGeom prst="roundRect">
+            <a:avLst/>
+          </a:prstGeom>
+          <a:solidFill>
+            <a:srgbClr val="121C2E"/>
+          </a:solidFill>
+          <a:ln>
+            <a:noFill/>
+          </a:ln>
+        </p:spPr>
+        <p:style>
+          <a:lnRef idx="1">
+            <a:schemeClr val="accent1"/>
+          </a:lnRef>
+          <a:fillRef idx="3">
+            <a:schemeClr val="accent1"/>
+          </a:fillRef>
+          <a:effectRef idx="2">
+            <a:schemeClr val="accent1"/>
+          </a:effectRef>
+          <a:fontRef idx="minor">
+            <a:schemeClr val="lt1"/>
+          </a:fontRef>
+        </p:style>
+        <p:txBody>
+          <a:bodyPr rtlCol="0" anchor="ctr" wrap="square" lIns="182880"/>
+          <a:lstStyle/>
+          <a:p>
+            <a:pPr algn="ctr">
+              <a:spcAft>
+                <a:spcPts val="400"/>
+              </a:spcAft>
+              <a:defRPr sz="1100" b="1">
                 <a:solidFill>
                   <a:srgbClr val="C9A961"/>
                 </a:solidFill>
@@ -8709,31 +9378,28 @@
           </a:p>
           <a:p>
             <a:pPr>
-              <a:spcAft>
-                <a:spcPts val="300"/>
-              </a:spcAft>
-              <a:defRPr sz="1100">
-                <a:solidFill>
-                  <a:srgbClr val="94A3B8"/>
-                </a:solidFill>
-              </a:defRPr>
-            </a:pPr>
-            <a:r>
-              <a:t>GSRDM (Gujarat State Rural Development Mission)  ·  Maharashtra SRC  ·  DEPwD National  ·  ISLRTC Certified Content  ·  ASHA-worker training model</a:t>
-            </a:r>
-          </a:p>
-        </p:txBody>
-      </p:sp>
-      <p:sp>
-        <p:nvSpPr>
-          <p:cNvPr id="15" name="TextBox 14"/>
+              <a:defRPr sz="1000">
+                <a:solidFill>
+                  <a:srgbClr val="D0D0D0"/>
+                </a:solidFill>
+              </a:defRPr>
+            </a:pPr>
+            <a:r>
+              <a:t>GSRDM  ·  Maharashtra SRC  ·  DEPwD  ·  ISLRTC Certified  ·  ASHA-worker training model</a:t>
+            </a:r>
+          </a:p>
+        </p:txBody>
+      </p:sp>
+      <p:sp>
+        <p:nvSpPr>
+          <p:cNvPr id="16" name="TextBox 15"/>
           <p:cNvSpPr txBox="1"/>
           <p:nvPr/>
         </p:nvSpPr>
         <p:spPr>
           <a:xfrm>
-            <a:off x="457200" y="6400800"/>
-            <a:ext cx="10972800" cy="365760"/>
+            <a:off x="457200" y="6446520"/>
+            <a:ext cx="11247120" cy="274320"/>
           </a:xfrm>
           <a:prstGeom prst="rect">
             <a:avLst/>
@@ -8747,9 +9413,9 @@
           <a:lstStyle/>
           <a:p>
             <a:pPr algn="ctr">
-              <a:defRPr sz="900" b="0">
-                <a:solidFill>
-                  <a:srgbClr val="475569"/>
+              <a:defRPr sz="800" b="0">
+                <a:solidFill>
+                  <a:srgbClr val="505E72"/>
                 </a:solidFill>
               </a:defRPr>
             </a:pPr>
@@ -8793,8 +9459,8 @@
         </p:nvSpPr>
         <p:spPr>
           <a:xfrm>
-            <a:off x="731520" y="320040"/>
-            <a:ext cx="5486400" cy="274320"/>
+            <a:off x="731520" y="274320"/>
+            <a:ext cx="10972800" cy="256032"/>
           </a:xfrm>
           <a:prstGeom prst="rect">
             <a:avLst/>
@@ -8822,90 +9488,20 @@
       </p:sp>
       <p:sp>
         <p:nvSpPr>
-          <p:cNvPr id="3" name="TextBox 2"/>
-          <p:cNvSpPr txBox="1"/>
-          <p:nvPr/>
-        </p:nvSpPr>
-        <p:spPr>
-          <a:xfrm>
-            <a:off x="731520" y="640080"/>
-            <a:ext cx="10058400" cy="640080"/>
+          <p:cNvPr id="3" name="Rectangle 2"/>
+          <p:cNvSpPr/>
+          <p:nvPr/>
+        </p:nvSpPr>
+        <p:spPr>
+          <a:xfrm>
+            <a:off x="731520" y="566928"/>
+            <a:ext cx="1371600" cy="16459"/>
           </a:xfrm>
           <a:prstGeom prst="rect">
             <a:avLst/>
           </a:prstGeom>
-          <a:noFill/>
-        </p:spPr>
-        <p:txBody>
-          <a:bodyPr wrap="square">
-            <a:spAutoFit/>
-          </a:bodyPr>
-          <a:lstStyle/>
-          <a:p>
-            <a:pPr algn="l">
-              <a:defRPr sz="3400" b="1">
-                <a:solidFill>
-                  <a:srgbClr val="FFFFFF"/>
-                </a:solidFill>
-              </a:defRPr>
-            </a:pPr>
-            <a:r>
-              <a:t>Everyone gains. Measurable at every level.</a:t>
-            </a:r>
-          </a:p>
-        </p:txBody>
-      </p:sp>
-      <p:sp>
-        <p:nvSpPr>
-          <p:cNvPr id="4" name="TextBox 3"/>
-          <p:cNvSpPr txBox="1"/>
-          <p:nvPr/>
-        </p:nvSpPr>
-        <p:spPr>
-          <a:xfrm>
-            <a:off x="731520" y="1234440"/>
-            <a:ext cx="10058400" cy="457200"/>
-          </a:xfrm>
-          <a:prstGeom prst="rect">
-            <a:avLst/>
-          </a:prstGeom>
-          <a:noFill/>
-        </p:spPr>
-        <p:txBody>
-          <a:bodyPr wrap="square">
-            <a:spAutoFit/>
-          </a:bodyPr>
-          <a:lstStyle/>
-          <a:p>
-            <a:pPr algn="l">
-              <a:defRPr sz="1400" b="0">
-                <a:solidFill>
-                  <a:srgbClr val="94A3B8"/>
-                </a:solidFill>
-              </a:defRPr>
-            </a:pPr>
-            <a:r>
-              <a:t>Sanket creates tangible value for every stakeholder in the ecosystem.</a:t>
-            </a:r>
-          </a:p>
-        </p:txBody>
-      </p:sp>
-      <p:sp>
-        <p:nvSpPr>
-          <p:cNvPr id="5" name="Rounded Rectangle 4"/>
-          <p:cNvSpPr/>
-          <p:nvPr/>
-        </p:nvSpPr>
-        <p:spPr>
-          <a:xfrm>
-            <a:off x="731520" y="2011680"/>
-            <a:ext cx="5303520" cy="1463040"/>
-          </a:xfrm>
-          <a:prstGeom prst="roundRect">
-            <a:avLst/>
-          </a:prstGeom>
           <a:solidFill>
-            <a:srgbClr val="141E30"/>
+            <a:srgbClr val="C9A961"/>
           </a:solidFill>
           <a:ln>
             <a:noFill/>
@@ -8926,51 +9522,79 @@
           </a:fontRef>
         </p:style>
         <p:txBody>
-          <a:bodyPr rtlCol="0" anchor="ctr" wrap="square" lIns="137160" rIns="137160" tIns="109728"/>
-          <a:lstStyle/>
-          <a:p>
-            <a:pPr algn="ctr">
-              <a:spcAft>
-                <a:spcPts val="600"/>
-              </a:spcAft>
-              <a:defRPr sz="1400" b="1">
-                <a:solidFill>
-                  <a:srgbClr val="818CF8"/>
-                </a:solidFill>
-              </a:defRPr>
-            </a:pPr>
-            <a:r>
-              <a:t>DEAF CITIZEN</a:t>
-            </a:r>
-          </a:p>
-          <a:p>
-            <a:pPr>
-              <a:spcAft>
-                <a:spcPts val="300"/>
-              </a:spcAft>
-              <a:defRPr sz="1100">
-                <a:solidFill>
-                  <a:srgbClr val="94A3B8"/>
-                </a:solidFill>
-              </a:defRPr>
-            </a:pPr>
-            <a:r>
-              <a:t>Walk into any government office and be understood in</a:t>
-            </a:r>
-          </a:p>
-          <a:p>
-            <a:pPr>
-              <a:spcAft>
-                <a:spcPts val="300"/>
-              </a:spcAft>
-              <a:defRPr sz="1100">
-                <a:solidFill>
-                  <a:srgbClr val="94A3B8"/>
-                </a:solidFill>
-              </a:defRPr>
-            </a:pPr>
-            <a:r>
-              <a:t>their own language. No more written notes or being turned away.</a:t>
+          <a:bodyPr rtlCol="0" anchor="ctr"/>
+          <a:lstStyle/>
+          <a:p>
+            <a:pPr algn="ctr"/>
+          </a:p>
+        </p:txBody>
+      </p:sp>
+      <p:sp>
+        <p:nvSpPr>
+          <p:cNvPr id="4" name="TextBox 3"/>
+          <p:cNvSpPr txBox="1"/>
+          <p:nvPr/>
+        </p:nvSpPr>
+        <p:spPr>
+          <a:xfrm>
+            <a:off x="731520" y="658368"/>
+            <a:ext cx="10972800" cy="548640"/>
+          </a:xfrm>
+          <a:prstGeom prst="rect">
+            <a:avLst/>
+          </a:prstGeom>
+          <a:noFill/>
+        </p:spPr>
+        <p:txBody>
+          <a:bodyPr wrap="square">
+            <a:spAutoFit/>
+          </a:bodyPr>
+          <a:lstStyle/>
+          <a:p>
+            <a:pPr algn="l">
+              <a:defRPr sz="3200" b="1">
+                <a:solidFill>
+                  <a:srgbClr val="FFFFFF"/>
+                </a:solidFill>
+              </a:defRPr>
+            </a:pPr>
+            <a:r>
+              <a:t>Everyone gains. Measurable at every level.</a:t>
+            </a:r>
+          </a:p>
+        </p:txBody>
+      </p:sp>
+      <p:sp>
+        <p:nvSpPr>
+          <p:cNvPr id="5" name="TextBox 4"/>
+          <p:cNvSpPr txBox="1"/>
+          <p:nvPr/>
+        </p:nvSpPr>
+        <p:spPr>
+          <a:xfrm>
+            <a:off x="731520" y="1188720"/>
+            <a:ext cx="10972800" cy="320040"/>
+          </a:xfrm>
+          <a:prstGeom prst="rect">
+            <a:avLst/>
+          </a:prstGeom>
+          <a:noFill/>
+        </p:spPr>
+        <p:txBody>
+          <a:bodyPr wrap="square">
+            <a:spAutoFit/>
+          </a:bodyPr>
+          <a:lstStyle/>
+          <a:p>
+            <a:pPr algn="l">
+              <a:defRPr sz="1300" b="0">
+                <a:solidFill>
+                  <a:srgbClr val="8896AA"/>
+                </a:solidFill>
+              </a:defRPr>
+            </a:pPr>
+            <a:r>
+              <a:t>Sanket creates tangible value for every stakeholder.</a:t>
             </a:r>
           </a:p>
         </p:txBody>
@@ -8983,14 +9607,14 @@
         </p:nvSpPr>
         <p:spPr>
           <a:xfrm>
-            <a:off x="6309360" y="2011680"/>
-            <a:ext cx="5303520" cy="1463040"/>
+            <a:off x="731520" y="1828800"/>
+            <a:ext cx="5212080" cy="1371600"/>
           </a:xfrm>
           <a:prstGeom prst="roundRect">
             <a:avLst/>
           </a:prstGeom>
           <a:solidFill>
-            <a:srgbClr val="141E30"/>
+            <a:srgbClr val="121C2E"/>
           </a:solidFill>
           <a:ln>
             <a:noFill/>
@@ -9011,51 +9635,36 @@
           </a:fontRef>
         </p:style>
         <p:txBody>
-          <a:bodyPr rtlCol="0" anchor="ctr" wrap="square" lIns="137160" rIns="137160" tIns="109728"/>
+          <a:bodyPr rtlCol="0" anchor="ctr" wrap="square" lIns="128016" rIns="109728" tIns="91440"/>
           <a:lstStyle/>
           <a:p>
             <a:pPr algn="ctr">
               <a:spcAft>
-                <a:spcPts val="600"/>
-              </a:spcAft>
-              <a:defRPr sz="1400" b="1">
-                <a:solidFill>
-                  <a:srgbClr val="4ADE80"/>
-                </a:solidFill>
-              </a:defRPr>
-            </a:pPr>
-            <a:r>
-              <a:t>CLERK</a:t>
-            </a:r>
-          </a:p>
-          <a:p>
-            <a:pPr>
-              <a:spcAft>
-                <a:spcPts val="300"/>
-              </a:spcAft>
-              <a:defRPr sz="1100">
-                <a:solidFill>
-                  <a:srgbClr val="94A3B8"/>
-                </a:solidFill>
-              </a:defRPr>
-            </a:pPr>
-            <a:r>
-              <a:t>30-second service today. 3-min/day habit. Champion badge</a:t>
-            </a:r>
-          </a:p>
-          <a:p>
-            <a:pPr>
-              <a:spcAft>
-                <a:spcPts val="300"/>
-              </a:spcAft>
-              <a:defRPr sz="1100">
-                <a:solidFill>
-                  <a:srgbClr val="94A3B8"/>
-                </a:solidFill>
-              </a:defRPr>
-            </a:pPr>
-            <a:r>
-              <a:t>for career recognition. Gamified, not forced.</a:t>
+                <a:spcPts val="500"/>
+              </a:spcAft>
+              <a:defRPr sz="1200" b="1">
+                <a:solidFill>
+                  <a:srgbClr val="818CF8"/>
+                </a:solidFill>
+              </a:defRPr>
+            </a:pPr>
+            <a:r>
+              <a:t>🧏  DEAF CITIZEN</a:t>
+            </a:r>
+          </a:p>
+          <a:p>
+            <a:pPr>
+              <a:spcAft>
+                <a:spcPts val="200"/>
+              </a:spcAft>
+              <a:defRPr sz="1100">
+                <a:solidFill>
+                  <a:srgbClr val="D0D0D0"/>
+                </a:solidFill>
+              </a:defRPr>
+            </a:pPr>
+            <a:r>
+              <a:t>Walk in. Be understood. No notes. No waiting.</a:t>
             </a:r>
           </a:p>
         </p:txBody>
@@ -9068,14 +9677,14 @@
         </p:nvSpPr>
         <p:spPr>
           <a:xfrm>
-            <a:off x="731520" y="3749039"/>
-            <a:ext cx="5303520" cy="1463040"/>
+            <a:off x="6309360" y="1828800"/>
+            <a:ext cx="5212080" cy="1371600"/>
           </a:xfrm>
           <a:prstGeom prst="roundRect">
             <a:avLst/>
           </a:prstGeom>
           <a:solidFill>
-            <a:srgbClr val="141E30"/>
+            <a:srgbClr val="121C2E"/>
           </a:solidFill>
           <a:ln>
             <a:noFill/>
@@ -9096,51 +9705,36 @@
           </a:fontRef>
         </p:style>
         <p:txBody>
-          <a:bodyPr rtlCol="0" anchor="ctr" wrap="square" lIns="137160" rIns="137160" tIns="109728"/>
+          <a:bodyPr rtlCol="0" anchor="ctr" wrap="square" lIns="128016" rIns="109728" tIns="91440"/>
           <a:lstStyle/>
           <a:p>
             <a:pPr algn="ctr">
               <a:spcAft>
-                <a:spcPts val="600"/>
-              </a:spcAft>
-              <a:defRPr sz="1400" b="1">
-                <a:solidFill>
-                  <a:srgbClr val="FB923C"/>
-                </a:solidFill>
-              </a:defRPr>
-            </a:pPr>
-            <a:r>
-              <a:t>MUNICIPALITY</a:t>
-            </a:r>
-          </a:p>
-          <a:p>
-            <a:pPr>
-              <a:spcAft>
-                <a:spcPts val="300"/>
-              </a:spcAft>
-              <a:defRPr sz="1100">
-                <a:solidFill>
-                  <a:srgbClr val="94A3B8"/>
-                </a:solidFill>
-              </a:defRPr>
-            </a:pPr>
-            <a:r>
-              <a:t>Measurable accessibility compliance. Real-time dashboard.</a:t>
-            </a:r>
-          </a:p>
-          <a:p>
-            <a:pPr>
-              <a:spcAft>
-                <a:spcPts val="300"/>
-              </a:spcAft>
-              <a:defRPr sz="1100">
-                <a:solidFill>
-                  <a:srgbClr val="94A3B8"/>
-                </a:solidFill>
-              </a:defRPr>
-            </a:pPr>
-            <a:r>
-              <a:t>Assisted-citizen count tracked at every counter.</a:t>
+                <a:spcPts val="500"/>
+              </a:spcAft>
+              <a:defRPr sz="1200" b="1">
+                <a:solidFill>
+                  <a:srgbClr val="4ADE80"/>
+                </a:solidFill>
+              </a:defRPr>
+            </a:pPr>
+            <a:r>
+              <a:t>🧑‍💼  CLERK</a:t>
+            </a:r>
+          </a:p>
+          <a:p>
+            <a:pPr>
+              <a:spcAft>
+                <a:spcPts val="200"/>
+              </a:spcAft>
+              <a:defRPr sz="1100">
+                <a:solidFill>
+                  <a:srgbClr val="D0D0D0"/>
+                </a:solidFill>
+              </a:defRPr>
+            </a:pPr>
+            <a:r>
+              <a:t>30-sec service. 3-min habit. Champion badge.</a:t>
             </a:r>
           </a:p>
         </p:txBody>
@@ -9153,14 +9747,14 @@
         </p:nvSpPr>
         <p:spPr>
           <a:xfrm>
-            <a:off x="6309360" y="3749039"/>
-            <a:ext cx="5303520" cy="1463040"/>
+            <a:off x="731520" y="3474720"/>
+            <a:ext cx="5212080" cy="1371600"/>
           </a:xfrm>
           <a:prstGeom prst="roundRect">
             <a:avLst/>
           </a:prstGeom>
           <a:solidFill>
-            <a:srgbClr val="141E30"/>
+            <a:srgbClr val="121C2E"/>
           </a:solidFill>
           <a:ln>
             <a:noFill/>
@@ -9181,51 +9775,36 @@
           </a:fontRef>
         </p:style>
         <p:txBody>
-          <a:bodyPr rtlCol="0" anchor="ctr" wrap="square" lIns="137160" rIns="137160" tIns="109728"/>
+          <a:bodyPr rtlCol="0" anchor="ctr" wrap="square" lIns="128016" rIns="109728" tIns="91440"/>
           <a:lstStyle/>
           <a:p>
             <a:pPr algn="ctr">
               <a:spcAft>
-                <a:spcPts val="600"/>
-              </a:spcAft>
-              <a:defRPr sz="1400" b="1">
-                <a:solidFill>
-                  <a:srgbClr val="C9A961"/>
-                </a:solidFill>
-              </a:defRPr>
-            </a:pPr>
-            <a:r>
-              <a:t>NATION</a:t>
-            </a:r>
-          </a:p>
-          <a:p>
-            <a:pPr>
-              <a:spcAft>
-                <a:spcPts val="300"/>
-              </a:spcAft>
-              <a:defRPr sz="1100">
-                <a:solidFill>
-                  <a:srgbClr val="94A3B8"/>
-                </a:solidFill>
-              </a:defRPr>
-            </a:pPr>
-            <a:r>
-              <a:t>An ISL-trained workforce reaches every counter — not just</a:t>
-            </a:r>
-          </a:p>
-          <a:p>
-            <a:pPr>
-              <a:spcAft>
-                <a:spcPts val="300"/>
-              </a:spcAft>
-              <a:defRPr sz="1100">
-                <a:solidFill>
-                  <a:srgbClr val="94A3B8"/>
-                </a:solidFill>
-              </a:defRPr>
-            </a:pPr>
-            <a:r>
-              <a:t>the city. Truly inclusive governance at scale.</a:t>
+                <a:spcPts val="500"/>
+              </a:spcAft>
+              <a:defRPr sz="1200" b="1">
+                <a:solidFill>
+                  <a:srgbClr val="FB923C"/>
+                </a:solidFill>
+              </a:defRPr>
+            </a:pPr>
+            <a:r>
+              <a:t>🏛️  MUNICIPALITY</a:t>
+            </a:r>
+          </a:p>
+          <a:p>
+            <a:pPr>
+              <a:spcAft>
+                <a:spcPts val="200"/>
+              </a:spcAft>
+              <a:defRPr sz="1100">
+                <a:solidFill>
+                  <a:srgbClr val="D0D0D0"/>
+                </a:solidFill>
+              </a:defRPr>
+            </a:pPr>
+            <a:r>
+              <a:t>Real-time compliance dashboard. Assisted citizen count.</a:t>
             </a:r>
           </a:p>
         </p:txBody>
@@ -9238,14 +9817,84 @@
         </p:nvSpPr>
         <p:spPr>
           <a:xfrm>
-            <a:off x="2286000" y="5486400"/>
-            <a:ext cx="7589520" cy="731520"/>
+            <a:off x="6309360" y="3474720"/>
+            <a:ext cx="5212080" cy="1371600"/>
           </a:xfrm>
           <a:prstGeom prst="roundRect">
             <a:avLst/>
           </a:prstGeom>
           <a:solidFill>
-            <a:srgbClr val="141E30"/>
+            <a:srgbClr val="121C2E"/>
+          </a:solidFill>
+          <a:ln>
+            <a:noFill/>
+          </a:ln>
+        </p:spPr>
+        <p:style>
+          <a:lnRef idx="1">
+            <a:schemeClr val="accent1"/>
+          </a:lnRef>
+          <a:fillRef idx="3">
+            <a:schemeClr val="accent1"/>
+          </a:fillRef>
+          <a:effectRef idx="2">
+            <a:schemeClr val="accent1"/>
+          </a:effectRef>
+          <a:fontRef idx="minor">
+            <a:schemeClr val="lt1"/>
+          </a:fontRef>
+        </p:style>
+        <p:txBody>
+          <a:bodyPr rtlCol="0" anchor="ctr" wrap="square" lIns="128016" rIns="109728" tIns="91440"/>
+          <a:lstStyle/>
+          <a:p>
+            <a:pPr algn="ctr">
+              <a:spcAft>
+                <a:spcPts val="500"/>
+              </a:spcAft>
+              <a:defRPr sz="1200" b="1">
+                <a:solidFill>
+                  <a:srgbClr val="C9A961"/>
+                </a:solidFill>
+              </a:defRPr>
+            </a:pPr>
+            <a:r>
+              <a:t>🇮🇳  NATION</a:t>
+            </a:r>
+          </a:p>
+          <a:p>
+            <a:pPr>
+              <a:spcAft>
+                <a:spcPts val="200"/>
+              </a:spcAft>
+              <a:defRPr sz="1100">
+                <a:solidFill>
+                  <a:srgbClr val="D0D0D0"/>
+                </a:solidFill>
+              </a:defRPr>
+            </a:pPr>
+            <a:r>
+              <a:t>ISL-trained workforce at every counter. Inclusive governance.</a:t>
+            </a:r>
+          </a:p>
+        </p:txBody>
+      </p:sp>
+      <p:sp>
+        <p:nvSpPr>
+          <p:cNvPr id="10" name="Rounded Rectangle 9"/>
+          <p:cNvSpPr/>
+          <p:nvPr/>
+        </p:nvSpPr>
+        <p:spPr>
+          <a:xfrm>
+            <a:off x="1828800" y="5120640"/>
+            <a:ext cx="8503920" cy="914400"/>
+          </a:xfrm>
+          <a:prstGeom prst="roundRect">
+            <a:avLst/>
+          </a:prstGeom>
+          <a:solidFill>
+            <a:srgbClr val="121C2E"/>
           </a:solidFill>
           <a:ln w="12700">
             <a:solidFill>
@@ -9272,28 +9921,28 @@
           <a:lstStyle/>
           <a:p>
             <a:pPr algn="ctr">
-              <a:defRPr sz="1600" b="1">
+              <a:defRPr sz="1800" b="1">
                 <a:solidFill>
                   <a:srgbClr val="FFFFFF"/>
                 </a:solidFill>
               </a:defRPr>
             </a:pPr>
             <a:r>
-              <a:t>18 million deaf citizens × 3.5 million government clerks = One platform to bridge the gap.</a:t>
-            </a:r>
-          </a:p>
-        </p:txBody>
-      </p:sp>
-      <p:sp>
-        <p:nvSpPr>
-          <p:cNvPr id="10" name="TextBox 9"/>
+              <a:t>18M deaf citizens  ×  3.5M government clerks  =  ONE PLATFORM</a:t>
+            </a:r>
+          </a:p>
+        </p:txBody>
+      </p:sp>
+      <p:sp>
+        <p:nvSpPr>
+          <p:cNvPr id="11" name="TextBox 10"/>
           <p:cNvSpPr txBox="1"/>
           <p:nvPr/>
         </p:nvSpPr>
         <p:spPr>
           <a:xfrm>
-            <a:off x="457200" y="6400800"/>
-            <a:ext cx="10972800" cy="365760"/>
+            <a:off x="457200" y="6446520"/>
+            <a:ext cx="11247120" cy="274320"/>
           </a:xfrm>
           <a:prstGeom prst="rect">
             <a:avLst/>
@@ -9307,9 +9956,9 @@
           <a:lstStyle/>
           <a:p>
             <a:pPr algn="ctr">
-              <a:defRPr sz="900" b="0">
-                <a:solidFill>
-                  <a:srgbClr val="475569"/>
+              <a:defRPr sz="800" b="0">
+                <a:solidFill>
+                  <a:srgbClr val="505E72"/>
                 </a:solidFill>
               </a:defRPr>
             </a:pPr>
@@ -9353,8 +10002,8 @@
         </p:nvSpPr>
         <p:spPr>
           <a:xfrm>
-            <a:off x="731520" y="320040"/>
-            <a:ext cx="5486400" cy="274320"/>
+            <a:off x="731520" y="274320"/>
+            <a:ext cx="10972800" cy="256032"/>
           </a:xfrm>
           <a:prstGeom prst="rect">
             <a:avLst/>
@@ -9382,90 +10031,20 @@
       </p:sp>
       <p:sp>
         <p:nvSpPr>
-          <p:cNvPr id="3" name="TextBox 2"/>
-          <p:cNvSpPr txBox="1"/>
-          <p:nvPr/>
-        </p:nvSpPr>
-        <p:spPr>
-          <a:xfrm>
-            <a:off x="731520" y="640080"/>
-            <a:ext cx="10058400" cy="640080"/>
+          <p:cNvPr id="3" name="Rectangle 2"/>
+          <p:cNvSpPr/>
+          <p:nvPr/>
+        </p:nvSpPr>
+        <p:spPr>
+          <a:xfrm>
+            <a:off x="731520" y="566928"/>
+            <a:ext cx="1371600" cy="16459"/>
           </a:xfrm>
           <a:prstGeom prst="rect">
             <a:avLst/>
           </a:prstGeom>
-          <a:noFill/>
-        </p:spPr>
-        <p:txBody>
-          <a:bodyPr wrap="square">
-            <a:spAutoFit/>
-          </a:bodyPr>
-          <a:lstStyle/>
-          <a:p>
-            <a:pPr algn="l">
-              <a:defRPr sz="3400" b="1">
-                <a:solidFill>
-                  <a:srgbClr val="FFFFFF"/>
-                </a:solidFill>
-              </a:defRPr>
-            </a:pPr>
-            <a:r>
-              <a:t>Built for the municipal counter, not the classroom.</a:t>
-            </a:r>
-          </a:p>
-        </p:txBody>
-      </p:sp>
-      <p:sp>
-        <p:nvSpPr>
-          <p:cNvPr id="4" name="TextBox 3"/>
-          <p:cNvSpPr txBox="1"/>
-          <p:nvPr/>
-        </p:nvSpPr>
-        <p:spPr>
-          <a:xfrm>
-            <a:off x="731520" y="1234440"/>
-            <a:ext cx="10058400" cy="457200"/>
-          </a:xfrm>
-          <a:prstGeom prst="rect">
-            <a:avLst/>
-          </a:prstGeom>
-          <a:noFill/>
-        </p:spPr>
-        <p:txBody>
-          <a:bodyPr wrap="square">
-            <a:spAutoFit/>
-          </a:bodyPr>
-          <a:lstStyle/>
-          <a:p>
-            <a:pPr algn="l">
-              <a:defRPr sz="1400" b="0">
-                <a:solidFill>
-                  <a:srgbClr val="94A3B8"/>
-                </a:solidFill>
-              </a:defRPr>
-            </a:pPr>
-            <a:r>
-              <a:t>The first end-to-end ISL accessibility platform for Indian government clerks.</a:t>
-            </a:r>
-          </a:p>
-        </p:txBody>
-      </p:sp>
-      <p:sp>
-        <p:nvSpPr>
-          <p:cNvPr id="5" name="Rounded Rectangle 4"/>
-          <p:cNvSpPr/>
-          <p:nvPr/>
-        </p:nvSpPr>
-        <p:spPr>
-          <a:xfrm>
-            <a:off x="731520" y="2011680"/>
-            <a:ext cx="5303520" cy="2286000"/>
-          </a:xfrm>
-          <a:prstGeom prst="roundRect">
-            <a:avLst/>
-          </a:prstGeom>
           <a:solidFill>
-            <a:srgbClr val="141E30"/>
+            <a:srgbClr val="C9A961"/>
           </a:solidFill>
           <a:ln>
             <a:noFill/>
@@ -9486,81 +10065,79 @@
           </a:fontRef>
         </p:style>
         <p:txBody>
-          <a:bodyPr rtlCol="0" anchor="ctr" wrap="square" lIns="137160" rIns="137160" tIns="109728"/>
-          <a:lstStyle/>
-          <a:p>
-            <a:pPr algn="ctr">
-              <a:spcAft>
-                <a:spcPts val="600"/>
-              </a:spcAft>
-              <a:defRPr sz="1400" b="1">
-                <a:solidFill>
-                  <a:srgbClr val="818CF8"/>
-                </a:solidFill>
-              </a:defRPr>
-            </a:pPr>
-            <a:r>
-              <a:t>DIFFERENT BY DESIGN</a:t>
-            </a:r>
-          </a:p>
-          <a:p>
-            <a:pPr>
-              <a:spcAft>
-                <a:spcPts val="300"/>
-              </a:spcAft>
-              <a:defRPr sz="1100">
-                <a:solidFill>
-                  <a:srgbClr val="94A3B8"/>
-                </a:solidFill>
-              </a:defRPr>
-            </a:pPr>
-            <a:r>
-              <a:t>→  Municipal vocabulary (Bill, Tax, Certificate, Complaint)</a:t>
-            </a:r>
-          </a:p>
-          <a:p>
-            <a:pPr>
-              <a:spcAft>
-                <a:spcPts val="300"/>
-              </a:spcAft>
-              <a:defRPr sz="1100">
-                <a:solidFill>
-                  <a:srgbClr val="94A3B8"/>
-                </a:solidFill>
-              </a:defRPr>
-            </a:pPr>
-            <a:r>
-              <a:t>→  Clerk-facing chat UI with ISL symbol chips + TTS</a:t>
-            </a:r>
-          </a:p>
-          <a:p>
-            <a:pPr>
-              <a:spcAft>
-                <a:spcPts val="300"/>
-              </a:spcAft>
-              <a:defRPr sz="1100">
-                <a:solidFill>
-                  <a:srgbClr val="94A3B8"/>
-                </a:solidFill>
-              </a:defRPr>
-            </a:pPr>
-            <a:r>
-              <a:t>→  kNN classifier — trainable per user, no ML infra</a:t>
-            </a:r>
-          </a:p>
-          <a:p>
-            <a:pPr>
-              <a:spcAft>
-                <a:spcPts val="300"/>
-              </a:spcAft>
-              <a:defRPr sz="1100">
-                <a:solidFill>
-                  <a:srgbClr val="94A3B8"/>
-                </a:solidFill>
-              </a:defRPr>
-            </a:pPr>
-            <a:r>
-              <a:t>→  Two-way: Sign → Text → ISL Symbols → TTS</a:t>
+          <a:bodyPr rtlCol="0" anchor="ctr"/>
+          <a:lstStyle/>
+          <a:p>
+            <a:pPr algn="ctr"/>
+          </a:p>
+        </p:txBody>
+      </p:sp>
+      <p:sp>
+        <p:nvSpPr>
+          <p:cNvPr id="4" name="TextBox 3"/>
+          <p:cNvSpPr txBox="1"/>
+          <p:nvPr/>
+        </p:nvSpPr>
+        <p:spPr>
+          <a:xfrm>
+            <a:off x="731520" y="658368"/>
+            <a:ext cx="10972800" cy="548640"/>
+          </a:xfrm>
+          <a:prstGeom prst="rect">
+            <a:avLst/>
+          </a:prstGeom>
+          <a:noFill/>
+        </p:spPr>
+        <p:txBody>
+          <a:bodyPr wrap="square">
+            <a:spAutoFit/>
+          </a:bodyPr>
+          <a:lstStyle/>
+          <a:p>
+            <a:pPr algn="l">
+              <a:defRPr sz="3200" b="1">
+                <a:solidFill>
+                  <a:srgbClr val="FFFFFF"/>
+                </a:solidFill>
+              </a:defRPr>
+            </a:pPr>
+            <a:r>
+              <a:t>Built for the municipal counter, not the classroom.</a:t>
+            </a:r>
+          </a:p>
+        </p:txBody>
+      </p:sp>
+      <p:sp>
+        <p:nvSpPr>
+          <p:cNvPr id="5" name="TextBox 4"/>
+          <p:cNvSpPr txBox="1"/>
+          <p:nvPr/>
+        </p:nvSpPr>
+        <p:spPr>
+          <a:xfrm>
+            <a:off x="731520" y="1188720"/>
+            <a:ext cx="10972800" cy="320040"/>
+          </a:xfrm>
+          <a:prstGeom prst="rect">
+            <a:avLst/>
+          </a:prstGeom>
+          <a:noFill/>
+        </p:spPr>
+        <p:txBody>
+          <a:bodyPr wrap="square">
+            <a:spAutoFit/>
+          </a:bodyPr>
+          <a:lstStyle/>
+          <a:p>
+            <a:pPr algn="l">
+              <a:defRPr sz="1300" b="0">
+                <a:solidFill>
+                  <a:srgbClr val="8896AA"/>
+                </a:solidFill>
+              </a:defRPr>
+            </a:pPr>
+            <a:r>
+              <a:t>The first end-to-end ISL accessibility platform for Indian government clerks.</a:t>
             </a:r>
           </a:p>
         </p:txBody>
@@ -9573,14 +10150,14 @@
         </p:nvSpPr>
         <p:spPr>
           <a:xfrm>
-            <a:off x="6309360" y="2011680"/>
-            <a:ext cx="5303520" cy="2286000"/>
+            <a:off x="731520" y="1828800"/>
+            <a:ext cx="5212080" cy="2103120"/>
           </a:xfrm>
           <a:prstGeom prst="roundRect">
             <a:avLst/>
           </a:prstGeom>
           <a:solidFill>
-            <a:srgbClr val="141E30"/>
+            <a:srgbClr val="121C2E"/>
           </a:solidFill>
           <a:ln>
             <a:noFill/>
@@ -9601,81 +10178,93 @@
           </a:fontRef>
         </p:style>
         <p:txBody>
-          <a:bodyPr rtlCol="0" anchor="ctr" wrap="square" lIns="137160" rIns="137160" tIns="109728"/>
+          <a:bodyPr rtlCol="0" anchor="ctr" wrap="square" lIns="128016" rIns="109728" tIns="91440"/>
           <a:lstStyle/>
           <a:p>
             <a:pPr algn="ctr">
               <a:spcAft>
-                <a:spcPts val="600"/>
-              </a:spcAft>
-              <a:defRPr sz="1400" b="1">
-                <a:solidFill>
-                  <a:srgbClr val="FB923C"/>
-                </a:solidFill>
-              </a:defRPr>
-            </a:pPr>
-            <a:r>
-              <a:t>WHAT MAKES US UNIQUE</a:t>
-            </a:r>
-          </a:p>
-          <a:p>
-            <a:pPr>
-              <a:spcAft>
-                <a:spcPts val="300"/>
-              </a:spcAft>
-              <a:defRPr sz="1100">
-                <a:solidFill>
-                  <a:srgbClr val="94A3B8"/>
-                </a:solidFill>
-              </a:defRPr>
-            </a:pPr>
-            <a:r>
-              <a:t>→  Real-time webcam + MediaPipe + kNN in-browser</a:t>
-            </a:r>
-          </a:p>
-          <a:p>
-            <a:pPr>
-              <a:spcAft>
-                <a:spcPts val="300"/>
-              </a:spcAft>
-              <a:defRPr sz="1100">
-                <a:solidFill>
-                  <a:srgbClr val="94A3B8"/>
-                </a:solidFill>
-              </a:defRPr>
-            </a:pPr>
-            <a:r>
-              <a:t>→  Citizen feedback QR loop for compliance verification</a:t>
-            </a:r>
-          </a:p>
-          <a:p>
-            <a:pPr>
-              <a:spcAft>
-                <a:spcPts val="300"/>
-              </a:spcAft>
-              <a:defRPr sz="1100">
-                <a:solidFill>
-                  <a:srgbClr val="94A3B8"/>
-                </a:solidFill>
-              </a:defRPr>
-            </a:pPr>
-            <a:r>
-              <a:t>→  Live human interpreter relay when AI fails</a:t>
-            </a:r>
-          </a:p>
-          <a:p>
-            <a:pPr>
-              <a:spcAft>
-                <a:spcPts val="300"/>
-              </a:spcAft>
-              <a:defRPr sz="1100">
-                <a:solidFill>
-                  <a:srgbClr val="94A3B8"/>
-                </a:solidFill>
-              </a:defRPr>
-            </a:pPr>
-            <a:r>
-              <a:t>→  Offline-first PWA for low-connectivity areas</a:t>
+                <a:spcPts val="500"/>
+              </a:spcAft>
+              <a:defRPr sz="1200" b="1">
+                <a:solidFill>
+                  <a:srgbClr val="818CF8"/>
+                </a:solidFill>
+              </a:defRPr>
+            </a:pPr>
+            <a:r>
+              <a:t>DIFFERENT BY DESIGN</a:t>
+            </a:r>
+          </a:p>
+          <a:p>
+            <a:pPr>
+              <a:spcAft>
+                <a:spcPts val="200"/>
+              </a:spcAft>
+              <a:defRPr sz="1100">
+                <a:solidFill>
+                  <a:srgbClr val="D0D0D0"/>
+                </a:solidFill>
+              </a:defRPr>
+            </a:pPr>
+          </a:p>
+          <a:p>
+            <a:pPr>
+              <a:spcAft>
+                <a:spcPts val="200"/>
+              </a:spcAft>
+              <a:defRPr sz="1100">
+                <a:solidFill>
+                  <a:srgbClr val="D0D0D0"/>
+                </a:solidFill>
+              </a:defRPr>
+            </a:pPr>
+            <a:r>
+              <a:t>→  Municipal vocabulary (Bill, Tax, Certificate)</a:t>
+            </a:r>
+          </a:p>
+          <a:p>
+            <a:pPr>
+              <a:spcAft>
+                <a:spcPts val="200"/>
+              </a:spcAft>
+              <a:defRPr sz="1100">
+                <a:solidFill>
+                  <a:srgbClr val="D0D0D0"/>
+                </a:solidFill>
+              </a:defRPr>
+            </a:pPr>
+            <a:r>
+              <a:t>→  Clerk chat UI + ISL chips + TTS</a:t>
+            </a:r>
+          </a:p>
+          <a:p>
+            <a:pPr>
+              <a:spcAft>
+                <a:spcPts val="200"/>
+              </a:spcAft>
+              <a:defRPr sz="1100">
+                <a:solidFill>
+                  <a:srgbClr val="D0D0D0"/>
+                </a:solidFill>
+              </a:defRPr>
+            </a:pPr>
+            <a:r>
+              <a:t>→  kNN — trainable per user</a:t>
+            </a:r>
+          </a:p>
+          <a:p>
+            <a:pPr>
+              <a:spcAft>
+                <a:spcPts val="200"/>
+              </a:spcAft>
+              <a:defRPr sz="1100">
+                <a:solidFill>
+                  <a:srgbClr val="D0D0D0"/>
+                </a:solidFill>
+              </a:defRPr>
+            </a:pPr>
+            <a:r>
+              <a:t>→  Two-way: Sign → Text → ISL → Voice</a:t>
             </a:r>
           </a:p>
         </p:txBody>
@@ -9688,14 +10277,141 @@
         </p:nvSpPr>
         <p:spPr>
           <a:xfrm>
-            <a:off x="731520" y="4754880"/>
-            <a:ext cx="10789920" cy="1188720"/>
+            <a:off x="6309360" y="1828800"/>
+            <a:ext cx="5212080" cy="2103120"/>
           </a:xfrm>
           <a:prstGeom prst="roundRect">
             <a:avLst/>
           </a:prstGeom>
           <a:solidFill>
-            <a:srgbClr val="141E30"/>
+            <a:srgbClr val="121C2E"/>
+          </a:solidFill>
+          <a:ln>
+            <a:noFill/>
+          </a:ln>
+        </p:spPr>
+        <p:style>
+          <a:lnRef idx="1">
+            <a:schemeClr val="accent1"/>
+          </a:lnRef>
+          <a:fillRef idx="3">
+            <a:schemeClr val="accent1"/>
+          </a:fillRef>
+          <a:effectRef idx="2">
+            <a:schemeClr val="accent1"/>
+          </a:effectRef>
+          <a:fontRef idx="minor">
+            <a:schemeClr val="lt1"/>
+          </a:fontRef>
+        </p:style>
+        <p:txBody>
+          <a:bodyPr rtlCol="0" anchor="ctr" wrap="square" lIns="128016" rIns="109728" tIns="91440"/>
+          <a:lstStyle/>
+          <a:p>
+            <a:pPr algn="ctr">
+              <a:spcAft>
+                <a:spcPts val="500"/>
+              </a:spcAft>
+              <a:defRPr sz="1200" b="1">
+                <a:solidFill>
+                  <a:srgbClr val="FB923C"/>
+                </a:solidFill>
+              </a:defRPr>
+            </a:pPr>
+            <a:r>
+              <a:t>WHAT MAKES US UNIQUE</a:t>
+            </a:r>
+          </a:p>
+          <a:p>
+            <a:pPr>
+              <a:spcAft>
+                <a:spcPts val="200"/>
+              </a:spcAft>
+              <a:defRPr sz="1100">
+                <a:solidFill>
+                  <a:srgbClr val="D0D0D0"/>
+                </a:solidFill>
+              </a:defRPr>
+            </a:pPr>
+          </a:p>
+          <a:p>
+            <a:pPr>
+              <a:spcAft>
+                <a:spcPts val="200"/>
+              </a:spcAft>
+              <a:defRPr sz="1100">
+                <a:solidFill>
+                  <a:srgbClr val="D0D0D0"/>
+                </a:solidFill>
+              </a:defRPr>
+            </a:pPr>
+            <a:r>
+              <a:t>→  Webcam + MediaPipe + kNN in-browser</a:t>
+            </a:r>
+          </a:p>
+          <a:p>
+            <a:pPr>
+              <a:spcAft>
+                <a:spcPts val="200"/>
+              </a:spcAft>
+              <a:defRPr sz="1100">
+                <a:solidFill>
+                  <a:srgbClr val="D0D0D0"/>
+                </a:solidFill>
+              </a:defRPr>
+            </a:pPr>
+            <a:r>
+              <a:t>→  QR feedback loop for compliance</a:t>
+            </a:r>
+          </a:p>
+          <a:p>
+            <a:pPr>
+              <a:spcAft>
+                <a:spcPts val="200"/>
+              </a:spcAft>
+              <a:defRPr sz="1100">
+                <a:solidFill>
+                  <a:srgbClr val="D0D0D0"/>
+                </a:solidFill>
+              </a:defRPr>
+            </a:pPr>
+            <a:r>
+              <a:t>→  Live human interpreter relay</a:t>
+            </a:r>
+          </a:p>
+          <a:p>
+            <a:pPr>
+              <a:spcAft>
+                <a:spcPts val="200"/>
+              </a:spcAft>
+              <a:defRPr sz="1100">
+                <a:solidFill>
+                  <a:srgbClr val="D0D0D0"/>
+                </a:solidFill>
+              </a:defRPr>
+            </a:pPr>
+            <a:r>
+              <a:t>→  Offline-first PWA</a:t>
+            </a:r>
+          </a:p>
+        </p:txBody>
+      </p:sp>
+      <p:sp>
+        <p:nvSpPr>
+          <p:cNvPr id="8" name="Rounded Rectangle 7"/>
+          <p:cNvSpPr/>
+          <p:nvPr/>
+        </p:nvSpPr>
+        <p:spPr>
+          <a:xfrm>
+            <a:off x="731520" y="4297680"/>
+            <a:ext cx="10789920" cy="1645920"/>
+          </a:xfrm>
+          <a:prstGeom prst="roundRect">
+            <a:avLst/>
+          </a:prstGeom>
+          <a:solidFill>
+            <a:srgbClr val="121C2E"/>
           </a:solidFill>
           <a:ln w="12700">
             <a:solidFill>
@@ -9718,32 +10434,56 @@
           </a:fontRef>
         </p:style>
         <p:txBody>
-          <a:bodyPr rtlCol="0" anchor="ctr" wrap="square" lIns="274320"/>
+          <a:bodyPr rtlCol="0" anchor="ctr" wrap="square" lIns="274320" tIns="137160"/>
           <a:lstStyle/>
           <a:p>
             <a:pPr algn="ctr">
-              <a:defRPr sz="1400" i="1">
-                <a:solidFill>
-                  <a:srgbClr val="E0E0E0"/>
-                </a:solidFill>
-              </a:defRPr>
-            </a:pPr>
-            <a:r>
-              <a:t>"Not just an ASL translator. Not just a learning app. The first end-to-end ISL accessibility platform for Indian government clerks — 6 Lakh of them, where the counter IS the government."</a:t>
-            </a:r>
-          </a:p>
-        </p:txBody>
-      </p:sp>
-      <p:sp>
-        <p:nvSpPr>
-          <p:cNvPr id="8" name="TextBox 7"/>
+              <a:defRPr sz="1500" i="1">
+                <a:solidFill>
+                  <a:srgbClr val="D0D0D0"/>
+                </a:solidFill>
+              </a:defRPr>
+            </a:pPr>
+            <a:r>
+              <a:t>"Not just an ASL translator. Not just a learning app.</a:t>
+            </a:r>
+          </a:p>
+          <a:p>
+            <a:pPr algn="ctr">
+              <a:defRPr sz="1500" i="1">
+                <a:solidFill>
+                  <a:srgbClr val="D0D0D0"/>
+                </a:solidFill>
+              </a:defRPr>
+            </a:pPr>
+            <a:r>
+              <a:t>The first end-to-end ISL accessibility platform for Indian government clerks —</a:t>
+            </a:r>
+          </a:p>
+          <a:p>
+            <a:pPr algn="ctr">
+              <a:defRPr sz="1500" i="1" b="1">
+                <a:solidFill>
+                  <a:srgbClr val="C9A961"/>
+                </a:solidFill>
+              </a:defRPr>
+            </a:pPr>
+            <a:r>
+              <a:t>6 Lakh counters, where the counter IS the government."</a:t>
+            </a:r>
+          </a:p>
+        </p:txBody>
+      </p:sp>
+      <p:sp>
+        <p:nvSpPr>
+          <p:cNvPr id="9" name="TextBox 8"/>
           <p:cNvSpPr txBox="1"/>
           <p:nvPr/>
         </p:nvSpPr>
         <p:spPr>
           <a:xfrm>
-            <a:off x="457200" y="6400800"/>
-            <a:ext cx="10972800" cy="365760"/>
+            <a:off x="457200" y="6446520"/>
+            <a:ext cx="11247120" cy="274320"/>
           </a:xfrm>
           <a:prstGeom prst="rect">
             <a:avLst/>
@@ -9757,9 +10497,9 @@
           <a:lstStyle/>
           <a:p>
             <a:pPr algn="ctr">
-              <a:defRPr sz="900" b="0">
-                <a:solidFill>
-                  <a:srgbClr val="475569"/>
+              <a:defRPr sz="800" b="0">
+                <a:solidFill>
+                  <a:srgbClr val="505E72"/>
                 </a:solidFill>
               </a:defRPr>
             </a:pPr>
